--- a/en/week-8/cen429-week-8-sunum.pptx
+++ b/en/week-8/cen429-week-8-sunum.pptx
@@ -33,16 +33,6 @@
     <p:sldId id="281" r:id="rId33"/>
     <p:sldId id="282" r:id="rId34"/>
     <p:sldId id="283" r:id="rId35"/>
-    <p:sldId id="284" r:id="rId36"/>
-    <p:sldId id="285" r:id="rId37"/>
-    <p:sldId id="286" r:id="rId38"/>
-    <p:sldId id="287" r:id="rId39"/>
-    <p:sldId id="288" r:id="rId40"/>
-    <p:sldId id="289" r:id="rId41"/>
-    <p:sldId id="290" r:id="rId42"/>
-    <p:sldId id="291" r:id="rId43"/>
-    <p:sldId id="292" r:id="rId44"/>
-    <p:sldId id="293" r:id="rId45"/>
   </p:sldIdLst>
   <p:sldSz cx="12191695" cy="6858000" type="screen4x3"/>
   <p:notesSz cx="6858000" cy="9144000"/>
@@ -679,7 +669,7 @@
           <a:lstStyle/>
           <a:p>
             <a:r>
-              <a:t>Speaker note: 1) SQL injection → use a PreparedStatement. 2) The plaintext is used before the tag is verified, and the return value of Final is never checked. 3) Fail-open: the error is swallowed and the connection is accepted.</a:t>
+              <a:t>Speaker note: 1) SQL injection; the definitive fix is a parameterised query (PreparedStatement) — data is never interpreted as a command, no string concatenation. 2) The plaintext is used before the tag is verified, and the return value of Final is never checked. 3) Fail-open: the error is swallowed and the connection is accepted.</a:t>
             </a:r>
           </a:p>
         </p:txBody>
@@ -750,76 +740,6 @@
           <a:p>
             <a:r>
               <a:t>Speaker note: Answers are on the Week 8 page, in collapsible boxes.</a:t>
-            </a:r>
-          </a:p>
-        </p:txBody>
-      </p:sp>
-      <p:sp>
-        <p:nvSpPr>
-          <p:cNvPr id="4" name="Slide Number Placeholder 3"/>
-          <p:cNvSpPr>
-            <a:spLocks noGrp="1"/>
-          </p:cNvSpPr>
-          <p:nvPr>
-            <p:ph type="sldNum" idx="5" sz="quarter"/>
-          </p:nvPr>
-        </p:nvSpPr>
-        <p:spPr/>
-      </p:sp>
-    </p:spTree>
-  </p:cSld>
-  <p:clrMapOvr>
-    <a:masterClrMapping/>
-  </p:clrMapOvr>
-</p:notes>
-</file>
-
-<file path=ppt/notesSlides/notesSlide5.xml><?xml version="1.0" encoding="utf-8"?>
-<p:notes xmlns:a="http://schemas.openxmlformats.org/drawingml/2006/main" xmlns:p="http://schemas.openxmlformats.org/presentationml/2006/main" xmlns:r="http://schemas.openxmlformats.org/officeDocument/2006/relationships">
-  <p:cSld>
-    <p:spTree>
-      <p:nvGrpSpPr>
-        <p:cNvPr id="1" name=""/>
-        <p:cNvGrpSpPr/>
-        <p:nvPr/>
-      </p:nvGrpSpPr>
-      <p:grpSpPr>
-        <a:xfrm>
-          <a:off x="0" y="0"/>
-          <a:ext cx="0" cy="0"/>
-          <a:chOff x="0" y="0"/>
-          <a:chExt cx="0" cy="0"/>
-        </a:xfrm>
-      </p:grpSpPr>
-      <p:sp>
-        <p:nvSpPr>
-          <p:cNvPr id="2" name="Slide Image Placeholder 1"/>
-          <p:cNvSpPr>
-            <a:spLocks noGrp="1"/>
-          </p:cNvSpPr>
-          <p:nvPr>
-            <p:ph type="sldImg" idx="2"/>
-          </p:nvPr>
-        </p:nvSpPr>
-        <p:spPr/>
-      </p:sp>
-      <p:sp>
-        <p:nvSpPr>
-          <p:cNvPr id="3" name="Notes Placeholder 2"/>
-          <p:cNvSpPr>
-            <a:spLocks noGrp="1"/>
-          </p:cNvSpPr>
-          <p:nvPr>
-            <p:ph type="body" idx="3" sz="quarter"/>
-          </p:nvPr>
-        </p:nvSpPr>
-        <p:spPr/>
-        <p:txBody>
-          <a:bodyPr/>
-          <a:lstStyle/>
-          <a:p>
-            <a:r>
-              <a:t>Speaker note: Quiz-1 covers weeks 1-6. We review each week's key points and the most commonly confused distinctions.</a:t>
             </a:r>
           </a:p>
         </p:txBody>
@@ -4740,14 +4660,14 @@
                   <a:srgbClr val="006D77"/>
                 </a:solidFill>
               </a:rPr>
-              <a:t>Study Plan — Diagram</a:t>
+              <a:t>Midterm Grade Calculation — Diagram</a:t>
             </a:r>
           </a:p>
         </p:txBody>
       </p:sp>
       <p:pic>
         <p:nvPicPr>
-          <p:cNvPr id="7" name="Picture 6" descr="h08-04-calisma-plani.png"/>
+          <p:cNvPr id="7" name="Picture 6" descr="h08-03-vize-hesabi.png"/>
           <p:cNvPicPr>
             <a:picLocks noChangeAspect="1"/>
           </p:cNvPicPr>
@@ -4761,8 +4681,8 @@
         </p:blipFill>
         <p:spPr>
           <a:xfrm>
-            <a:off x="2046645" y="1325880"/>
-            <a:ext cx="8098404" cy="3864472"/>
+            <a:off x="640080" y="1325880"/>
+            <a:ext cx="10911535" cy="3794094"/>
           </a:xfrm>
           <a:prstGeom prst="rect">
             <a:avLst/>
@@ -4934,184 +4854,40 @@
           <a:lstStyle/>
           <a:p>
             <a:r>
-              <a:rPr sz="2600" b="1">
+              <a:rPr sz="3000" b="1">
                 <a:solidFill>
                   <a:srgbClr val="006D77"/>
                 </a:solidFill>
               </a:rPr>
-              <a:t>Example: Find the Bug (1)</a:t>
-            </a:r>
-          </a:p>
-        </p:txBody>
-      </p:sp>
-      <p:sp>
-        <p:nvSpPr>
-          <p:cNvPr id="7" name="Rectangle 6"/>
-          <p:cNvSpPr/>
-          <p:nvPr/>
-        </p:nvSpPr>
+              <a:t>Study Plan — Diagram</a:t>
+            </a:r>
+          </a:p>
+        </p:txBody>
+      </p:sp>
+      <p:pic>
+        <p:nvPicPr>
+          <p:cNvPr id="7" name="Picture 6" descr="h08-04-calisma-plani.png"/>
+          <p:cNvPicPr>
+            <a:picLocks noChangeAspect="1"/>
+          </p:cNvPicPr>
+          <p:nvPr/>
+        </p:nvPicPr>
+        <p:blipFill>
+          <a:blip r:embed="rId3"/>
+          <a:stretch>
+            <a:fillRect/>
+          </a:stretch>
+        </p:blipFill>
         <p:spPr>
           <a:xfrm>
             <a:off x="640080" y="1325880"/>
-            <a:ext cx="10911535" cy="1124712"/>
-          </a:xfrm>
-          <a:prstGeom prst="rect">
-            <a:avLst/>
-          </a:prstGeom>
-          <a:solidFill>
-            <a:srgbClr val="F3F4F6"/>
-          </a:solidFill>
-          <a:ln>
-            <a:solidFill>
-              <a:srgbClr val="D9DEE3"/>
-            </a:solidFill>
-          </a:ln>
-        </p:spPr>
-        <p:style>
-          <a:lnRef idx="1">
-            <a:schemeClr val="accent1"/>
-          </a:lnRef>
-          <a:fillRef idx="3">
-            <a:schemeClr val="accent1"/>
-          </a:fillRef>
-          <a:effectRef idx="2">
-            <a:schemeClr val="accent1"/>
-          </a:effectRef>
-          <a:fontRef idx="minor">
-            <a:schemeClr val="lt1"/>
-          </a:fontRef>
-        </p:style>
-        <p:txBody>
-          <a:bodyPr rtlCol="0" anchor="t" wrap="none" lIns="137160" rIns="137160" tIns="91440" bIns="91440"/>
-          <a:lstStyle/>
-          <a:p>
-            <a:pPr algn="l"/>
-            <a:r>
-              <a:rPr sz="1116">
-                <a:solidFill>
-                  <a:srgbClr val="1F2D3A"/>
-                </a:solidFill>
-                <a:latin typeface="Consolas"/>
-              </a:rPr>
-              <a:t>void kaydet(const char *ad) {</a:t>
-            </a:r>
-          </a:p>
-          <a:p>
-            <a:pPr algn="l"/>
-            <a:r>
-              <a:rPr sz="1116">
-                <a:solidFill>
-                  <a:srgbClr val="1F2D3A"/>
-                </a:solidFill>
-                <a:latin typeface="Consolas"/>
-              </a:rPr>
-              <a:t>    char tampon[32];</a:t>
-            </a:r>
-          </a:p>
-          <a:p>
-            <a:pPr algn="l"/>
-            <a:r>
-              <a:rPr sz="1116">
-                <a:solidFill>
-                  <a:srgbClr val="1F2D3A"/>
-                </a:solidFill>
-                <a:latin typeface="Consolas"/>
-              </a:rPr>
-              <a:t>    sprintf(tampon, "kullanici=%s", ad);</a:t>
-            </a:r>
-          </a:p>
-          <a:p>
-            <a:pPr algn="l"/>
-            <a:r>
-              <a:rPr sz="1116">
-                <a:solidFill>
-                  <a:srgbClr val="1F2D3A"/>
-                </a:solidFill>
-                <a:latin typeface="Consolas"/>
-              </a:rPr>
-              <a:t>    syslog(LOG_INFO, tampon);</a:t>
-            </a:r>
-          </a:p>
-          <a:p>
-            <a:pPr algn="l"/>
-            <a:r>
-              <a:rPr sz="1116">
-                <a:solidFill>
-                  <a:srgbClr val="1F2D3A"/>
-                </a:solidFill>
-                <a:latin typeface="Consolas"/>
-              </a:rPr>
-              <a:t>}</a:t>
-            </a:r>
-          </a:p>
-        </p:txBody>
-      </p:sp>
-      <p:sp>
-        <p:nvSpPr>
-          <p:cNvPr id="8" name="Rectangle 7"/>
-          <p:cNvSpPr/>
-          <p:nvPr/>
-        </p:nvSpPr>
-        <p:spPr>
-          <a:xfrm>
-            <a:off x="640080" y="2560320"/>
-            <a:ext cx="10911535" cy="614476"/>
-          </a:xfrm>
-          <a:prstGeom prst="rect">
-            <a:avLst/>
-          </a:prstGeom>
-          <a:solidFill>
-            <a:srgbClr val="F3F4F6"/>
-          </a:solidFill>
-          <a:ln>
-            <a:solidFill>
-              <a:srgbClr val="D9DEE3"/>
-            </a:solidFill>
-          </a:ln>
-        </p:spPr>
-        <p:style>
-          <a:lnRef idx="1">
-            <a:schemeClr val="accent1"/>
-          </a:lnRef>
-          <a:fillRef idx="3">
-            <a:schemeClr val="accent1"/>
-          </a:fillRef>
-          <a:effectRef idx="2">
-            <a:schemeClr val="accent1"/>
-          </a:effectRef>
-          <a:fontRef idx="minor">
-            <a:schemeClr val="lt1"/>
-          </a:fontRef>
-        </p:style>
-        <p:txBody>
-          <a:bodyPr rtlCol="0" anchor="t" wrap="none" lIns="137160" rIns="137160" tIns="91440" bIns="91440"/>
-          <a:lstStyle/>
-          <a:p>
-            <a:pPr algn="l"/>
-            <a:r>
-              <a:rPr sz="1116">
-                <a:solidFill>
-                  <a:srgbClr val="1F2D3A"/>
-                </a:solidFill>
-                <a:latin typeface="Consolas"/>
-              </a:rPr>
-              <a:t>char parola[64];  oku(parola, sizeof parola);  dogrula(parola);</a:t>
-            </a:r>
-          </a:p>
-          <a:p>
-            <a:pPr algn="l"/>
-            <a:r>
-              <a:rPr sz="1116">
-                <a:solidFill>
-                  <a:srgbClr val="1F2D3A"/>
-                </a:solidFill>
-                <a:latin typeface="Consolas"/>
-              </a:rPr>
-              <a:t>memset(parola, 0, sizeof parola);  return;</a:t>
-            </a:r>
-          </a:p>
-        </p:txBody>
-      </p:sp>
+            <a:ext cx="10911535" cy="2445324"/>
+          </a:xfrm>
+          <a:prstGeom prst="rect">
+            <a:avLst/>
+          </a:prstGeom>
+        </p:spPr>
+      </p:pic>
     </p:spTree>
   </p:cSld>
   <p:clrMapOvr>
@@ -5277,198 +5053,88 @@
           <a:lstStyle/>
           <a:p>
             <a:r>
-              <a:rPr sz="2600" b="1">
+              <a:rPr sz="3000" b="1">
                 <a:solidFill>
                   <a:srgbClr val="006D77"/>
                 </a:solidFill>
               </a:rPr>
-              <a:t>Example: Find the Bug (2)</a:t>
-            </a:r>
-          </a:p>
-        </p:txBody>
-      </p:sp>
-      <p:sp>
-        <p:nvSpPr>
-          <p:cNvPr id="7" name="Rectangle 6"/>
-          <p:cNvSpPr/>
+              <a:t>Question 1</a:t>
+            </a:r>
+          </a:p>
+        </p:txBody>
+      </p:sp>
+      <p:sp>
+        <p:nvSpPr>
+          <p:cNvPr id="7" name="TextBox 6"/>
+          <p:cNvSpPr txBox="1"/>
           <p:nvPr/>
         </p:nvSpPr>
         <p:spPr>
           <a:xfrm>
             <a:off x="640080" y="1325880"/>
-            <a:ext cx="10911535" cy="444398"/>
-          </a:xfrm>
-          <a:prstGeom prst="rect">
-            <a:avLst/>
-          </a:prstGeom>
-          <a:solidFill>
-            <a:srgbClr val="F3F4F6"/>
-          </a:solidFill>
-          <a:ln>
-            <a:solidFill>
-              <a:srgbClr val="D9DEE3"/>
-            </a:solidFill>
-          </a:ln>
-        </p:spPr>
-        <p:style>
-          <a:lnRef idx="1">
-            <a:schemeClr val="accent1"/>
-          </a:lnRef>
-          <a:fillRef idx="3">
-            <a:schemeClr val="accent1"/>
-          </a:fillRef>
-          <a:effectRef idx="2">
-            <a:schemeClr val="accent1"/>
-          </a:effectRef>
-          <a:fontRef idx="minor">
-            <a:schemeClr val="lt1"/>
-          </a:fontRef>
-        </p:style>
-        <p:txBody>
-          <a:bodyPr rtlCol="0" anchor="t" wrap="none" lIns="137160" rIns="137160" tIns="91440" bIns="91440"/>
+            <a:ext cx="10911535" cy="439928"/>
+          </a:xfrm>
+          <a:prstGeom prst="rect">
+            <a:avLst/>
+          </a:prstGeom>
+          <a:noFill/>
+        </p:spPr>
+        <p:txBody>
+          <a:bodyPr wrap="square" lIns="45720" rIns="45720">
+            <a:spAutoFit/>
+          </a:bodyPr>
           <a:lstStyle/>
           <a:p>
             <a:pPr algn="l"/>
             <a:r>
-              <a:rPr sz="1116">
+              <a:rPr sz="2000" b="1">
                 <a:solidFill>
                   <a:srgbClr val="1F2D3A"/>
                 </a:solidFill>
-                <a:latin typeface="Consolas"/>
-              </a:rPr>
-              <a:t>String sql = "SELECT * FROM notlar WHERE ogrenci = '" + no + "'";</a:t>
-            </a:r>
-          </a:p>
-        </p:txBody>
-      </p:sp>
-      <p:sp>
-        <p:nvSpPr>
-          <p:cNvPr id="8" name="Rectangle 7"/>
-          <p:cNvSpPr/>
-          <p:nvPr/>
-        </p:nvSpPr>
-        <p:spPr>
-          <a:xfrm>
-            <a:off x="640080" y="1880006"/>
-            <a:ext cx="10911535" cy="784555"/>
-          </a:xfrm>
-          <a:prstGeom prst="rect">
-            <a:avLst/>
-          </a:prstGeom>
-          <a:solidFill>
-            <a:srgbClr val="F3F4F6"/>
-          </a:solidFill>
-          <a:ln>
-            <a:solidFill>
-              <a:srgbClr val="D9DEE3"/>
-            </a:solidFill>
-          </a:ln>
-        </p:spPr>
-        <p:style>
-          <a:lnRef idx="1">
-            <a:schemeClr val="accent1"/>
-          </a:lnRef>
-          <a:fillRef idx="3">
-            <a:schemeClr val="accent1"/>
-          </a:fillRef>
-          <a:effectRef idx="2">
-            <a:schemeClr val="accent1"/>
-          </a:effectRef>
-          <a:fontRef idx="minor">
-            <a:schemeClr val="lt1"/>
-          </a:fontRef>
-        </p:style>
-        <p:txBody>
-          <a:bodyPr rtlCol="0" anchor="t" wrap="none" lIns="137160" rIns="137160" tIns="91440" bIns="91440"/>
+              </a:rPr>
+              <a:t>Why does a MATE attacker make cryptography alone insufficient?</a:t>
+            </a:r>
+          </a:p>
+        </p:txBody>
+      </p:sp>
+      <p:sp>
+        <p:nvSpPr>
+          <p:cNvPr id="8" name="TextBox 7"/>
+          <p:cNvSpPr txBox="1"/>
+          <p:nvPr/>
+        </p:nvSpPr>
+        <p:spPr>
+          <a:xfrm>
+            <a:off x="640080" y="1875536"/>
+            <a:ext cx="10911535" cy="1100327"/>
+          </a:xfrm>
+          <a:prstGeom prst="rect">
+            <a:avLst/>
+          </a:prstGeom>
+          <a:noFill/>
+        </p:spPr>
+        <p:txBody>
+          <a:bodyPr wrap="square" lIns="45720" rIns="45720">
+            <a:spAutoFit/>
+          </a:bodyPr>
           <a:lstStyle/>
           <a:p>
             <a:pPr algn="l"/>
             <a:r>
-              <a:rPr sz="1116">
+              <a:rPr sz="2000" b="1">
                 <a:solidFill>
                   <a:srgbClr val="1F2D3A"/>
                 </a:solidFill>
-                <a:latin typeface="Consolas"/>
-              </a:rPr>
-              <a:t>EVP_DecryptUpdate(ctx, acik, &amp;n, sifreli, sifreli_n);</a:t>
-            </a:r>
-          </a:p>
-          <a:p>
-            <a:pPr algn="l"/>
-            <a:r>
-              <a:rPr sz="1116">
+              </a:rPr>
+              <a:t>Answer:</a:t>
+            </a:r>
+            <a:r>
+              <a:rPr sz="2000" b="0">
                 <a:solidFill>
                   <a:srgbClr val="1F2D3A"/>
                 </a:solidFill>
-                <a:latin typeface="Consolas"/>
-              </a:rPr>
-              <a:t>kullan(acik, n);</a:t>
-            </a:r>
-          </a:p>
-          <a:p>
-            <a:pPr algn="l"/>
-            <a:r>
-              <a:rPr sz="1116">
-                <a:solidFill>
-                  <a:srgbClr val="1F2D3A"/>
-                </a:solidFill>
-                <a:latin typeface="Consolas"/>
-              </a:rPr>
-              <a:t>EVP_DecryptFinal_ex(ctx, acik + n, &amp;m);</a:t>
-            </a:r>
-          </a:p>
-        </p:txBody>
-      </p:sp>
-      <p:sp>
-        <p:nvSpPr>
-          <p:cNvPr id="9" name="Rectangle 8"/>
-          <p:cNvSpPr/>
-          <p:nvPr/>
-        </p:nvSpPr>
-        <p:spPr>
-          <a:xfrm>
-            <a:off x="640080" y="2774289"/>
-            <a:ext cx="10911535" cy="444398"/>
-          </a:xfrm>
-          <a:prstGeom prst="rect">
-            <a:avLst/>
-          </a:prstGeom>
-          <a:solidFill>
-            <a:srgbClr val="F3F4F6"/>
-          </a:solidFill>
-          <a:ln>
-            <a:solidFill>
-              <a:srgbClr val="D9DEE3"/>
-            </a:solidFill>
-          </a:ln>
-        </p:spPr>
-        <p:style>
-          <a:lnRef idx="1">
-            <a:schemeClr val="accent1"/>
-          </a:lnRef>
-          <a:fillRef idx="3">
-            <a:schemeClr val="accent1"/>
-          </a:fillRef>
-          <a:effectRef idx="2">
-            <a:schemeClr val="accent1"/>
-          </a:effectRef>
-          <a:fontRef idx="minor">
-            <a:schemeClr val="lt1"/>
-          </a:fontRef>
-        </p:style>
-        <p:txBody>
-          <a:bodyPr rtlCol="0" anchor="t" wrap="none" lIns="137160" rIns="137160" tIns="91440" bIns="91440"/>
-          <a:lstStyle/>
-          <a:p>
-            <a:pPr algn="l"/>
-            <a:r>
-              <a:rPr sz="1116">
-                <a:solidFill>
-                  <a:srgbClr val="1F2D3A"/>
-                </a:solidFill>
-                <a:latin typeface="Consolas"/>
-              </a:rPr>
-              <a:t>try { pinDenetle(zincir); } catch (KeyStoreException e) { e.printStackTrace(); }</a:t>
+              </a:rPr>
+              <a:t> The key sits in memory; the attacker can run the program and read it. Cryptography provides confidentiality, but in a white-box setting the key is not protected; RASP/obfuscation/white-box cryptography is needed.</a:t>
             </a:r>
           </a:p>
         </p:txBody>
@@ -5643,7 +5309,7 @@
                   <a:srgbClr val="006D77"/>
                 </a:solidFill>
               </a:rPr>
-              <a:t>Example: Scenarios</a:t>
+              <a:t>Question 2</a:t>
             </a:r>
           </a:p>
         </p:txBody>
@@ -5657,7 +5323,7 @@
         <p:spPr>
           <a:xfrm>
             <a:off x="640080" y="1325880"/>
-            <a:ext cx="10911535" cy="2346960"/>
+            <a:ext cx="10911535" cy="439928"/>
           </a:xfrm>
           <a:prstGeom prst="rect">
             <a:avLst/>
@@ -5670,18 +5336,48 @@
           </a:bodyPr>
           <a:lstStyle/>
           <a:p>
-            <a:pPr>
-              <a:spcAft>
-                <a:spcPts val="300"/>
-              </a:spcAft>
-            </a:pPr>
+            <a:pPr algn="l"/>
             <a:r>
               <a:rPr sz="2000" b="1">
                 <a:solidFill>
-                  <a:srgbClr val="006D77"/>
-                </a:solidFill>
-              </a:rPr>
-              <a:t>1. </a:t>
+                  <a:srgbClr val="1F2D3A"/>
+                </a:solidFill>
+              </a:rPr>
+              <a:t>What happens if the same nonce is used twice in AES-GCM?</a:t>
+            </a:r>
+          </a:p>
+        </p:txBody>
+      </p:sp>
+      <p:sp>
+        <p:nvSpPr>
+          <p:cNvPr id="8" name="TextBox 7"/>
+          <p:cNvSpPr txBox="1"/>
+          <p:nvPr/>
+        </p:nvSpPr>
+        <p:spPr>
+          <a:xfrm>
+            <a:off x="640080" y="1875536"/>
+            <a:ext cx="10911535" cy="770128"/>
+          </a:xfrm>
+          <a:prstGeom prst="rect">
+            <a:avLst/>
+          </a:prstGeom>
+          <a:noFill/>
+        </p:spPr>
+        <p:txBody>
+          <a:bodyPr wrap="square" lIns="45720" rIns="45720">
+            <a:spAutoFit/>
+          </a:bodyPr>
+          <a:lstStyle/>
+          <a:p>
+            <a:pPr algn="l"/>
+            <a:r>
+              <a:rPr sz="2000" b="1">
+                <a:solidFill>
+                  <a:srgbClr val="1F2D3A"/>
+                </a:solidFill>
+              </a:rPr>
+              <a:t>Answer:</a:t>
             </a:r>
             <a:r>
               <a:rPr sz="2000" b="0">
@@ -5689,171 +5385,7 @@
                   <a:srgbClr val="1F2D3A"/>
                 </a:solidFill>
               </a:rPr>
-              <a:t>The same </a:t>
-            </a:r>
-            <a:r>
-              <a:rPr sz="2000" b="1">
-                <a:solidFill>
-                  <a:srgbClr val="1F2D3A"/>
-                </a:solidFill>
-              </a:rPr>
-              <a:t>embedded AES key</a:t>
-            </a:r>
-            <a:r>
-              <a:rPr sz="2000" b="0">
-                <a:solidFill>
-                  <a:srgbClr val="1F2D3A"/>
-                </a:solidFill>
-              </a:rPr>
-              <a:t> on every user's device: risks and recommendation?</a:t>
-            </a:r>
-          </a:p>
-          <a:p>
-            <a:pPr>
-              <a:spcAft>
-                <a:spcPts val="300"/>
-              </a:spcAft>
-            </a:pPr>
-            <a:r>
-              <a:rPr sz="2000" b="1">
-                <a:solidFill>
-                  <a:srgbClr val="006D77"/>
-                </a:solidFill>
-              </a:rPr>
-              <a:t>2. </a:t>
-            </a:r>
-            <a:r>
-              <a:rPr sz="2000" b="0">
-                <a:solidFill>
-                  <a:srgbClr val="1F2D3A"/>
-                </a:solidFill>
-              </a:rPr>
-              <a:t>A shipped package is a </a:t>
-            </a:r>
-            <a:r>
-              <a:rPr sz="2000" b="1">
-                <a:solidFill>
-                  <a:srgbClr val="1F2D3A"/>
-                </a:solidFill>
-              </a:rPr>
-              <a:t>debug build</a:t>
-            </a:r>
-            <a:r>
-              <a:rPr sz="2000" b="0">
-                <a:solidFill>
-                  <a:srgbClr val="1F2D3A"/>
-                </a:solidFill>
-              </a:rPr>
-              <a:t>: which findings?</a:t>
-            </a:r>
-          </a:p>
-          <a:p>
-            <a:pPr>
-              <a:spcAft>
-                <a:spcPts val="300"/>
-              </a:spcAft>
-            </a:pPr>
-            <a:r>
-              <a:rPr sz="2000" b="1">
-                <a:solidFill>
-                  <a:srgbClr val="006D77"/>
-                </a:solidFill>
-              </a:rPr>
-              <a:t>3. </a:t>
-            </a:r>
-            <a:r>
-              <a:rPr sz="2000" b="0">
-                <a:solidFill>
-                  <a:srgbClr val="1F2D3A"/>
-                </a:solidFill>
-              </a:rPr>
-              <a:t>"I did not make this transaction": which STRIDE letter, which evidence?</a:t>
-            </a:r>
-          </a:p>
-          <a:p>
-            <a:pPr>
-              <a:spcAft>
-                <a:spcPts val="300"/>
-              </a:spcAft>
-            </a:pPr>
-            <a:r>
-              <a:rPr sz="2000" b="1">
-                <a:solidFill>
-                  <a:srgbClr val="006D77"/>
-                </a:solidFill>
-              </a:rPr>
-              <a:t>4. </a:t>
-            </a:r>
-            <a:r>
-              <a:rPr sz="2000" b="0">
-                <a:solidFill>
-                  <a:srgbClr val="1F2D3A"/>
-                </a:solidFill>
-              </a:rPr>
-              <a:t>A function that extracts an archive: which bugs do you guard against?</a:t>
-            </a:r>
-          </a:p>
-          <a:p>
-            <a:pPr>
-              <a:spcAft>
-                <a:spcPts val="300"/>
-              </a:spcAft>
-            </a:pPr>
-            <a:r>
-              <a:rPr sz="2000" b="1">
-                <a:solidFill>
-                  <a:srgbClr val="006D77"/>
-                </a:solidFill>
-              </a:rPr>
-              <a:t>5. </a:t>
-            </a:r>
-            <a:r>
-              <a:rPr sz="2000" b="0">
-                <a:solidFill>
-                  <a:srgbClr val="1F2D3A"/>
-                </a:solidFill>
-              </a:rPr>
-              <a:t>What was the real problem in Log4Shell, what would have prevented it?</a:t>
-            </a:r>
-          </a:p>
-          <a:p>
-            <a:pPr>
-              <a:spcAft>
-                <a:spcPts val="300"/>
-              </a:spcAft>
-            </a:pPr>
-            <a:r>
-              <a:rPr sz="2000" b="1">
-                <a:solidFill>
-                  <a:srgbClr val="006D77"/>
-                </a:solidFill>
-              </a:rPr>
-              <a:t>6. </a:t>
-            </a:r>
-            <a:r>
-              <a:rPr sz="2000" b="0">
-                <a:solidFill>
-                  <a:srgbClr val="1F2D3A"/>
-                </a:solidFill>
-              </a:rPr>
-              <a:t>Why shouldn't RASP checks be evaluated with a single </a:t>
-            </a:r>
-            <a:r>
-              <a:rPr sz="2000" b="0">
-                <a:solidFill>
-                  <a:srgbClr val="A1123F"/>
-                </a:solidFill>
-                <a:latin typeface="Consolas"/>
-              </a:rPr>
-              <a:t>if</a:t>
-            </a:r>
-            <a:r>
-              <a:rPr sz="2000" b="0">
-                <a:solidFill>
-                  <a:srgbClr val="1F2D3A"/>
-                </a:solidFill>
-              </a:rPr>
-              <a:t>?</a:t>
+              <a:t> Confidentiality and integrity collapse; the keystream and data can leak. The nonce must always be unique.</a:t>
             </a:r>
           </a:p>
         </p:txBody>
@@ -6028,7 +5560,7 @@
                   <a:srgbClr val="006D77"/>
                 </a:solidFill>
               </a:rPr>
-              <a:t>Next Week</a:t>
+              <a:t>Question 3</a:t>
             </a:r>
           </a:p>
         </p:txBody>
@@ -6062,7 +5594,7 @@
                   <a:srgbClr val="1F2D3A"/>
                 </a:solidFill>
               </a:rPr>
-              <a:t>Week 9 — Advanced Code Obfuscation and Diversification</a:t>
+              <a:t>Which overflow can ASan not see?</a:t>
             </a:r>
           </a:p>
         </p:txBody>
@@ -6076,7 +5608,7 @@
         <p:spPr>
           <a:xfrm>
             <a:off x="640080" y="1875536"/>
-            <a:ext cx="10911535" cy="1219200"/>
+            <a:ext cx="10911535" cy="770128"/>
           </a:xfrm>
           <a:prstGeom prst="rect">
             <a:avLst/>
@@ -6089,18 +5621,14 @@
           </a:bodyPr>
           <a:lstStyle/>
           <a:p>
-            <a:pPr>
-              <a:spcAft>
-                <a:spcPts val="300"/>
-              </a:spcAft>
-            </a:pPr>
+            <a:pPr algn="l"/>
             <a:r>
               <a:rPr sz="2000" b="1">
                 <a:solidFill>
-                  <a:srgbClr val="006D77"/>
-                </a:solidFill>
-              </a:rPr>
-              <a:t>• </a:t>
+                  <a:srgbClr val="1F2D3A"/>
+                </a:solidFill>
+              </a:rPr>
+              <a:t>Answer:</a:t>
             </a:r>
             <a:r>
               <a:rPr sz="2000" b="0">
@@ -6108,53 +5636,7 @@
                   <a:srgbClr val="1F2D3A"/>
                 </a:solidFill>
               </a:rPr>
-              <a:t>Obfuscation taxonomy, opaque predicates, data encoding</a:t>
-            </a:r>
-          </a:p>
-          <a:p>
-            <a:pPr>
-              <a:spcAft>
-                <a:spcPts val="300"/>
-              </a:spcAft>
-            </a:pPr>
-            <a:r>
-              <a:rPr sz="2000" b="1">
-                <a:solidFill>
-                  <a:srgbClr val="006D77"/>
-                </a:solidFill>
-              </a:rPr>
-              <a:t>• </a:t>
-            </a:r>
-            <a:r>
-              <a:rPr sz="2000" b="0">
-                <a:solidFill>
-                  <a:srgbClr val="1F2D3A"/>
-                </a:solidFill>
-              </a:rPr>
-              <a:t>Virtualisation and compiler-based obfuscation (concept)</a:t>
-            </a:r>
-          </a:p>
-          <a:p>
-            <a:pPr>
-              <a:spcAft>
-                <a:spcPts val="300"/>
-              </a:spcAft>
-            </a:pPr>
-            <a:r>
-              <a:rPr sz="2000" b="1">
-                <a:solidFill>
-                  <a:srgbClr val="006D77"/>
-                </a:solidFill>
-              </a:rPr>
-              <a:t>• </a:t>
-            </a:r>
-            <a:r>
-              <a:rPr sz="2000" b="0">
-                <a:solidFill>
-                  <a:srgbClr val="1F2D3A"/>
-                </a:solidFill>
-              </a:rPr>
-              <a:t>Measuring obfuscation: potency, resilience, cost</a:t>
+              <a:t> A field-to-field overflow within the same structure (there is no poisoned region in between).</a:t>
             </a:r>
           </a:p>
         </p:txBody>
@@ -6170,14 +5652,6 @@
 <file path=ppt/slides/slide16.xml><?xml version="1.0" encoding="utf-8"?>
 <p:sld xmlns:a="http://schemas.openxmlformats.org/drawingml/2006/main" xmlns:p="http://schemas.openxmlformats.org/presentationml/2006/main" xmlns:r="http://schemas.openxmlformats.org/officeDocument/2006/relationships">
   <p:cSld>
-    <p:bg>
-      <p:bgPr>
-        <a:solidFill>
-          <a:srgbClr val="006D77"/>
-        </a:solidFill>
-        <a:effectLst/>
-      </p:bgPr>
-    </p:bg>
     <p:spTree>
       <p:nvGrpSpPr>
         <p:cNvPr id="1" name=""/>
@@ -6185,9 +5659,33 @@
         <p:nvPr/>
       </p:nvGrpSpPr>
       <p:grpSpPr/>
-      <p:sp>
-        <p:nvSpPr>
-          <p:cNvPr id="2" name="TextBox 1"/>
+      <p:pic>
+        <p:nvPicPr>
+          <p:cNvPr id="2" name="Picture 1" descr="rteu_logo_kucuk.jpg"/>
+          <p:cNvPicPr>
+            <a:picLocks noChangeAspect="1"/>
+          </p:cNvPicPr>
+          <p:nvPr/>
+        </p:nvPicPr>
+        <p:blipFill>
+          <a:blip r:embed="rId2"/>
+          <a:stretch>
+            <a:fillRect/>
+          </a:stretch>
+        </p:blipFill>
+        <p:spPr>
+          <a:xfrm>
+            <a:off x="640080" y="164592"/>
+            <a:ext cx="242773" cy="329184"/>
+          </a:xfrm>
+          <a:prstGeom prst="rect">
+            <a:avLst/>
+          </a:prstGeom>
+        </p:spPr>
+      </p:pic>
+      <p:sp>
+        <p:nvSpPr>
+          <p:cNvPr id="3" name="TextBox 2"/>
           <p:cNvSpPr txBox="1"/>
           <p:nvPr/>
         </p:nvSpPr>
@@ -6210,7 +5708,7 @@
             <a:r>
               <a:rPr sz="1100" b="0">
                 <a:solidFill>
-                  <a:srgbClr val="D8F0F2"/>
+                  <a:srgbClr val="5B6770"/>
                 </a:solidFill>
               </a:rPr>
               <a:t>CEN429 Secure Programming · Week 8</a:t>
@@ -6220,7 +5718,7 @@
       </p:sp>
       <p:sp>
         <p:nvSpPr>
-          <p:cNvPr id="3" name="TextBox 2"/>
+          <p:cNvPr id="4" name="TextBox 3"/>
           <p:cNvSpPr txBox="1"/>
           <p:nvPr/>
         </p:nvSpPr>
@@ -6243,7 +5741,7 @@
             <a:r>
               <a:rPr sz="1000" b="0">
                 <a:solidFill>
-                  <a:srgbClr val="D8F0F2"/>
+                  <a:srgbClr val="5B6770"/>
                 </a:solidFill>
               </a:rPr>
               <a:t>RTEU Computer Engineering · 2026-2027 Fall</a:t>
@@ -6253,7 +5751,7 @@
       </p:sp>
       <p:sp>
         <p:nvSpPr>
-          <p:cNvPr id="4" name="TextBox 3"/>
+          <p:cNvPr id="5" name="TextBox 4"/>
           <p:cNvSpPr txBox="1"/>
           <p:nvPr/>
         </p:nvSpPr>
@@ -6277,7 +5775,7 @@
             <a:r>
               <a:rPr sz="1000" b="0">
                 <a:solidFill>
-                  <a:srgbClr val="D8F0F2"/>
+                  <a:srgbClr val="5B6770"/>
                 </a:solidFill>
               </a:rPr>
               <a:t>16</a:t>
@@ -6287,14 +5785,47 @@
       </p:sp>
       <p:sp>
         <p:nvSpPr>
-          <p:cNvPr id="5" name="TextBox 4"/>
-          <p:cNvSpPr txBox="1"/>
-          <p:nvPr/>
-        </p:nvSpPr>
-        <p:spPr>
-          <a:xfrm>
-            <a:off x="640080" y="2743200"/>
-            <a:ext cx="10911535" cy="1280160"/>
+          <p:cNvPr id="6" name="TextBox 5"/>
+          <p:cNvSpPr txBox="1"/>
+          <p:nvPr/>
+        </p:nvSpPr>
+        <p:spPr>
+          <a:xfrm>
+            <a:off x="640080" y="548640"/>
+            <a:ext cx="10911535" cy="731520"/>
+          </a:xfrm>
+          <a:prstGeom prst="rect">
+            <a:avLst/>
+          </a:prstGeom>
+          <a:noFill/>
+        </p:spPr>
+        <p:txBody>
+          <a:bodyPr wrap="square" lIns="45720" rIns="45720" anchor="ctr">
+            <a:spAutoFit/>
+          </a:bodyPr>
+          <a:lstStyle/>
+          <a:p>
+            <a:r>
+              <a:rPr sz="3000" b="1">
+                <a:solidFill>
+                  <a:srgbClr val="006D77"/>
+                </a:solidFill>
+              </a:rPr>
+              <a:t>Question 4</a:t>
+            </a:r>
+          </a:p>
+        </p:txBody>
+      </p:sp>
+      <p:sp>
+        <p:nvSpPr>
+          <p:cNvPr id="7" name="TextBox 6"/>
+          <p:cNvSpPr txBox="1"/>
+          <p:nvPr/>
+        </p:nvSpPr>
+        <p:spPr>
+          <a:xfrm>
+            <a:off x="640080" y="1325880"/>
+            <a:ext cx="10911535" cy="439928"/>
           </a:xfrm>
           <a:prstGeom prst="rect">
             <a:avLst/>
@@ -6309,12 +5840,54 @@
           <a:p>
             <a:pPr algn="l"/>
             <a:r>
-              <a:rPr sz="4000" b="1">
-                <a:solidFill>
-                  <a:srgbClr val="FFFFFF"/>
-                </a:solidFill>
-              </a:rPr>
-              <a:t>Appendix · Week-by-Week Topic Map (1–6)</a:t>
+              <a:rPr sz="2000" b="1">
+                <a:solidFill>
+                  <a:srgbClr val="1F2D3A"/>
+                </a:solidFill>
+              </a:rPr>
+              <a:t>What does a canary stop, and what does it not stop?</a:t>
+            </a:r>
+          </a:p>
+        </p:txBody>
+      </p:sp>
+      <p:sp>
+        <p:nvSpPr>
+          <p:cNvPr id="8" name="TextBox 7"/>
+          <p:cNvSpPr txBox="1"/>
+          <p:nvPr/>
+        </p:nvSpPr>
+        <p:spPr>
+          <a:xfrm>
+            <a:off x="640080" y="1875536"/>
+            <a:ext cx="10911535" cy="770128"/>
+          </a:xfrm>
+          <a:prstGeom prst="rect">
+            <a:avLst/>
+          </a:prstGeom>
+          <a:noFill/>
+        </p:spPr>
+        <p:txBody>
+          <a:bodyPr wrap="square" lIns="45720" rIns="45720">
+            <a:spAutoFit/>
+          </a:bodyPr>
+          <a:lstStyle/>
+          <a:p>
+            <a:pPr algn="l"/>
+            <a:r>
+              <a:rPr sz="2000" b="1">
+                <a:solidFill>
+                  <a:srgbClr val="1F2D3A"/>
+                </a:solidFill>
+              </a:rPr>
+              <a:t>Answer:</a:t>
+            </a:r>
+            <a:r>
+              <a:rPr sz="2000" b="0">
+                <a:solidFill>
+                  <a:srgbClr val="1F2D3A"/>
+                </a:solidFill>
+              </a:rPr>
+              <a:t> Stops: a stack overflow that reaches the return address. Does not stop: heap overflow, variables before the canary, a leaked canary.</a:t>
             </a:r>
           </a:p>
         </p:txBody>
@@ -6489,7 +6062,7 @@
                   <a:srgbClr val="006D77"/>
                 </a:solidFill>
               </a:rPr>
-              <a:t>Week 1 · Key Points</a:t>
+              <a:t>Question 5</a:t>
             </a:r>
           </a:p>
         </p:txBody>
@@ -6503,7 +6076,7 @@
         <p:spPr>
           <a:xfrm>
             <a:off x="640080" y="1325880"/>
-            <a:ext cx="10911535" cy="1595120"/>
+            <a:ext cx="10911535" cy="439928"/>
           </a:xfrm>
           <a:prstGeom prst="rect">
             <a:avLst/>
@@ -6516,18 +6089,48 @@
           </a:bodyPr>
           <a:lstStyle/>
           <a:p>
-            <a:pPr>
-              <a:spcAft>
-                <a:spcPts val="300"/>
-              </a:spcAft>
-            </a:pPr>
+            <a:pPr algn="l"/>
             <a:r>
               <a:rPr sz="2000" b="1">
                 <a:solidFill>
-                  <a:srgbClr val="006D77"/>
-                </a:solidFill>
-              </a:rPr>
-              <a:t>• </a:t>
+                  <a:srgbClr val="1F2D3A"/>
+                </a:solidFill>
+              </a:rPr>
+              <a:t>Why is RASP self-hashing not enough on its own?</a:t>
+            </a:r>
+          </a:p>
+        </p:txBody>
+      </p:sp>
+      <p:sp>
+        <p:nvSpPr>
+          <p:cNvPr id="8" name="TextBox 7"/>
+          <p:cNvSpPr txBox="1"/>
+          <p:nvPr/>
+        </p:nvSpPr>
+        <p:spPr>
+          <a:xfrm>
+            <a:off x="640080" y="1875536"/>
+            <a:ext cx="10911535" cy="770128"/>
+          </a:xfrm>
+          <a:prstGeom prst="rect">
+            <a:avLst/>
+          </a:prstGeom>
+          <a:noFill/>
+        </p:spPr>
+        <p:txBody>
+          <a:bodyPr wrap="square" lIns="45720" rIns="45720">
+            <a:spAutoFit/>
+          </a:bodyPr>
+          <a:lstStyle/>
+          <a:p>
+            <a:pPr algn="l"/>
+            <a:r>
+              <a:rPr sz="2000" b="1">
+                <a:solidFill>
+                  <a:srgbClr val="1F2D3A"/>
+                </a:solidFill>
+              </a:rPr>
+              <a:t>Answer:</a:t>
             </a:r>
             <a:r>
               <a:rPr sz="2000" b="0">
@@ -6535,76 +6138,7 @@
                   <a:srgbClr val="1F2D3A"/>
                 </a:solidFill>
               </a:rPr>
-              <a:t>CIA triad; a bug ≠ a vulnerability.</a:t>
-            </a:r>
-          </a:p>
-          <a:p>
-            <a:pPr>
-              <a:spcAft>
-                <a:spcPts val="300"/>
-              </a:spcAft>
-            </a:pPr>
-            <a:r>
-              <a:rPr sz="2000" b="1">
-                <a:solidFill>
-                  <a:srgbClr val="006D77"/>
-                </a:solidFill>
-              </a:rPr>
-              <a:t>• </a:t>
-            </a:r>
-            <a:r>
-              <a:rPr sz="2000" b="0">
-                <a:solidFill>
-                  <a:srgbClr val="1F2D3A"/>
-                </a:solidFill>
-              </a:rPr>
-              <a:t>MATE (white-box) attacker.</a:t>
-            </a:r>
-          </a:p>
-          <a:p>
-            <a:pPr>
-              <a:spcAft>
-                <a:spcPts val="300"/>
-              </a:spcAft>
-            </a:pPr>
-            <a:r>
-              <a:rPr sz="2000" b="1">
-                <a:solidFill>
-                  <a:srgbClr val="006D77"/>
-                </a:solidFill>
-              </a:rPr>
-              <a:t>• </a:t>
-            </a:r>
-            <a:r>
-              <a:rPr sz="2000" b="0">
-                <a:solidFill>
-                  <a:srgbClr val="1F2D3A"/>
-                </a:solidFill>
-              </a:rPr>
-              <a:t>STRIDE, attack tree, DFD.</a:t>
-            </a:r>
-          </a:p>
-          <a:p>
-            <a:pPr>
-              <a:spcAft>
-                <a:spcPts val="300"/>
-              </a:spcAft>
-            </a:pPr>
-            <a:r>
-              <a:rPr sz="2000" b="1">
-                <a:solidFill>
-                  <a:srgbClr val="006D77"/>
-                </a:solidFill>
-              </a:rPr>
-              <a:t>• </a:t>
-            </a:r>
-            <a:r>
-              <a:rPr sz="2000" b="0">
-                <a:solidFill>
-                  <a:srgbClr val="1F2D3A"/>
-                </a:solidFill>
-              </a:rPr>
-              <a:t>Layered defence; design principles.</a:t>
+              <a:t> The attacker can find the digest function and bypass it. Obfuscation + cross-checking + overlapping checks are needed.</a:t>
             </a:r>
           </a:p>
         </p:txBody>
@@ -6779,7 +6313,7 @@
                   <a:srgbClr val="006D77"/>
                 </a:solidFill>
               </a:rPr>
-              <a:t>Week 2 · Key Points</a:t>
+              <a:t>Question 6</a:t>
             </a:r>
           </a:p>
         </p:txBody>
@@ -6793,7 +6327,7 @@
         <p:spPr>
           <a:xfrm>
             <a:off x="640080" y="1325880"/>
-            <a:ext cx="10911535" cy="1219200"/>
+            <a:ext cx="10911535" cy="439928"/>
           </a:xfrm>
           <a:prstGeom prst="rect">
             <a:avLst/>
@@ -6806,18 +6340,48 @@
           </a:bodyPr>
           <a:lstStyle/>
           <a:p>
-            <a:pPr>
-              <a:spcAft>
-                <a:spcPts val="300"/>
-              </a:spcAft>
-            </a:pPr>
+            <a:pPr algn="l"/>
             <a:r>
               <a:rPr sz="2000" b="1">
                 <a:solidFill>
-                  <a:srgbClr val="006D77"/>
-                </a:solidFill>
-              </a:rPr>
-              <a:t>• </a:t>
+                  <a:srgbClr val="1F2D3A"/>
+                </a:solidFill>
+              </a:rPr>
+              <a:t>Why a KDF and a salt when deriving a key from a password?</a:t>
+            </a:r>
+          </a:p>
+        </p:txBody>
+      </p:sp>
+      <p:sp>
+        <p:nvSpPr>
+          <p:cNvPr id="8" name="TextBox 7"/>
+          <p:cNvSpPr txBox="1"/>
+          <p:nvPr/>
+        </p:nvSpPr>
+        <p:spPr>
+          <a:xfrm>
+            <a:off x="640080" y="1875536"/>
+            <a:ext cx="10911535" cy="770128"/>
+          </a:xfrm>
+          <a:prstGeom prst="rect">
+            <a:avLst/>
+          </a:prstGeom>
+          <a:noFill/>
+        </p:spPr>
+        <p:txBody>
+          <a:bodyPr wrap="square" lIns="45720" rIns="45720">
+            <a:spAutoFit/>
+          </a:bodyPr>
+          <a:lstStyle/>
+          <a:p>
+            <a:pPr algn="l"/>
+            <a:r>
+              <a:rPr sz="2000" b="1">
+                <a:solidFill>
+                  <a:srgbClr val="1F2D3A"/>
+                </a:solidFill>
+              </a:rPr>
+              <a:t>Answer:</a:t>
             </a:r>
             <a:r>
               <a:rPr sz="2000" b="0">
@@ -6825,53 +6389,7 @@
                   <a:srgbClr val="1F2D3A"/>
                 </a:solidFill>
               </a:rPr>
-              <a:t>Threat modelling steps.</a:t>
-            </a:r>
-          </a:p>
-          <a:p>
-            <a:pPr>
-              <a:spcAft>
-                <a:spcPts val="300"/>
-              </a:spcAft>
-            </a:pPr>
-            <a:r>
-              <a:rPr sz="2000" b="1">
-                <a:solidFill>
-                  <a:srgbClr val="006D77"/>
-                </a:solidFill>
-              </a:rPr>
-              <a:t>• </a:t>
-            </a:r>
-            <a:r>
-              <a:rPr sz="2000" b="0">
-                <a:solidFill>
-                  <a:srgbClr val="1F2D3A"/>
-                </a:solidFill>
-              </a:rPr>
-              <a:t>Trust boundary; least privilege.</a:t>
-            </a:r>
-          </a:p>
-          <a:p>
-            <a:pPr>
-              <a:spcAft>
-                <a:spcPts val="300"/>
-              </a:spcAft>
-            </a:pPr>
-            <a:r>
-              <a:rPr sz="2000" b="1">
-                <a:solidFill>
-                  <a:srgbClr val="006D77"/>
-                </a:solidFill>
-              </a:rPr>
-              <a:t>• </a:t>
-            </a:r>
-            <a:r>
-              <a:rPr sz="2000" b="0">
-                <a:solidFill>
-                  <a:srgbClr val="1F2D3A"/>
-                </a:solidFill>
-              </a:rPr>
-              <a:t>Asset list and C/I/I+ labels.</a:t>
+              <a:t> A password has low entropy; the KDF slows down guessing, and the salt stops identical passwords from producing the same key (rainbow table).</a:t>
             </a:r>
           </a:p>
         </p:txBody>
@@ -7046,7 +6564,7 @@
                   <a:srgbClr val="006D77"/>
                 </a:solidFill>
               </a:rPr>
-              <a:t>Week 3 · Key Points</a:t>
+              <a:t>Question 7</a:t>
             </a:r>
           </a:p>
         </p:txBody>
@@ -7060,7 +6578,7 @@
         <p:spPr>
           <a:xfrm>
             <a:off x="640080" y="1325880"/>
-            <a:ext cx="10911535" cy="1595120"/>
+            <a:ext cx="10911535" cy="439928"/>
           </a:xfrm>
           <a:prstGeom prst="rect">
             <a:avLst/>
@@ -7073,18 +6591,48 @@
           </a:bodyPr>
           <a:lstStyle/>
           <a:p>
-            <a:pPr>
-              <a:spcAft>
-                <a:spcPts val="300"/>
-              </a:spcAft>
-            </a:pPr>
+            <a:pPr algn="l"/>
             <a:r>
               <a:rPr sz="2000" b="1">
                 <a:solidFill>
-                  <a:srgbClr val="006D77"/>
-                </a:solidFill>
-              </a:rPr>
-              <a:t>• </a:t>
+                  <a:srgbClr val="1F2D3A"/>
+                </a:solidFill>
+              </a:rPr>
+              <a:t>An example of the least-privilege principle?</a:t>
+            </a:r>
+          </a:p>
+        </p:txBody>
+      </p:sp>
+      <p:sp>
+        <p:nvSpPr>
+          <p:cNvPr id="8" name="TextBox 7"/>
+          <p:cNvSpPr txBox="1"/>
+          <p:nvPr/>
+        </p:nvSpPr>
+        <p:spPr>
+          <a:xfrm>
+            <a:off x="640080" y="1875536"/>
+            <a:ext cx="10911535" cy="770128"/>
+          </a:xfrm>
+          <a:prstGeom prst="rect">
+            <a:avLst/>
+          </a:prstGeom>
+          <a:noFill/>
+        </p:spPr>
+        <p:txBody>
+          <a:bodyPr wrap="square" lIns="45720" rIns="45720">
+            <a:spAutoFit/>
+          </a:bodyPr>
+          <a:lstStyle/>
+          <a:p>
+            <a:pPr algn="l"/>
+            <a:r>
+              <a:rPr sz="2000" b="1">
+                <a:solidFill>
+                  <a:srgbClr val="1F2D3A"/>
+                </a:solidFill>
+              </a:rPr>
+              <a:t>Answer:</a:t>
             </a:r>
             <a:r>
               <a:rPr sz="2000" b="0">
@@ -7092,76 +6640,41 @@
                   <a:srgbClr val="1F2D3A"/>
                 </a:solidFill>
               </a:rPr>
-              <a:t>The three states of data.</a:t>
-            </a:r>
-          </a:p>
-          <a:p>
-            <a:pPr>
-              <a:spcAft>
-                <a:spcPts val="300"/>
-              </a:spcAft>
-            </a:pPr>
-            <a:r>
-              <a:rPr sz="2000" b="1">
-                <a:solidFill>
-                  <a:srgbClr val="006D77"/>
-                </a:solidFill>
-              </a:rPr>
-              <a:t>• </a:t>
+              <a:t> The application's DB user should only be able to </a:t>
             </a:r>
             <a:r>
               <a:rPr sz="2000" b="0">
                 <a:solidFill>
+                  <a:srgbClr val="A1123F"/>
+                </a:solidFill>
+                <a:latin typeface="Consolas"/>
+              </a:rPr>
+              <a:t>SELECT</a:t>
+            </a:r>
+            <a:r>
+              <a:rPr sz="2000" b="0">
+                <a:solidFill>
                   <a:srgbClr val="1F2D3A"/>
                 </a:solidFill>
               </a:rPr>
-              <a:t>AEAD; nonce reuse is catastrophic.</a:t>
-            </a:r>
-          </a:p>
-          <a:p>
-            <a:pPr>
-              <a:spcAft>
-                <a:spcPts val="300"/>
-              </a:spcAft>
-            </a:pPr>
-            <a:r>
-              <a:rPr sz="2000" b="1">
-                <a:solidFill>
-                  <a:srgbClr val="006D77"/>
-                </a:solidFill>
-              </a:rPr>
-              <a:t>• </a:t>
+              <a:t>; it should not have </a:t>
             </a:r>
             <a:r>
               <a:rPr sz="2000" b="0">
                 <a:solidFill>
+                  <a:srgbClr val="A1123F"/>
+                </a:solidFill>
+                <a:latin typeface="Consolas"/>
+              </a:rPr>
+              <a:t>DROP</a:t>
+            </a:r>
+            <a:r>
+              <a:rPr sz="2000" b="0">
+                <a:solidFill>
                   <a:srgbClr val="1F2D3A"/>
                 </a:solidFill>
               </a:rPr>
-              <a:t>CSPRNG; KDF (password → key).</a:t>
-            </a:r>
-          </a:p>
-          <a:p>
-            <a:pPr>
-              <a:spcAft>
-                <a:spcPts val="300"/>
-              </a:spcAft>
-            </a:pPr>
-            <a:r>
-              <a:rPr sz="2000" b="1">
-                <a:solidFill>
-                  <a:srgbClr val="006D77"/>
-                </a:solidFill>
-              </a:rPr>
-              <a:t>• </a:t>
-            </a:r>
-            <a:r>
-              <a:rPr sz="2000" b="0">
-                <a:solidFill>
-                  <a:srgbClr val="1F2D3A"/>
-                </a:solidFill>
-              </a:rPr>
-              <a:t>Key hierarchy; forward secrecy.</a:t>
+              <a:t> privilege. Excess privilege = greater damage.</a:t>
             </a:r>
           </a:p>
         </p:txBody>
@@ -7350,7 +6863,7 @@
         <p:spPr>
           <a:xfrm>
             <a:off x="640080" y="1325880"/>
-            <a:ext cx="10911535" cy="1595120"/>
+            <a:ext cx="10911535" cy="2631440"/>
           </a:xfrm>
           <a:prstGeom prst="rect">
             <a:avLst/>
@@ -7484,7 +6997,7 @@
                   <a:srgbClr val="1F2D3A"/>
                 </a:solidFill>
               </a:rPr>
-              <a:t> question</a:t>
+              <a:t> question — learn frequently confused concepts by their reason too</a:t>
             </a:r>
           </a:p>
           <a:p>
@@ -7507,7 +7020,7 @@
                   <a:srgbClr val="1F2D3A"/>
                 </a:solidFill>
               </a:rPr>
-              <a:t>Best preparation: each week's </a:t>
+              <a:t>Best preparation: work through each week's </a:t>
             </a:r>
             <a:r>
               <a:rPr sz="2000" b="1">
@@ -7523,7 +7036,46 @@
                   <a:srgbClr val="1F2D3A"/>
                 </a:solidFill>
               </a:rPr>
-              <a:t> questions + rerunning the demos</a:t>
+              <a:t> questions without looking at the answers, then rerun the demos</a:t>
+            </a:r>
+          </a:p>
+          <a:p>
+            <a:pPr>
+              <a:spcAft>
+                <a:spcPts val="300"/>
+              </a:spcAft>
+            </a:pPr>
+            <a:r>
+              <a:rPr sz="2000" b="1">
+                <a:solidFill>
+                  <a:srgbClr val="006D77"/>
+                </a:solidFill>
+              </a:rPr>
+              <a:t>• </a:t>
+            </a:r>
+            <a:r>
+              <a:rPr sz="2000" b="0">
+                <a:solidFill>
+                  <a:srgbClr val="1F2D3A"/>
+                </a:solidFill>
+              </a:rPr>
+              <a:t>Review the </a:t>
+            </a:r>
+            <a:r>
+              <a:rPr sz="2000" b="1">
+                <a:solidFill>
+                  <a:srgbClr val="1F2D3A"/>
+                </a:solidFill>
+              </a:rPr>
+              <a:t>Week 3 and Week 4</a:t>
+            </a:r>
+            <a:r>
+              <a:rPr sz="2000" b="0">
+                <a:solidFill>
+                  <a:srgbClr val="1F2D3A"/>
+                </a:solidFill>
+              </a:rPr>
+              <a:t> demos once more in particular</a:t>
             </a:r>
           </a:p>
         </p:txBody>
@@ -7698,7 +7250,7 @@
                   <a:srgbClr val="006D77"/>
                 </a:solidFill>
               </a:rPr>
-              <a:t>Week 4 · Key Points</a:t>
+              <a:t>Question 8</a:t>
             </a:r>
           </a:p>
         </p:txBody>
@@ -7712,7 +7264,7 @@
         <p:spPr>
           <a:xfrm>
             <a:off x="640080" y="1325880"/>
-            <a:ext cx="10911535" cy="1595120"/>
+            <a:ext cx="10911535" cy="439928"/>
           </a:xfrm>
           <a:prstGeom prst="rect">
             <a:avLst/>
@@ -7725,18 +7277,48 @@
           </a:bodyPr>
           <a:lstStyle/>
           <a:p>
-            <a:pPr>
-              <a:spcAft>
-                <a:spcPts val="300"/>
-              </a:spcAft>
-            </a:pPr>
+            <a:pPr algn="l"/>
             <a:r>
               <a:rPr sz="2000" b="1">
                 <a:solidFill>
-                  <a:srgbClr val="006D77"/>
-                </a:solidFill>
-              </a:rPr>
-              <a:t>• </a:t>
+                  <a:srgbClr val="1F2D3A"/>
+                </a:solidFill>
+              </a:rPr>
+              <a:t>What is the "E" in STRIDE, and one control for it?</a:t>
+            </a:r>
+          </a:p>
+        </p:txBody>
+      </p:sp>
+      <p:sp>
+        <p:nvSpPr>
+          <p:cNvPr id="8" name="TextBox 7"/>
+          <p:cNvSpPr txBox="1"/>
+          <p:nvPr/>
+        </p:nvSpPr>
+        <p:spPr>
+          <a:xfrm>
+            <a:off x="640080" y="1875536"/>
+            <a:ext cx="10911535" cy="770128"/>
+          </a:xfrm>
+          <a:prstGeom prst="rect">
+            <a:avLst/>
+          </a:prstGeom>
+          <a:noFill/>
+        </p:spPr>
+        <p:txBody>
+          <a:bodyPr wrap="square" lIns="45720" rIns="45720">
+            <a:spAutoFit/>
+          </a:bodyPr>
+          <a:lstStyle/>
+          <a:p>
+            <a:pPr algn="l"/>
+            <a:r>
+              <a:rPr sz="2000" b="1">
+                <a:solidFill>
+                  <a:srgbClr val="1F2D3A"/>
+                </a:solidFill>
+              </a:rPr>
+              <a:t>Answer:</a:t>
             </a:r>
             <a:r>
               <a:rPr sz="2000" b="0">
@@ -7744,76 +7326,7 @@
                   <a:srgbClr val="1F2D3A"/>
                 </a:solidFill>
               </a:rPr>
-              <a:t>Three layers: code → compiler/OS → obfuscation.</a:t>
-            </a:r>
-          </a:p>
-          <a:p>
-            <a:pPr>
-              <a:spcAft>
-                <a:spcPts val="300"/>
-              </a:spcAft>
-            </a:pPr>
-            <a:r>
-              <a:rPr sz="2000" b="1">
-                <a:solidFill>
-                  <a:srgbClr val="006D77"/>
-                </a:solidFill>
-              </a:rPr>
-              <a:t>• </a:t>
-            </a:r>
-            <a:r>
-              <a:rPr sz="2000" b="0">
-                <a:solidFill>
-                  <a:srgbClr val="1F2D3A"/>
-                </a:solidFill>
-              </a:rPr>
-              <a:t>CERT/CWE; UAF; integer/UB.</a:t>
-            </a:r>
-          </a:p>
-          <a:p>
-            <a:pPr>
-              <a:spcAft>
-                <a:spcPts val="300"/>
-              </a:spcAft>
-            </a:pPr>
-            <a:r>
-              <a:rPr sz="2000" b="1">
-                <a:solidFill>
-                  <a:srgbClr val="006D77"/>
-                </a:solidFill>
-              </a:rPr>
-              <a:t>• </a:t>
-            </a:r>
-            <a:r>
-              <a:rPr sz="2000" b="0">
-                <a:solidFill>
-                  <a:srgbClr val="1F2D3A"/>
-                </a:solidFill>
-              </a:rPr>
-              <a:t>Sanitizers (ASan/UBSan), fuzzing.</a:t>
-            </a:r>
-          </a:p>
-          <a:p>
-            <a:pPr>
-              <a:spcAft>
-                <a:spcPts val="300"/>
-              </a:spcAft>
-            </a:pPr>
-            <a:r>
-              <a:rPr sz="2000" b="1">
-                <a:solidFill>
-                  <a:srgbClr val="006D77"/>
-                </a:solidFill>
-              </a:rPr>
-              <a:t>• </a:t>
-            </a:r>
-            <a:r>
-              <a:rPr sz="2000" b="0">
-                <a:solidFill>
-                  <a:srgbClr val="1F2D3A"/>
-                </a:solidFill>
-              </a:rPr>
-              <a:t>Compiler protections (canary, ASLR, NX).</a:t>
+              <a:t> Elevation of privilege. Control: least privilege, authorization checks, secure defaults.</a:t>
             </a:r>
           </a:p>
         </p:txBody>
@@ -7988,7 +7501,7 @@
                   <a:srgbClr val="006D77"/>
                 </a:solidFill>
               </a:rPr>
-              <a:t>Week 5 · Key Points</a:t>
+              <a:t>Question 9</a:t>
             </a:r>
           </a:p>
         </p:txBody>
@@ -8002,7 +7515,7 @@
         <p:spPr>
           <a:xfrm>
             <a:off x="640080" y="1325880"/>
-            <a:ext cx="10911535" cy="1219200"/>
+            <a:ext cx="10911535" cy="439928"/>
           </a:xfrm>
           <a:prstGeom prst="rect">
             <a:avLst/>
@@ -8015,18 +7528,48 @@
           </a:bodyPr>
           <a:lstStyle/>
           <a:p>
-            <a:pPr>
-              <a:spcAft>
-                <a:spcPts val="300"/>
-              </a:spcAft>
-            </a:pPr>
+            <a:pPr algn="l"/>
             <a:r>
               <a:rPr sz="2000" b="1">
                 <a:solidFill>
-                  <a:srgbClr val="006D77"/>
-                </a:solidFill>
-              </a:rPr>
-              <a:t>• </a:t>
+                  <a:srgbClr val="1F2D3A"/>
+                </a:solidFill>
+              </a:rPr>
+              <a:t>Why is deserialisation dangerous, and what is the fix?</a:t>
+            </a:r>
+          </a:p>
+        </p:txBody>
+      </p:sp>
+      <p:sp>
+        <p:nvSpPr>
+          <p:cNvPr id="8" name="TextBox 7"/>
+          <p:cNvSpPr txBox="1"/>
+          <p:nvPr/>
+        </p:nvSpPr>
+        <p:spPr>
+          <a:xfrm>
+            <a:off x="640080" y="1875536"/>
+            <a:ext cx="10911535" cy="770128"/>
+          </a:xfrm>
+          <a:prstGeom prst="rect">
+            <a:avLst/>
+          </a:prstGeom>
+          <a:noFill/>
+        </p:spPr>
+        <p:txBody>
+          <a:bodyPr wrap="square" lIns="45720" rIns="45720">
+            <a:spAutoFit/>
+          </a:bodyPr>
+          <a:lstStyle/>
+          <a:p>
+            <a:pPr algn="l"/>
+            <a:r>
+              <a:rPr sz="2000" b="1">
+                <a:solidFill>
+                  <a:srgbClr val="1F2D3A"/>
+                </a:solidFill>
+              </a:rPr>
+              <a:t>Answer:</a:t>
             </a:r>
             <a:r>
               <a:rPr sz="2000" b="0">
@@ -8034,53 +7577,7 @@
                   <a:srgbClr val="1F2D3A"/>
                 </a:solidFill>
               </a:rPr>
-              <a:t>A managed language solves memory errors, not injection.</a:t>
-            </a:r>
-          </a:p>
-          <a:p>
-            <a:pPr>
-              <a:spcAft>
-                <a:spcPts val="300"/>
-              </a:spcAft>
-            </a:pPr>
-            <a:r>
-              <a:rPr sz="2000" b="1">
-                <a:solidFill>
-                  <a:srgbClr val="006D77"/>
-                </a:solidFill>
-              </a:rPr>
-              <a:t>• </a:t>
-            </a:r>
-            <a:r>
-              <a:rPr sz="2000" b="0">
-                <a:solidFill>
-                  <a:srgbClr val="1F2D3A"/>
-                </a:solidFill>
-              </a:rPr>
-              <a:t>SQL/command/path injection → parameterization/argument array.</a:t>
-            </a:r>
-          </a:p>
-          <a:p>
-            <a:pPr>
-              <a:spcAft>
-                <a:spcPts val="300"/>
-              </a:spcAft>
-            </a:pPr>
-            <a:r>
-              <a:rPr sz="2000" b="1">
-                <a:solidFill>
-                  <a:srgbClr val="006D77"/>
-                </a:solidFill>
-              </a:rPr>
-              <a:t>• </a:t>
-            </a:r>
-            <a:r>
-              <a:rPr sz="2000" b="0">
-                <a:solidFill>
-                  <a:srgbClr val="1F2D3A"/>
-                </a:solidFill>
-              </a:rPr>
-              <a:t>Deserialisation; ProGuard/R8; SBOM.</a:t>
+              <a:t> Code can execute during extraction (a gadget chain). Fix: a data format + schema; an allowlist filter if unavoidable.</a:t>
             </a:r>
           </a:p>
         </p:txBody>
@@ -8255,7 +7752,7 @@
                   <a:srgbClr val="006D77"/>
                 </a:solidFill>
               </a:rPr>
-              <a:t>Week 6 · Key Points</a:t>
+              <a:t>Example · Multiple Choice</a:t>
             </a:r>
           </a:p>
         </p:txBody>
@@ -8269,7 +7766,7 @@
         <p:spPr>
           <a:xfrm>
             <a:off x="640080" y="1325880"/>
-            <a:ext cx="10911535" cy="1219200"/>
+            <a:ext cx="10911535" cy="439928"/>
           </a:xfrm>
           <a:prstGeom prst="rect">
             <a:avLst/>
@@ -8282,41 +7779,56 @@
           </a:bodyPr>
           <a:lstStyle/>
           <a:p>
-            <a:pPr>
-              <a:spcAft>
-                <a:spcPts val="300"/>
-              </a:spcAft>
-            </a:pPr>
+            <a:pPr algn="l"/>
             <a:r>
               <a:rPr sz="2000" b="1">
                 <a:solidFill>
-                  <a:srgbClr val="006D77"/>
-                </a:solidFill>
-              </a:rPr>
-              <a:t>• </a:t>
-            </a:r>
+                  <a:srgbClr val="1F2D3A"/>
+                </a:solidFill>
+              </a:rPr>
+              <a:t>Which of the following is an AEAD mode?</a:t>
+            </a:r>
+          </a:p>
+        </p:txBody>
+      </p:sp>
+      <p:sp>
+        <p:nvSpPr>
+          <p:cNvPr id="8" name="TextBox 7"/>
+          <p:cNvSpPr txBox="1"/>
+          <p:nvPr/>
+        </p:nvSpPr>
+        <p:spPr>
+          <a:xfrm>
+            <a:off x="640080" y="1875536"/>
+            <a:ext cx="10911535" cy="439928"/>
+          </a:xfrm>
+          <a:prstGeom prst="rect">
+            <a:avLst/>
+          </a:prstGeom>
+          <a:noFill/>
+        </p:spPr>
+        <p:txBody>
+          <a:bodyPr wrap="square" lIns="45720" rIns="45720">
+            <a:spAutoFit/>
+          </a:bodyPr>
+          <a:lstStyle/>
+          <a:p>
+            <a:pPr algn="l"/>
             <a:r>
               <a:rPr sz="2000" b="0">
                 <a:solidFill>
                   <a:srgbClr val="1F2D3A"/>
                 </a:solidFill>
               </a:rPr>
-              <a:t>RASP: detect, defend, deter.</a:t>
-            </a:r>
-          </a:p>
-          <a:p>
-            <a:pPr>
-              <a:spcAft>
-                <a:spcPts val="300"/>
-              </a:spcAft>
-            </a:pPr>
+              <a:t>A) ECB B) CBC C) </a:t>
+            </a:r>
             <a:r>
               <a:rPr sz="2000" b="1">
                 <a:solidFill>
-                  <a:srgbClr val="006D77"/>
-                </a:solidFill>
-              </a:rPr>
-              <a:t>• </a:t>
+                  <a:srgbClr val="1F2D3A"/>
+                </a:solidFill>
+              </a:rPr>
+              <a:t>GCM</a:t>
             </a:r>
             <a:r>
               <a:rPr sz="2000" b="0">
@@ -8324,30 +7836,7 @@
                   <a:srgbClr val="1F2D3A"/>
                 </a:solidFill>
               </a:rPr>
-              <a:t>Integrity (self-hashing), anti-debug, hook detection.</a:t>
-            </a:r>
-          </a:p>
-          <a:p>
-            <a:pPr>
-              <a:spcAft>
-                <a:spcPts val="300"/>
-              </a:spcAft>
-            </a:pPr>
-            <a:r>
-              <a:rPr sz="2000" b="1">
-                <a:solidFill>
-                  <a:srgbClr val="006D77"/>
-                </a:solidFill>
-              </a:rPr>
-              <a:t>• </a:t>
-            </a:r>
-            <a:r>
-              <a:rPr sz="2000" b="0">
-                <a:solidFill>
-                  <a:srgbClr val="1F2D3A"/>
-                </a:solidFill>
-              </a:rPr>
-              <a:t>Cross-checking; response policy; device binding.</a:t>
+              <a:t> ✓ D) Raw RSA</a:t>
             </a:r>
           </a:p>
         </p:txBody>
@@ -8522,428 +8011,127 @@
                   <a:srgbClr val="006D77"/>
                 </a:solidFill>
               </a:rPr>
-              <a:t>Frequently Confused</a:t>
-            </a:r>
-          </a:p>
-        </p:txBody>
-      </p:sp>
-      <p:graphicFrame>
-        <p:nvGraphicFramePr>
-          <p:cNvPr id="7" name="Table 6"/>
-          <p:cNvGraphicFramePr>
-            <a:graphicFrameLocks noGrp="1"/>
-          </p:cNvGraphicFramePr>
-          <p:nvPr/>
-        </p:nvGraphicFramePr>
-        <p:xfrm>
-          <a:off x="640080" y="1325880"/>
-          <a:ext cx="10729674" cy="2221991"/>
-        </p:xfrm>
-        <a:graphic>
-          <a:graphicData uri="http://schemas.openxmlformats.org/drawingml/2006/table">
-            <a:tbl>
-              <a:tblPr firstRow="1" bandRow="1">
-                <a:tableStyleId>{5C22544A-7EE6-4342-B048-85BDC9FD1C3A}</a:tableStyleId>
-              </a:tblPr>
-              <a:tblGrid>
-                <a:gridCol w="2727883"/>
-                <a:gridCol w="3637178"/>
-                <a:gridCol w="4364613"/>
-              </a:tblGrid>
-              <a:tr h="370331">
-                <a:tc>
-                  <a:txBody>
-                    <a:bodyPr wrap="square"/>
-                    <a:lstStyle/>
-                    <a:p>
-                      <a:r>
-                        <a:rPr sz="1439" b="1">
-                          <a:solidFill>
-                            <a:srgbClr val="FFFFFF"/>
-                          </a:solidFill>
-                        </a:rPr>
-                        <a:t>A</a:t>
-                      </a:r>
-                    </a:p>
-                  </a:txBody>
-                  <a:tcPr marL="54864" marR="54864" marT="27432" marB="27432" anchor="ctr">
-                    <a:solidFill>
-                      <a:srgbClr val="006D77"/>
-                    </a:solidFill>
-                  </a:tcPr>
-                </a:tc>
-                <a:tc>
-                  <a:txBody>
-                    <a:bodyPr wrap="square"/>
-                    <a:lstStyle/>
-                    <a:p>
-                      <a:r>
-                        <a:rPr sz="1439" b="1">
-                          <a:solidFill>
-                            <a:srgbClr val="FFFFFF"/>
-                          </a:solidFill>
-                        </a:rPr>
-                        <a:t>B</a:t>
-                      </a:r>
-                    </a:p>
-                  </a:txBody>
-                  <a:tcPr marL="54864" marR="54864" marT="27432" marB="27432" anchor="ctr">
-                    <a:solidFill>
-                      <a:srgbClr val="006D77"/>
-                    </a:solidFill>
-                  </a:tcPr>
-                </a:tc>
-                <a:tc>
-                  <a:txBody>
-                    <a:bodyPr wrap="square"/>
-                    <a:lstStyle/>
-                    <a:p>
-                      <a:r>
-                        <a:rPr sz="1439" b="1">
-                          <a:solidFill>
-                            <a:srgbClr val="FFFFFF"/>
-                          </a:solidFill>
-                        </a:rPr>
-                        <a:t>Difference</a:t>
-                      </a:r>
-                    </a:p>
-                  </a:txBody>
-                  <a:tcPr marL="54864" marR="54864" marT="27432" marB="27432" anchor="ctr">
-                    <a:solidFill>
-                      <a:srgbClr val="006D77"/>
-                    </a:solidFill>
-                  </a:tcPr>
-                </a:tc>
-              </a:tr>
-              <a:tr h="370331">
-                <a:tc>
-                  <a:txBody>
-                    <a:bodyPr wrap="square"/>
-                    <a:lstStyle/>
-                    <a:p>
-                      <a:r>
-                        <a:rPr sz="1439" b="0">
-                          <a:solidFill>
-                            <a:srgbClr val="1F2D3A"/>
-                          </a:solidFill>
-                        </a:rPr>
-                        <a:t>Bug</a:t>
-                      </a:r>
-                    </a:p>
-                  </a:txBody>
-                  <a:tcPr marL="54864" marR="54864" marT="27432" marB="27432" anchor="ctr">
-                    <a:solidFill>
-                      <a:srgbClr val="FFFFFF"/>
-                    </a:solidFill>
-                  </a:tcPr>
-                </a:tc>
-                <a:tc>
-                  <a:txBody>
-                    <a:bodyPr wrap="square"/>
-                    <a:lstStyle/>
-                    <a:p>
-                      <a:r>
-                        <a:rPr sz="1439" b="0">
-                          <a:solidFill>
-                            <a:srgbClr val="1F2D3A"/>
-                          </a:solidFill>
-                        </a:rPr>
-                        <a:t>Vulnerability</a:t>
-                      </a:r>
-                    </a:p>
-                  </a:txBody>
-                  <a:tcPr marL="54864" marR="54864" marT="27432" marB="27432" anchor="ctr">
-                    <a:solidFill>
-                      <a:srgbClr val="FFFFFF"/>
-                    </a:solidFill>
-                  </a:tcPr>
-                </a:tc>
-                <a:tc>
-                  <a:txBody>
-                    <a:bodyPr wrap="square"/>
-                    <a:lstStyle/>
-                    <a:p>
-                      <a:r>
-                        <a:rPr sz="1439" b="0">
-                          <a:solidFill>
-                            <a:srgbClr val="1F2D3A"/>
-                          </a:solidFill>
-                        </a:rPr>
-                        <a:t>An exploitable bug</a:t>
-                      </a:r>
-                    </a:p>
-                  </a:txBody>
-                  <a:tcPr marL="54864" marR="54864" marT="27432" marB="27432" anchor="ctr">
-                    <a:solidFill>
-                      <a:srgbClr val="FFFFFF"/>
-                    </a:solidFill>
-                  </a:tcPr>
-                </a:tc>
-              </a:tr>
-              <a:tr h="370331">
-                <a:tc>
-                  <a:txBody>
-                    <a:bodyPr wrap="square"/>
-                    <a:lstStyle/>
-                    <a:p>
-                      <a:r>
-                        <a:rPr sz="1439" b="0">
-                          <a:solidFill>
-                            <a:srgbClr val="1F2D3A"/>
-                          </a:solidFill>
-                        </a:rPr>
-                        <a:t>Black-box</a:t>
-                      </a:r>
-                    </a:p>
-                  </a:txBody>
-                  <a:tcPr marL="54864" marR="54864" marT="27432" marB="27432" anchor="ctr">
-                    <a:solidFill>
-                      <a:srgbClr val="EEF7F8"/>
-                    </a:solidFill>
-                  </a:tcPr>
-                </a:tc>
-                <a:tc>
-                  <a:txBody>
-                    <a:bodyPr wrap="square"/>
-                    <a:lstStyle/>
-                    <a:p>
-                      <a:r>
-                        <a:rPr sz="1439" b="0">
-                          <a:solidFill>
-                            <a:srgbClr val="1F2D3A"/>
-                          </a:solidFill>
-                        </a:rPr>
-                        <a:t>White-box (MATE)</a:t>
-                      </a:r>
-                    </a:p>
-                  </a:txBody>
-                  <a:tcPr marL="54864" marR="54864" marT="27432" marB="27432" anchor="ctr">
-                    <a:solidFill>
-                      <a:srgbClr val="EEF7F8"/>
-                    </a:solidFill>
-                  </a:tcPr>
-                </a:tc>
-                <a:tc>
-                  <a:txBody>
-                    <a:bodyPr wrap="square"/>
-                    <a:lstStyle/>
-                    <a:p>
-                      <a:r>
-                        <a:rPr sz="1439" b="0">
-                          <a:solidFill>
-                            <a:srgbClr val="1F2D3A"/>
-                          </a:solidFill>
-                        </a:rPr>
-                        <a:t>Has the program</a:t>
-                      </a:r>
-                    </a:p>
-                  </a:txBody>
-                  <a:tcPr marL="54864" marR="54864" marT="27432" marB="27432" anchor="ctr">
-                    <a:solidFill>
-                      <a:srgbClr val="EEF7F8"/>
-                    </a:solidFill>
-                  </a:tcPr>
-                </a:tc>
-              </a:tr>
-              <a:tr h="370331">
-                <a:tc>
-                  <a:txBody>
-                    <a:bodyPr wrap="square"/>
-                    <a:lstStyle/>
-                    <a:p>
-                      <a:r>
-                        <a:rPr sz="1439" b="0">
-                          <a:solidFill>
-                            <a:srgbClr val="1F2D3A"/>
-                          </a:solidFill>
-                        </a:rPr>
-                        <a:t>Symmetric</a:t>
-                      </a:r>
-                    </a:p>
-                  </a:txBody>
-                  <a:tcPr marL="54864" marR="54864" marT="27432" marB="27432" anchor="ctr">
-                    <a:solidFill>
-                      <a:srgbClr val="FFFFFF"/>
-                    </a:solidFill>
-                  </a:tcPr>
-                </a:tc>
-                <a:tc>
-                  <a:txBody>
-                    <a:bodyPr wrap="square"/>
-                    <a:lstStyle/>
-                    <a:p>
-                      <a:r>
-                        <a:rPr sz="1439" b="0">
-                          <a:solidFill>
-                            <a:srgbClr val="1F2D3A"/>
-                          </a:solidFill>
-                        </a:rPr>
-                        <a:t>Asymmetric</a:t>
-                      </a:r>
-                    </a:p>
-                  </a:txBody>
-                  <a:tcPr marL="54864" marR="54864" marT="27432" marB="27432" anchor="ctr">
-                    <a:solidFill>
-                      <a:srgbClr val="FFFFFF"/>
-                    </a:solidFill>
-                  </a:tcPr>
-                </a:tc>
-                <a:tc>
-                  <a:txBody>
-                    <a:bodyPr wrap="square"/>
-                    <a:lstStyle/>
-                    <a:p>
-                      <a:r>
-                        <a:rPr sz="1439" b="0">
-                          <a:solidFill>
-                            <a:srgbClr val="1F2D3A"/>
-                          </a:solidFill>
-                        </a:rPr>
-                        <a:t>Single / paired key</a:t>
-                      </a:r>
-                    </a:p>
-                  </a:txBody>
-                  <a:tcPr marL="54864" marR="54864" marT="27432" marB="27432" anchor="ctr">
-                    <a:solidFill>
-                      <a:srgbClr val="FFFFFF"/>
-                    </a:solidFill>
-                  </a:tcPr>
-                </a:tc>
-              </a:tr>
-              <a:tr h="370331">
-                <a:tc>
-                  <a:txBody>
-                    <a:bodyPr wrap="square"/>
-                    <a:lstStyle/>
-                    <a:p>
-                      <a:r>
-                        <a:rPr sz="1439" b="0">
-                          <a:solidFill>
-                            <a:srgbClr val="1F2D3A"/>
-                          </a:solidFill>
-                        </a:rPr>
-                        <a:t>AEAD</a:t>
-                      </a:r>
-                    </a:p>
-                  </a:txBody>
-                  <a:tcPr marL="54864" marR="54864" marT="27432" marB="27432" anchor="ctr">
-                    <a:solidFill>
-                      <a:srgbClr val="EEF7F8"/>
-                    </a:solidFill>
-                  </a:tcPr>
-                </a:tc>
-                <a:tc>
-                  <a:txBody>
-                    <a:bodyPr wrap="square"/>
-                    <a:lstStyle/>
-                    <a:p>
-                      <a:r>
-                        <a:rPr sz="1439" b="0">
-                          <a:solidFill>
-                            <a:srgbClr val="1F2D3A"/>
-                          </a:solidFill>
-                        </a:rPr>
-                        <a:t>Encryption only</a:t>
-                      </a:r>
-                    </a:p>
-                  </a:txBody>
-                  <a:tcPr marL="54864" marR="54864" marT="27432" marB="27432" anchor="ctr">
-                    <a:solidFill>
-                      <a:srgbClr val="EEF7F8"/>
-                    </a:solidFill>
-                  </a:tcPr>
-                </a:tc>
-                <a:tc>
-                  <a:txBody>
-                    <a:bodyPr wrap="square"/>
-                    <a:lstStyle/>
-                    <a:p>
-                      <a:r>
-                        <a:rPr sz="1439" b="0">
-                          <a:solidFill>
-                            <a:srgbClr val="1F2D3A"/>
-                          </a:solidFill>
-                        </a:rPr>
-                        <a:t>+ integrity</a:t>
-                      </a:r>
-                    </a:p>
-                  </a:txBody>
-                  <a:tcPr marL="54864" marR="54864" marT="27432" marB="27432" anchor="ctr">
-                    <a:solidFill>
-                      <a:srgbClr val="EEF7F8"/>
-                    </a:solidFill>
-                  </a:tcPr>
-                </a:tc>
-              </a:tr>
-              <a:tr h="370336">
-                <a:tc>
-                  <a:txBody>
-                    <a:bodyPr wrap="square"/>
-                    <a:lstStyle/>
-                    <a:p>
-                      <a:r>
-                        <a:rPr sz="1439" b="0">
-                          <a:solidFill>
-                            <a:srgbClr val="1F2D3A"/>
-                          </a:solidFill>
-                        </a:rPr>
-                        <a:t>Obfuscation</a:t>
-                      </a:r>
-                    </a:p>
-                  </a:txBody>
-                  <a:tcPr marL="54864" marR="54864" marT="27432" marB="27432" anchor="ctr">
-                    <a:solidFill>
-                      <a:srgbClr val="FFFFFF"/>
-                    </a:solidFill>
-                  </a:tcPr>
-                </a:tc>
-                <a:tc>
-                  <a:txBody>
-                    <a:bodyPr wrap="square"/>
-                    <a:lstStyle/>
-                    <a:p>
-                      <a:r>
-                        <a:rPr sz="1439" b="0">
-                          <a:solidFill>
-                            <a:srgbClr val="1F2D3A"/>
-                          </a:solidFill>
-                        </a:rPr>
-                        <a:t>Secure code</a:t>
-                      </a:r>
-                    </a:p>
-                  </a:txBody>
-                  <a:tcPr marL="54864" marR="54864" marT="27432" marB="27432" anchor="ctr">
-                    <a:solidFill>
-                      <a:srgbClr val="FFFFFF"/>
-                    </a:solidFill>
-                  </a:tcPr>
-                </a:tc>
-                <a:tc>
-                  <a:txBody>
-                    <a:bodyPr wrap="square"/>
-                    <a:lstStyle/>
-                    <a:p>
-                      <a:r>
-                        <a:rPr sz="1439" b="0">
-                          <a:solidFill>
-                            <a:srgbClr val="1F2D3A"/>
-                          </a:solidFill>
-                        </a:rPr>
-                        <a:t>Does not fix the bug</a:t>
-                      </a:r>
-                    </a:p>
-                  </a:txBody>
-                  <a:tcPr marL="54864" marR="54864" marT="27432" marB="27432" anchor="ctr">
-                    <a:solidFill>
-                      <a:srgbClr val="FFFFFF"/>
-                    </a:solidFill>
-                  </a:tcPr>
-                </a:tc>
-              </a:tr>
-            </a:tbl>
-          </a:graphicData>
-        </a:graphic>
-      </p:graphicFrame>
+              <a:t>Example · True/False</a:t>
+            </a:r>
+          </a:p>
+        </p:txBody>
+      </p:sp>
+      <p:sp>
+        <p:nvSpPr>
+          <p:cNvPr id="7" name="TextBox 6"/>
+          <p:cNvSpPr txBox="1"/>
+          <p:nvPr/>
+        </p:nvSpPr>
+        <p:spPr>
+          <a:xfrm>
+            <a:off x="640080" y="1325880"/>
+            <a:ext cx="10911535" cy="1219200"/>
+          </a:xfrm>
+          <a:prstGeom prst="rect">
+            <a:avLst/>
+          </a:prstGeom>
+          <a:noFill/>
+        </p:spPr>
+        <p:txBody>
+          <a:bodyPr wrap="square" lIns="45720" rIns="45720">
+            <a:spAutoFit/>
+          </a:bodyPr>
+          <a:lstStyle/>
+          <a:p>
+            <a:pPr>
+              <a:spcAft>
+                <a:spcPts val="300"/>
+              </a:spcAft>
+            </a:pPr>
+            <a:r>
+              <a:rPr sz="2000" b="1">
+                <a:solidFill>
+                  <a:srgbClr val="006D77"/>
+                </a:solidFill>
+              </a:rPr>
+              <a:t>• </a:t>
+            </a:r>
+            <a:r>
+              <a:rPr sz="2000" b="0">
+                <a:solidFill>
+                  <a:srgbClr val="1F2D3A"/>
+                </a:solidFill>
+              </a:rPr>
+              <a:t>Obfuscation fixes the bug. </a:t>
+            </a:r>
+            <a:r>
+              <a:rPr sz="2000" b="1">
+                <a:solidFill>
+                  <a:srgbClr val="1F2D3A"/>
+                </a:solidFill>
+              </a:rPr>
+              <a:t>(F)</a:t>
+            </a:r>
+          </a:p>
+          <a:p>
+            <a:pPr>
+              <a:spcAft>
+                <a:spcPts val="300"/>
+              </a:spcAft>
+            </a:pPr>
+            <a:r>
+              <a:rPr sz="2000" b="1">
+                <a:solidFill>
+                  <a:srgbClr val="006D77"/>
+                </a:solidFill>
+              </a:rPr>
+              <a:t>• </a:t>
+            </a:r>
+            <a:r>
+              <a:rPr sz="2000" b="0">
+                <a:solidFill>
+                  <a:srgbClr val="1F2D3A"/>
+                </a:solidFill>
+              </a:rPr>
+              <a:t>The nonce must be secret. </a:t>
+            </a:r>
+            <a:r>
+              <a:rPr sz="2000" b="1">
+                <a:solidFill>
+                  <a:srgbClr val="1F2D3A"/>
+                </a:solidFill>
+              </a:rPr>
+              <a:t>(F — must be unique, not secret)</a:t>
+            </a:r>
+          </a:p>
+          <a:p>
+            <a:pPr>
+              <a:spcAft>
+                <a:spcPts val="300"/>
+              </a:spcAft>
+            </a:pPr>
+            <a:r>
+              <a:rPr sz="2000" b="1">
+                <a:solidFill>
+                  <a:srgbClr val="006D77"/>
+                </a:solidFill>
+              </a:rPr>
+              <a:t>• </a:t>
+            </a:r>
+            <a:r>
+              <a:rPr sz="2000" b="0">
+                <a:solidFill>
+                  <a:srgbClr val="1F2D3A"/>
+                </a:solidFill>
+              </a:rPr>
+              <a:t>A parameterised query prevents SQL injection. </a:t>
+            </a:r>
+            <a:r>
+              <a:rPr sz="2000" b="1">
+                <a:solidFill>
+                  <a:srgbClr val="1F2D3A"/>
+                </a:solidFill>
+              </a:rPr>
+              <a:t>(T)</a:t>
+            </a:r>
+          </a:p>
+        </p:txBody>
+      </p:sp>
     </p:spTree>
   </p:cSld>
   <p:clrMapOvr>
@@ -8955,14 +8143,6 @@
 <file path=ppt/slides/slide24.xml><?xml version="1.0" encoding="utf-8"?>
 <p:sld xmlns:a="http://schemas.openxmlformats.org/drawingml/2006/main" xmlns:p="http://schemas.openxmlformats.org/presentationml/2006/main" xmlns:r="http://schemas.openxmlformats.org/officeDocument/2006/relationships">
   <p:cSld>
-    <p:bg>
-      <p:bgPr>
-        <a:solidFill>
-          <a:srgbClr val="006D77"/>
-        </a:solidFill>
-        <a:effectLst/>
-      </p:bgPr>
-    </p:bg>
     <p:spTree>
       <p:nvGrpSpPr>
         <p:cNvPr id="1" name=""/>
@@ -8970,9 +8150,33 @@
         <p:nvPr/>
       </p:nvGrpSpPr>
       <p:grpSpPr/>
-      <p:sp>
-        <p:nvSpPr>
-          <p:cNvPr id="2" name="TextBox 1"/>
+      <p:pic>
+        <p:nvPicPr>
+          <p:cNvPr id="2" name="Picture 1" descr="rteu_logo_kucuk.jpg"/>
+          <p:cNvPicPr>
+            <a:picLocks noChangeAspect="1"/>
+          </p:cNvPicPr>
+          <p:nvPr/>
+        </p:nvPicPr>
+        <p:blipFill>
+          <a:blip r:embed="rId2"/>
+          <a:stretch>
+            <a:fillRect/>
+          </a:stretch>
+        </p:blipFill>
+        <p:spPr>
+          <a:xfrm>
+            <a:off x="640080" y="164592"/>
+            <a:ext cx="242773" cy="329184"/>
+          </a:xfrm>
+          <a:prstGeom prst="rect">
+            <a:avLst/>
+          </a:prstGeom>
+        </p:spPr>
+      </p:pic>
+      <p:sp>
+        <p:nvSpPr>
+          <p:cNvPr id="3" name="TextBox 2"/>
           <p:cNvSpPr txBox="1"/>
           <p:nvPr/>
         </p:nvSpPr>
@@ -8995,7 +8199,7 @@
             <a:r>
               <a:rPr sz="1100" b="0">
                 <a:solidFill>
-                  <a:srgbClr val="D8F0F2"/>
+                  <a:srgbClr val="5B6770"/>
                 </a:solidFill>
               </a:rPr>
               <a:t>CEN429 Secure Programming · Week 8</a:t>
@@ -9005,7 +8209,7 @@
       </p:sp>
       <p:sp>
         <p:nvSpPr>
-          <p:cNvPr id="3" name="TextBox 2"/>
+          <p:cNvPr id="4" name="TextBox 3"/>
           <p:cNvSpPr txBox="1"/>
           <p:nvPr/>
         </p:nvSpPr>
@@ -9028,7 +8232,7 @@
             <a:r>
               <a:rPr sz="1000" b="0">
                 <a:solidFill>
-                  <a:srgbClr val="D8F0F2"/>
+                  <a:srgbClr val="5B6770"/>
                 </a:solidFill>
               </a:rPr>
               <a:t>RTEU Computer Engineering · 2026-2027 Fall</a:t>
@@ -9038,7 +8242,7 @@
       </p:sp>
       <p:sp>
         <p:nvSpPr>
-          <p:cNvPr id="4" name="TextBox 3"/>
+          <p:cNvPr id="5" name="TextBox 4"/>
           <p:cNvSpPr txBox="1"/>
           <p:nvPr/>
         </p:nvSpPr>
@@ -9062,7 +8266,7 @@
             <a:r>
               <a:rPr sz="1000" b="0">
                 <a:solidFill>
-                  <a:srgbClr val="D8F0F2"/>
+                  <a:srgbClr val="5B6770"/>
                 </a:solidFill>
               </a:rPr>
               <a:t>24</a:t>
@@ -9072,34 +8276,201 @@
       </p:sp>
       <p:sp>
         <p:nvSpPr>
-          <p:cNvPr id="5" name="TextBox 4"/>
-          <p:cNvSpPr txBox="1"/>
-          <p:nvPr/>
-        </p:nvSpPr>
-        <p:spPr>
-          <a:xfrm>
-            <a:off x="640080" y="2743200"/>
-            <a:ext cx="10911535" cy="1280160"/>
-          </a:xfrm>
-          <a:prstGeom prst="rect">
-            <a:avLst/>
-          </a:prstGeom>
-          <a:noFill/>
-        </p:spPr>
-        <p:txBody>
-          <a:bodyPr wrap="square" lIns="45720" rIns="45720">
-            <a:spAutoFit/>
-          </a:bodyPr>
+          <p:cNvPr id="6" name="TextBox 5"/>
+          <p:cNvSpPr txBox="1"/>
+          <p:nvPr/>
+        </p:nvSpPr>
+        <p:spPr>
+          <a:xfrm>
+            <a:off x="640080" y="548640"/>
+            <a:ext cx="10911535" cy="731520"/>
+          </a:xfrm>
+          <a:prstGeom prst="rect">
+            <a:avLst/>
+          </a:prstGeom>
+          <a:noFill/>
+        </p:spPr>
+        <p:txBody>
+          <a:bodyPr wrap="square" lIns="45720" rIns="45720" anchor="ctr">
+            <a:spAutoFit/>
+          </a:bodyPr>
+          <a:lstStyle/>
+          <a:p>
+            <a:r>
+              <a:rPr sz="2600" b="1">
+                <a:solidFill>
+                  <a:srgbClr val="006D77"/>
+                </a:solidFill>
+              </a:rPr>
+              <a:t>Example: Find the Bug (1)</a:t>
+            </a:r>
+          </a:p>
+        </p:txBody>
+      </p:sp>
+      <p:sp>
+        <p:nvSpPr>
+          <p:cNvPr id="7" name="Rectangle 6"/>
+          <p:cNvSpPr/>
+          <p:nvPr/>
+        </p:nvSpPr>
+        <p:spPr>
+          <a:xfrm>
+            <a:off x="640080" y="1325880"/>
+            <a:ext cx="10911535" cy="1124712"/>
+          </a:xfrm>
+          <a:prstGeom prst="rect">
+            <a:avLst/>
+          </a:prstGeom>
+          <a:solidFill>
+            <a:srgbClr val="F3F4F6"/>
+          </a:solidFill>
+          <a:ln>
+            <a:solidFill>
+              <a:srgbClr val="D9DEE3"/>
+            </a:solidFill>
+          </a:ln>
+        </p:spPr>
+        <p:style>
+          <a:lnRef idx="1">
+            <a:schemeClr val="accent1"/>
+          </a:lnRef>
+          <a:fillRef idx="3">
+            <a:schemeClr val="accent1"/>
+          </a:fillRef>
+          <a:effectRef idx="2">
+            <a:schemeClr val="accent1"/>
+          </a:effectRef>
+          <a:fontRef idx="minor">
+            <a:schemeClr val="lt1"/>
+          </a:fontRef>
+        </p:style>
+        <p:txBody>
+          <a:bodyPr rtlCol="0" anchor="t" wrap="none" lIns="137160" rIns="137160" tIns="91440" bIns="91440"/>
           <a:lstStyle/>
           <a:p>
             <a:pPr algn="l"/>
             <a:r>
-              <a:rPr sz="4000" b="1">
-                <a:solidFill>
-                  <a:srgbClr val="FFFFFF"/>
-                </a:solidFill>
-              </a:rPr>
-              <a:t>Appendix · Solved Practice Questions</a:t>
+              <a:rPr sz="1116">
+                <a:solidFill>
+                  <a:srgbClr val="1F2D3A"/>
+                </a:solidFill>
+                <a:latin typeface="Consolas"/>
+              </a:rPr>
+              <a:t>void kaydet(const char *ad) {</a:t>
+            </a:r>
+          </a:p>
+          <a:p>
+            <a:pPr algn="l"/>
+            <a:r>
+              <a:rPr sz="1116">
+                <a:solidFill>
+                  <a:srgbClr val="1F2D3A"/>
+                </a:solidFill>
+                <a:latin typeface="Consolas"/>
+              </a:rPr>
+              <a:t>    char tampon[32];</a:t>
+            </a:r>
+          </a:p>
+          <a:p>
+            <a:pPr algn="l"/>
+            <a:r>
+              <a:rPr sz="1116">
+                <a:solidFill>
+                  <a:srgbClr val="1F2D3A"/>
+                </a:solidFill>
+                <a:latin typeface="Consolas"/>
+              </a:rPr>
+              <a:t>    sprintf(tampon, "kullanici=%s", ad);</a:t>
+            </a:r>
+          </a:p>
+          <a:p>
+            <a:pPr algn="l"/>
+            <a:r>
+              <a:rPr sz="1116">
+                <a:solidFill>
+                  <a:srgbClr val="1F2D3A"/>
+                </a:solidFill>
+                <a:latin typeface="Consolas"/>
+              </a:rPr>
+              <a:t>    syslog(LOG_INFO, tampon);</a:t>
+            </a:r>
+          </a:p>
+          <a:p>
+            <a:pPr algn="l"/>
+            <a:r>
+              <a:rPr sz="1116">
+                <a:solidFill>
+                  <a:srgbClr val="1F2D3A"/>
+                </a:solidFill>
+                <a:latin typeface="Consolas"/>
+              </a:rPr>
+              <a:t>}</a:t>
+            </a:r>
+          </a:p>
+        </p:txBody>
+      </p:sp>
+      <p:sp>
+        <p:nvSpPr>
+          <p:cNvPr id="8" name="Rectangle 7"/>
+          <p:cNvSpPr/>
+          <p:nvPr/>
+        </p:nvSpPr>
+        <p:spPr>
+          <a:xfrm>
+            <a:off x="640080" y="2560320"/>
+            <a:ext cx="10911535" cy="614476"/>
+          </a:xfrm>
+          <a:prstGeom prst="rect">
+            <a:avLst/>
+          </a:prstGeom>
+          <a:solidFill>
+            <a:srgbClr val="F3F4F6"/>
+          </a:solidFill>
+          <a:ln>
+            <a:solidFill>
+              <a:srgbClr val="D9DEE3"/>
+            </a:solidFill>
+          </a:ln>
+        </p:spPr>
+        <p:style>
+          <a:lnRef idx="1">
+            <a:schemeClr val="accent1"/>
+          </a:lnRef>
+          <a:fillRef idx="3">
+            <a:schemeClr val="accent1"/>
+          </a:fillRef>
+          <a:effectRef idx="2">
+            <a:schemeClr val="accent1"/>
+          </a:effectRef>
+          <a:fontRef idx="minor">
+            <a:schemeClr val="lt1"/>
+          </a:fontRef>
+        </p:style>
+        <p:txBody>
+          <a:bodyPr rtlCol="0" anchor="t" wrap="none" lIns="137160" rIns="137160" tIns="91440" bIns="91440"/>
+          <a:lstStyle/>
+          <a:p>
+            <a:pPr algn="l"/>
+            <a:r>
+              <a:rPr sz="1116">
+                <a:solidFill>
+                  <a:srgbClr val="1F2D3A"/>
+                </a:solidFill>
+                <a:latin typeface="Consolas"/>
+              </a:rPr>
+              <a:t>char parola[64];  oku(parola, sizeof parola);  dogrula(parola);</a:t>
+            </a:r>
+          </a:p>
+          <a:p>
+            <a:pPr algn="l"/>
+            <a:r>
+              <a:rPr sz="1116">
+                <a:solidFill>
+                  <a:srgbClr val="1F2D3A"/>
+                </a:solidFill>
+                <a:latin typeface="Consolas"/>
+              </a:rPr>
+              <a:t>memset(parola, 0, sizeof parola);  return;</a:t>
             </a:r>
           </a:p>
         </p:txBody>
@@ -9269,88 +8640,198 @@
           <a:lstStyle/>
           <a:p>
             <a:r>
-              <a:rPr sz="3000" b="1">
+              <a:rPr sz="2600" b="1">
                 <a:solidFill>
                   <a:srgbClr val="006D77"/>
                 </a:solidFill>
               </a:rPr>
-              <a:t>Question 1</a:t>
-            </a:r>
-          </a:p>
-        </p:txBody>
-      </p:sp>
-      <p:sp>
-        <p:nvSpPr>
-          <p:cNvPr id="7" name="TextBox 6"/>
-          <p:cNvSpPr txBox="1"/>
+              <a:t>Example: Find the Bug (2)</a:t>
+            </a:r>
+          </a:p>
+        </p:txBody>
+      </p:sp>
+      <p:sp>
+        <p:nvSpPr>
+          <p:cNvPr id="7" name="Rectangle 6"/>
+          <p:cNvSpPr/>
           <p:nvPr/>
         </p:nvSpPr>
         <p:spPr>
           <a:xfrm>
             <a:off x="640080" y="1325880"/>
-            <a:ext cx="10911535" cy="439928"/>
-          </a:xfrm>
-          <a:prstGeom prst="rect">
-            <a:avLst/>
-          </a:prstGeom>
-          <a:noFill/>
-        </p:spPr>
-        <p:txBody>
-          <a:bodyPr wrap="square" lIns="45720" rIns="45720">
-            <a:spAutoFit/>
-          </a:bodyPr>
+            <a:ext cx="10911535" cy="444398"/>
+          </a:xfrm>
+          <a:prstGeom prst="rect">
+            <a:avLst/>
+          </a:prstGeom>
+          <a:solidFill>
+            <a:srgbClr val="F3F4F6"/>
+          </a:solidFill>
+          <a:ln>
+            <a:solidFill>
+              <a:srgbClr val="D9DEE3"/>
+            </a:solidFill>
+          </a:ln>
+        </p:spPr>
+        <p:style>
+          <a:lnRef idx="1">
+            <a:schemeClr val="accent1"/>
+          </a:lnRef>
+          <a:fillRef idx="3">
+            <a:schemeClr val="accent1"/>
+          </a:fillRef>
+          <a:effectRef idx="2">
+            <a:schemeClr val="accent1"/>
+          </a:effectRef>
+          <a:fontRef idx="minor">
+            <a:schemeClr val="lt1"/>
+          </a:fontRef>
+        </p:style>
+        <p:txBody>
+          <a:bodyPr rtlCol="0" anchor="t" wrap="none" lIns="137160" rIns="137160" tIns="91440" bIns="91440"/>
           <a:lstStyle/>
           <a:p>
             <a:pPr algn="l"/>
             <a:r>
-              <a:rPr sz="2000" b="1">
+              <a:rPr sz="1116">
                 <a:solidFill>
                   <a:srgbClr val="1F2D3A"/>
                 </a:solidFill>
-              </a:rPr>
-              <a:t>Why does a MATE attacker make cryptography alone insufficient?</a:t>
-            </a:r>
-          </a:p>
-        </p:txBody>
-      </p:sp>
-      <p:sp>
-        <p:nvSpPr>
-          <p:cNvPr id="8" name="TextBox 7"/>
-          <p:cNvSpPr txBox="1"/>
-          <p:nvPr/>
-        </p:nvSpPr>
-        <p:spPr>
-          <a:xfrm>
-            <a:off x="640080" y="1875536"/>
-            <a:ext cx="10911535" cy="1100327"/>
-          </a:xfrm>
-          <a:prstGeom prst="rect">
-            <a:avLst/>
-          </a:prstGeom>
-          <a:noFill/>
-        </p:spPr>
-        <p:txBody>
-          <a:bodyPr wrap="square" lIns="45720" rIns="45720">
-            <a:spAutoFit/>
-          </a:bodyPr>
+                <a:latin typeface="Consolas"/>
+              </a:rPr>
+              <a:t>String sql = "SELECT * FROM notlar WHERE ogrenci = '" + no + "'";</a:t>
+            </a:r>
+          </a:p>
+        </p:txBody>
+      </p:sp>
+      <p:sp>
+        <p:nvSpPr>
+          <p:cNvPr id="8" name="Rectangle 7"/>
+          <p:cNvSpPr/>
+          <p:nvPr/>
+        </p:nvSpPr>
+        <p:spPr>
+          <a:xfrm>
+            <a:off x="640080" y="1880006"/>
+            <a:ext cx="10911535" cy="784555"/>
+          </a:xfrm>
+          <a:prstGeom prst="rect">
+            <a:avLst/>
+          </a:prstGeom>
+          <a:solidFill>
+            <a:srgbClr val="F3F4F6"/>
+          </a:solidFill>
+          <a:ln>
+            <a:solidFill>
+              <a:srgbClr val="D9DEE3"/>
+            </a:solidFill>
+          </a:ln>
+        </p:spPr>
+        <p:style>
+          <a:lnRef idx="1">
+            <a:schemeClr val="accent1"/>
+          </a:lnRef>
+          <a:fillRef idx="3">
+            <a:schemeClr val="accent1"/>
+          </a:fillRef>
+          <a:effectRef idx="2">
+            <a:schemeClr val="accent1"/>
+          </a:effectRef>
+          <a:fontRef idx="minor">
+            <a:schemeClr val="lt1"/>
+          </a:fontRef>
+        </p:style>
+        <p:txBody>
+          <a:bodyPr rtlCol="0" anchor="t" wrap="none" lIns="137160" rIns="137160" tIns="91440" bIns="91440"/>
           <a:lstStyle/>
           <a:p>
             <a:pPr algn="l"/>
             <a:r>
-              <a:rPr sz="2000" b="1">
+              <a:rPr sz="1116">
                 <a:solidFill>
                   <a:srgbClr val="1F2D3A"/>
                 </a:solidFill>
-              </a:rPr>
-              <a:t>Answer:</a:t>
-            </a:r>
-            <a:r>
-              <a:rPr sz="2000" b="0">
+                <a:latin typeface="Consolas"/>
+              </a:rPr>
+              <a:t>EVP_DecryptUpdate(ctx, acik, &amp;n, sifreli, sifreli_n);</a:t>
+            </a:r>
+          </a:p>
+          <a:p>
+            <a:pPr algn="l"/>
+            <a:r>
+              <a:rPr sz="1116">
                 <a:solidFill>
                   <a:srgbClr val="1F2D3A"/>
                 </a:solidFill>
-              </a:rPr>
-              <a:t> The key sits in memory; the attacker can run the program and read it. Cryptography provides confidentiality, but in a white-box setting the key is not protected; RASP/obfuscation/white-box cryptography is needed.</a:t>
+                <a:latin typeface="Consolas"/>
+              </a:rPr>
+              <a:t>kullan(acik, n);</a:t>
+            </a:r>
+          </a:p>
+          <a:p>
+            <a:pPr algn="l"/>
+            <a:r>
+              <a:rPr sz="1116">
+                <a:solidFill>
+                  <a:srgbClr val="1F2D3A"/>
+                </a:solidFill>
+                <a:latin typeface="Consolas"/>
+              </a:rPr>
+              <a:t>EVP_DecryptFinal_ex(ctx, acik + n, &amp;m);</a:t>
+            </a:r>
+          </a:p>
+        </p:txBody>
+      </p:sp>
+      <p:sp>
+        <p:nvSpPr>
+          <p:cNvPr id="9" name="Rectangle 8"/>
+          <p:cNvSpPr/>
+          <p:nvPr/>
+        </p:nvSpPr>
+        <p:spPr>
+          <a:xfrm>
+            <a:off x="640080" y="2774289"/>
+            <a:ext cx="10911535" cy="444398"/>
+          </a:xfrm>
+          <a:prstGeom prst="rect">
+            <a:avLst/>
+          </a:prstGeom>
+          <a:solidFill>
+            <a:srgbClr val="F3F4F6"/>
+          </a:solidFill>
+          <a:ln>
+            <a:solidFill>
+              <a:srgbClr val="D9DEE3"/>
+            </a:solidFill>
+          </a:ln>
+        </p:spPr>
+        <p:style>
+          <a:lnRef idx="1">
+            <a:schemeClr val="accent1"/>
+          </a:lnRef>
+          <a:fillRef idx="3">
+            <a:schemeClr val="accent1"/>
+          </a:fillRef>
+          <a:effectRef idx="2">
+            <a:schemeClr val="accent1"/>
+          </a:effectRef>
+          <a:fontRef idx="minor">
+            <a:schemeClr val="lt1"/>
+          </a:fontRef>
+        </p:style>
+        <p:txBody>
+          <a:bodyPr rtlCol="0" anchor="t" wrap="none" lIns="137160" rIns="137160" tIns="91440" bIns="91440"/>
+          <a:lstStyle/>
+          <a:p>
+            <a:pPr algn="l"/>
+            <a:r>
+              <a:rPr sz="1116">
+                <a:solidFill>
+                  <a:srgbClr val="1F2D3A"/>
+                </a:solidFill>
+                <a:latin typeface="Consolas"/>
+              </a:rPr>
+              <a:t>try { pinDenetle(zincir); } catch (KeyStoreException e) { e.printStackTrace(); }</a:t>
             </a:r>
           </a:p>
         </p:txBody>
@@ -9525,7 +9006,7 @@
                   <a:srgbClr val="006D77"/>
                 </a:solidFill>
               </a:rPr>
-              <a:t>Question 2</a:t>
+              <a:t>Example: Scenarios</a:t>
             </a:r>
           </a:p>
         </p:txBody>
@@ -9539,7 +9020,7 @@
         <p:spPr>
           <a:xfrm>
             <a:off x="640080" y="1325880"/>
-            <a:ext cx="10911535" cy="439928"/>
+            <a:ext cx="10911535" cy="2346960"/>
           </a:xfrm>
           <a:prstGeom prst="rect">
             <a:avLst/>
@@ -9552,48 +9033,34 @@
           </a:bodyPr>
           <a:lstStyle/>
           <a:p>
-            <a:pPr algn="l"/>
+            <a:pPr>
+              <a:spcAft>
+                <a:spcPts val="300"/>
+              </a:spcAft>
+            </a:pPr>
             <a:r>
               <a:rPr sz="2000" b="1">
                 <a:solidFill>
+                  <a:srgbClr val="006D77"/>
+                </a:solidFill>
+              </a:rPr>
+              <a:t>1. </a:t>
+            </a:r>
+            <a:r>
+              <a:rPr sz="2000" b="0">
+                <a:solidFill>
                   <a:srgbClr val="1F2D3A"/>
                 </a:solidFill>
               </a:rPr>
-              <a:t>What happens if the same nonce is used twice in AES-GCM?</a:t>
-            </a:r>
-          </a:p>
-        </p:txBody>
-      </p:sp>
-      <p:sp>
-        <p:nvSpPr>
-          <p:cNvPr id="8" name="TextBox 7"/>
-          <p:cNvSpPr txBox="1"/>
-          <p:nvPr/>
-        </p:nvSpPr>
-        <p:spPr>
-          <a:xfrm>
-            <a:off x="640080" y="1875536"/>
-            <a:ext cx="10911535" cy="770128"/>
-          </a:xfrm>
-          <a:prstGeom prst="rect">
-            <a:avLst/>
-          </a:prstGeom>
-          <a:noFill/>
-        </p:spPr>
-        <p:txBody>
-          <a:bodyPr wrap="square" lIns="45720" rIns="45720">
-            <a:spAutoFit/>
-          </a:bodyPr>
-          <a:lstStyle/>
-          <a:p>
-            <a:pPr algn="l"/>
+              <a:t>The same </a:t>
+            </a:r>
             <a:r>
               <a:rPr sz="2000" b="1">
                 <a:solidFill>
                   <a:srgbClr val="1F2D3A"/>
                 </a:solidFill>
               </a:rPr>
-              <a:t>Answer:</a:t>
+              <a:t>embedded AES key</a:t>
             </a:r>
             <a:r>
               <a:rPr sz="2000" b="0">
@@ -9601,7 +9068,155 @@
                   <a:srgbClr val="1F2D3A"/>
                 </a:solidFill>
               </a:rPr>
-              <a:t> Confidentiality and integrity collapse; the keystream and data can leak. The nonce must always be unique.</a:t>
+              <a:t> on every user's device: risks and recommendation?</a:t>
+            </a:r>
+          </a:p>
+          <a:p>
+            <a:pPr>
+              <a:spcAft>
+                <a:spcPts val="300"/>
+              </a:spcAft>
+            </a:pPr>
+            <a:r>
+              <a:rPr sz="2000" b="1">
+                <a:solidFill>
+                  <a:srgbClr val="006D77"/>
+                </a:solidFill>
+              </a:rPr>
+              <a:t>2. </a:t>
+            </a:r>
+            <a:r>
+              <a:rPr sz="2000" b="0">
+                <a:solidFill>
+                  <a:srgbClr val="1F2D3A"/>
+                </a:solidFill>
+              </a:rPr>
+              <a:t>A shipped package is a </a:t>
+            </a:r>
+            <a:r>
+              <a:rPr sz="2000" b="1">
+                <a:solidFill>
+                  <a:srgbClr val="1F2D3A"/>
+                </a:solidFill>
+              </a:rPr>
+              <a:t>debug build</a:t>
+            </a:r>
+            <a:r>
+              <a:rPr sz="2000" b="0">
+                <a:solidFill>
+                  <a:srgbClr val="1F2D3A"/>
+                </a:solidFill>
+              </a:rPr>
+              <a:t>: which findings?</a:t>
+            </a:r>
+          </a:p>
+          <a:p>
+            <a:pPr>
+              <a:spcAft>
+                <a:spcPts val="300"/>
+              </a:spcAft>
+            </a:pPr>
+            <a:r>
+              <a:rPr sz="2000" b="1">
+                <a:solidFill>
+                  <a:srgbClr val="006D77"/>
+                </a:solidFill>
+              </a:rPr>
+              <a:t>3. </a:t>
+            </a:r>
+            <a:r>
+              <a:rPr sz="2000" b="0">
+                <a:solidFill>
+                  <a:srgbClr val="1F2D3A"/>
+                </a:solidFill>
+              </a:rPr>
+              <a:t>"I did not make this transaction": which STRIDE letter, which evidence?</a:t>
+            </a:r>
+          </a:p>
+          <a:p>
+            <a:pPr>
+              <a:spcAft>
+                <a:spcPts val="300"/>
+              </a:spcAft>
+            </a:pPr>
+            <a:r>
+              <a:rPr sz="2000" b="1">
+                <a:solidFill>
+                  <a:srgbClr val="006D77"/>
+                </a:solidFill>
+              </a:rPr>
+              <a:t>4. </a:t>
+            </a:r>
+            <a:r>
+              <a:rPr sz="2000" b="0">
+                <a:solidFill>
+                  <a:srgbClr val="1F2D3A"/>
+                </a:solidFill>
+              </a:rPr>
+              <a:t>A function that extracts an archive: which bugs do you guard against?</a:t>
+            </a:r>
+          </a:p>
+          <a:p>
+            <a:pPr>
+              <a:spcAft>
+                <a:spcPts val="300"/>
+              </a:spcAft>
+            </a:pPr>
+            <a:r>
+              <a:rPr sz="2000" b="1">
+                <a:solidFill>
+                  <a:srgbClr val="006D77"/>
+                </a:solidFill>
+              </a:rPr>
+              <a:t>5. </a:t>
+            </a:r>
+            <a:r>
+              <a:rPr sz="2000" b="0">
+                <a:solidFill>
+                  <a:srgbClr val="1F2D3A"/>
+                </a:solidFill>
+              </a:rPr>
+              <a:t>What was the real problem in Log4Shell, what would have prevented it?</a:t>
+            </a:r>
+          </a:p>
+          <a:p>
+            <a:pPr>
+              <a:spcAft>
+                <a:spcPts val="300"/>
+              </a:spcAft>
+            </a:pPr>
+            <a:r>
+              <a:rPr sz="2000" b="1">
+                <a:solidFill>
+                  <a:srgbClr val="006D77"/>
+                </a:solidFill>
+              </a:rPr>
+              <a:t>6. </a:t>
+            </a:r>
+            <a:r>
+              <a:rPr sz="2000" b="0">
+                <a:solidFill>
+                  <a:srgbClr val="1F2D3A"/>
+                </a:solidFill>
+              </a:rPr>
+              <a:t>Why shouldn't RASP checks be evaluated with a single </a:t>
+            </a:r>
+            <a:r>
+              <a:rPr sz="2000" b="0">
+                <a:solidFill>
+                  <a:srgbClr val="A1123F"/>
+                </a:solidFill>
+                <a:latin typeface="Consolas"/>
+              </a:rPr>
+              <a:t>if</a:t>
+            </a:r>
+            <a:r>
+              <a:rPr sz="2000" b="0">
+                <a:solidFill>
+                  <a:srgbClr val="1F2D3A"/>
+                </a:solidFill>
+              </a:rPr>
+              <a:t>?</a:t>
             </a:r>
           </a:p>
         </p:txBody>
@@ -9776,20 +9391,89 @@
                   <a:srgbClr val="006D77"/>
                 </a:solidFill>
               </a:rPr>
-              <a:t>Question 3</a:t>
-            </a:r>
-          </a:p>
-        </p:txBody>
-      </p:sp>
-      <p:sp>
-        <p:nvSpPr>
-          <p:cNvPr id="7" name="TextBox 6"/>
-          <p:cNvSpPr txBox="1"/>
+              <a:t>Final Word (Quiz-1 Prep)</a:t>
+            </a:r>
+          </a:p>
+        </p:txBody>
+      </p:sp>
+      <p:sp>
+        <p:nvSpPr>
+          <p:cNvPr id="7" name="Rectangle 6"/>
+          <p:cNvSpPr/>
           <p:nvPr/>
         </p:nvSpPr>
         <p:spPr>
           <a:xfrm>
             <a:off x="640080" y="1325880"/>
+            <a:ext cx="10911535" cy="934719"/>
+          </a:xfrm>
+          <a:prstGeom prst="rect">
+            <a:avLst/>
+          </a:prstGeom>
+          <a:solidFill>
+            <a:srgbClr val="EEF7F8"/>
+          </a:solidFill>
+          <a:ln>
+            <a:solidFill>
+              <a:srgbClr val="006D77"/>
+            </a:solidFill>
+          </a:ln>
+        </p:spPr>
+        <p:style>
+          <a:lnRef idx="1">
+            <a:schemeClr val="accent1"/>
+          </a:lnRef>
+          <a:fillRef idx="3">
+            <a:schemeClr val="accent1"/>
+          </a:fillRef>
+          <a:effectRef idx="2">
+            <a:schemeClr val="accent1"/>
+          </a:effectRef>
+          <a:fontRef idx="minor">
+            <a:schemeClr val="lt1"/>
+          </a:fontRef>
+        </p:style>
+        <p:txBody>
+          <a:bodyPr rtlCol="0" anchor="ctr" wrap="square" lIns="182880"/>
+          <a:lstStyle/>
+          <a:p>
+            <a:pPr algn="l"/>
+            <a:r>
+              <a:rPr sz="2000" b="0">
+                <a:solidFill>
+                  <a:srgbClr val="1F2D3A"/>
+                </a:solidFill>
+              </a:rPr>
+              <a:t>Not memorization — what's measured is the </a:t>
+            </a:r>
+            <a:r>
+              <a:rPr sz="2000" b="1">
+                <a:solidFill>
+                  <a:srgbClr val="1F2D3A"/>
+                </a:solidFill>
+              </a:rPr>
+              <a:t>why</a:t>
+            </a:r>
+            <a:r>
+              <a:rPr sz="2000" b="0">
+                <a:solidFill>
+                  <a:srgbClr val="1F2D3A"/>
+                </a:solidFill>
+              </a:rPr>
+              <a:t>: "why this mode?", "why this check?", "what doesn't it protect?"</a:t>
+            </a:r>
+          </a:p>
+        </p:txBody>
+      </p:sp>
+      <p:sp>
+        <p:nvSpPr>
+          <p:cNvPr id="8" name="TextBox 7"/>
+          <p:cNvSpPr txBox="1"/>
+          <p:nvPr/>
+        </p:nvSpPr>
+        <p:spPr>
+          <a:xfrm>
+            <a:off x="640080" y="2370328"/>
             <a:ext cx="10911535" cy="439928"/>
           </a:xfrm>
           <a:prstGeom prst="rect">
@@ -9805,54 +9489,12 @@
           <a:p>
             <a:pPr algn="l"/>
             <a:r>
-              <a:rPr sz="2000" b="1">
+              <a:rPr sz="2000" b="0">
                 <a:solidFill>
                   <a:srgbClr val="1F2D3A"/>
                 </a:solidFill>
               </a:rPr>
-              <a:t>What definitively prevents SQL injection?</a:t>
-            </a:r>
-          </a:p>
-        </p:txBody>
-      </p:sp>
-      <p:sp>
-        <p:nvSpPr>
-          <p:cNvPr id="8" name="TextBox 7"/>
-          <p:cNvSpPr txBox="1"/>
-          <p:nvPr/>
-        </p:nvSpPr>
-        <p:spPr>
-          <a:xfrm>
-            <a:off x="640080" y="1875536"/>
-            <a:ext cx="10911535" cy="770128"/>
-          </a:xfrm>
-          <a:prstGeom prst="rect">
-            <a:avLst/>
-          </a:prstGeom>
-          <a:noFill/>
-        </p:spPr>
-        <p:txBody>
-          <a:bodyPr wrap="square" lIns="45720" rIns="45720">
-            <a:spAutoFit/>
-          </a:bodyPr>
-          <a:lstStyle/>
-          <a:p>
-            <a:pPr algn="l"/>
-            <a:r>
-              <a:rPr sz="2000" b="1">
-                <a:solidFill>
-                  <a:srgbClr val="1F2D3A"/>
-                </a:solidFill>
-              </a:rPr>
-              <a:t>Answer:</a:t>
-            </a:r>
-            <a:r>
-              <a:rPr sz="2000" b="0">
-                <a:solidFill>
-                  <a:srgbClr val="1F2D3A"/>
-                </a:solidFill>
-              </a:rPr>
-              <a:t> A parameterised query (prepared statement); data is never interpreted as a command. No string concatenation.</a:t>
+              <a:t>Good luck.</a:t>
             </a:r>
           </a:p>
         </p:txBody>
@@ -10027,7 +9669,7 @@
                   <a:srgbClr val="006D77"/>
                 </a:solidFill>
               </a:rPr>
-              <a:t>Question 4</a:t>
+              <a:t>Next Week</a:t>
             </a:r>
           </a:p>
         </p:txBody>
@@ -10061,7 +9703,7 @@
                   <a:srgbClr val="1F2D3A"/>
                 </a:solidFill>
               </a:rPr>
-              <a:t>Which overflow can ASan not see?</a:t>
+              <a:t>Week 9 — Advanced Code Obfuscation and Diversification</a:t>
             </a:r>
           </a:p>
         </p:txBody>
@@ -10075,7 +9717,7 @@
         <p:spPr>
           <a:xfrm>
             <a:off x="640080" y="1875536"/>
-            <a:ext cx="10911535" cy="770128"/>
+            <a:ext cx="10911535" cy="1219200"/>
           </a:xfrm>
           <a:prstGeom prst="rect">
             <a:avLst/>
@@ -10088,14 +9730,41 @@
           </a:bodyPr>
           <a:lstStyle/>
           <a:p>
-            <a:pPr algn="l"/>
+            <a:pPr>
+              <a:spcAft>
+                <a:spcPts val="300"/>
+              </a:spcAft>
+            </a:pPr>
             <a:r>
               <a:rPr sz="2000" b="1">
                 <a:solidFill>
+                  <a:srgbClr val="006D77"/>
+                </a:solidFill>
+              </a:rPr>
+              <a:t>• </a:t>
+            </a:r>
+            <a:r>
+              <a:rPr sz="2000" b="0">
+                <a:solidFill>
                   <a:srgbClr val="1F2D3A"/>
                 </a:solidFill>
               </a:rPr>
-              <a:t>Answer:</a:t>
+              <a:t>Obfuscation taxonomy, opaque predicates, data encoding</a:t>
+            </a:r>
+          </a:p>
+          <a:p>
+            <a:pPr>
+              <a:spcAft>
+                <a:spcPts val="300"/>
+              </a:spcAft>
+            </a:pPr>
+            <a:r>
+              <a:rPr sz="2000" b="1">
+                <a:solidFill>
+                  <a:srgbClr val="006D77"/>
+                </a:solidFill>
+              </a:rPr>
+              <a:t>• </a:t>
             </a:r>
             <a:r>
               <a:rPr sz="2000" b="0">
@@ -10103,258 +9772,30 @@
                   <a:srgbClr val="1F2D3A"/>
                 </a:solidFill>
               </a:rPr>
-              <a:t> A field-to-field overflow within the same structure (there is no poisoned region in between).</a:t>
-            </a:r>
-          </a:p>
-        </p:txBody>
-      </p:sp>
-    </p:spTree>
-  </p:cSld>
-  <p:clrMapOvr>
-    <a:masterClrMapping/>
-  </p:clrMapOvr>
-</p:sld>
-</file>
-
-<file path=ppt/slides/slide29.xml><?xml version="1.0" encoding="utf-8"?>
-<p:sld xmlns:a="http://schemas.openxmlformats.org/drawingml/2006/main" xmlns:p="http://schemas.openxmlformats.org/presentationml/2006/main" xmlns:r="http://schemas.openxmlformats.org/officeDocument/2006/relationships">
-  <p:cSld>
-    <p:spTree>
-      <p:nvGrpSpPr>
-        <p:cNvPr id="1" name=""/>
-        <p:cNvGrpSpPr/>
-        <p:nvPr/>
-      </p:nvGrpSpPr>
-      <p:grpSpPr/>
-      <p:pic>
-        <p:nvPicPr>
-          <p:cNvPr id="2" name="Picture 1" descr="rteu_logo_kucuk.jpg"/>
-          <p:cNvPicPr>
-            <a:picLocks noChangeAspect="1"/>
-          </p:cNvPicPr>
-          <p:nvPr/>
-        </p:nvPicPr>
-        <p:blipFill>
-          <a:blip r:embed="rId2"/>
-          <a:stretch>
-            <a:fillRect/>
-          </a:stretch>
-        </p:blipFill>
-        <p:spPr>
-          <a:xfrm>
-            <a:off x="640080" y="164592"/>
-            <a:ext cx="242773" cy="329184"/>
-          </a:xfrm>
-          <a:prstGeom prst="rect">
-            <a:avLst/>
-          </a:prstGeom>
-        </p:spPr>
-      </p:pic>
-      <p:sp>
-        <p:nvSpPr>
-          <p:cNvPr id="3" name="TextBox 2"/>
-          <p:cNvSpPr txBox="1"/>
-          <p:nvPr/>
-        </p:nvSpPr>
-        <p:spPr>
-          <a:xfrm>
-            <a:off x="1051560" y="182880"/>
-            <a:ext cx="7315200" cy="320040"/>
-          </a:xfrm>
-          <a:prstGeom prst="rect">
-            <a:avLst/>
-          </a:prstGeom>
-          <a:noFill/>
-        </p:spPr>
-        <p:txBody>
-          <a:bodyPr wrap="square" lIns="45720" rIns="45720">
-            <a:spAutoFit/>
-          </a:bodyPr>
-          <a:lstStyle/>
-          <a:p>
-            <a:r>
-              <a:rPr sz="1100" b="0">
-                <a:solidFill>
-                  <a:srgbClr val="5B6770"/>
-                </a:solidFill>
-              </a:rPr>
-              <a:t>CEN429 Secure Programming · Week 8</a:t>
-            </a:r>
-          </a:p>
-        </p:txBody>
-      </p:sp>
-      <p:sp>
-        <p:nvSpPr>
-          <p:cNvPr id="4" name="TextBox 3"/>
-          <p:cNvSpPr txBox="1"/>
-          <p:nvPr/>
-        </p:nvSpPr>
-        <p:spPr>
-          <a:xfrm>
-            <a:off x="640080" y="6446520"/>
-            <a:ext cx="7315200" cy="274320"/>
-          </a:xfrm>
-          <a:prstGeom prst="rect">
-            <a:avLst/>
-          </a:prstGeom>
-          <a:noFill/>
-        </p:spPr>
-        <p:txBody>
-          <a:bodyPr wrap="square" lIns="45720" rIns="45720">
-            <a:spAutoFit/>
-          </a:bodyPr>
-          <a:lstStyle/>
-          <a:p>
-            <a:r>
-              <a:rPr sz="1000" b="0">
-                <a:solidFill>
-                  <a:srgbClr val="5B6770"/>
-                </a:solidFill>
-              </a:rPr>
-              <a:t>RTEU Computer Engineering · 2026-2027 Fall</a:t>
-            </a:r>
-          </a:p>
-        </p:txBody>
-      </p:sp>
-      <p:sp>
-        <p:nvSpPr>
-          <p:cNvPr id="5" name="TextBox 4"/>
-          <p:cNvSpPr txBox="1"/>
-          <p:nvPr/>
-        </p:nvSpPr>
-        <p:spPr>
-          <a:xfrm>
-            <a:off x="10637215" y="6446520"/>
-            <a:ext cx="914400" cy="274320"/>
-          </a:xfrm>
-          <a:prstGeom prst="rect">
-            <a:avLst/>
-          </a:prstGeom>
-          <a:noFill/>
-        </p:spPr>
-        <p:txBody>
-          <a:bodyPr wrap="square" lIns="45720" rIns="45720">
-            <a:spAutoFit/>
-          </a:bodyPr>
-          <a:lstStyle/>
-          <a:p>
-            <a:pPr algn="r"/>
-            <a:r>
-              <a:rPr sz="1000" b="0">
-                <a:solidFill>
-                  <a:srgbClr val="5B6770"/>
-                </a:solidFill>
-              </a:rPr>
-              <a:t>29</a:t>
-            </a:r>
-          </a:p>
-        </p:txBody>
-      </p:sp>
-      <p:sp>
-        <p:nvSpPr>
-          <p:cNvPr id="6" name="TextBox 5"/>
-          <p:cNvSpPr txBox="1"/>
-          <p:nvPr/>
-        </p:nvSpPr>
-        <p:spPr>
-          <a:xfrm>
-            <a:off x="640080" y="548640"/>
-            <a:ext cx="10911535" cy="731520"/>
-          </a:xfrm>
-          <a:prstGeom prst="rect">
-            <a:avLst/>
-          </a:prstGeom>
-          <a:noFill/>
-        </p:spPr>
-        <p:txBody>
-          <a:bodyPr wrap="square" lIns="45720" rIns="45720" anchor="ctr">
-            <a:spAutoFit/>
-          </a:bodyPr>
-          <a:lstStyle/>
-          <a:p>
-            <a:r>
-              <a:rPr sz="3000" b="1">
+              <a:t>Virtualisation and compiler-based obfuscation (concept)</a:t>
+            </a:r>
+          </a:p>
+          <a:p>
+            <a:pPr>
+              <a:spcAft>
+                <a:spcPts val="300"/>
+              </a:spcAft>
+            </a:pPr>
+            <a:r>
+              <a:rPr sz="2000" b="1">
                 <a:solidFill>
                   <a:srgbClr val="006D77"/>
                 </a:solidFill>
               </a:rPr>
-              <a:t>Question 5</a:t>
-            </a:r>
-          </a:p>
-        </p:txBody>
-      </p:sp>
-      <p:sp>
-        <p:nvSpPr>
-          <p:cNvPr id="7" name="TextBox 6"/>
-          <p:cNvSpPr txBox="1"/>
-          <p:nvPr/>
-        </p:nvSpPr>
-        <p:spPr>
-          <a:xfrm>
-            <a:off x="640080" y="1325880"/>
-            <a:ext cx="10911535" cy="439928"/>
-          </a:xfrm>
-          <a:prstGeom prst="rect">
-            <a:avLst/>
-          </a:prstGeom>
-          <a:noFill/>
-        </p:spPr>
-        <p:txBody>
-          <a:bodyPr wrap="square" lIns="45720" rIns="45720">
-            <a:spAutoFit/>
-          </a:bodyPr>
-          <a:lstStyle/>
-          <a:p>
-            <a:pPr algn="l"/>
-            <a:r>
-              <a:rPr sz="2000" b="1">
+              <a:t>• </a:t>
+            </a:r>
+            <a:r>
+              <a:rPr sz="2000" b="0">
                 <a:solidFill>
                   <a:srgbClr val="1F2D3A"/>
                 </a:solidFill>
               </a:rPr>
-              <a:t>What does a canary stop, and what does it not stop?</a:t>
-            </a:r>
-          </a:p>
-        </p:txBody>
-      </p:sp>
-      <p:sp>
-        <p:nvSpPr>
-          <p:cNvPr id="8" name="TextBox 7"/>
-          <p:cNvSpPr txBox="1"/>
-          <p:nvPr/>
-        </p:nvSpPr>
-        <p:spPr>
-          <a:xfrm>
-            <a:off x="640080" y="1875536"/>
-            <a:ext cx="10911535" cy="770128"/>
-          </a:xfrm>
-          <a:prstGeom prst="rect">
-            <a:avLst/>
-          </a:prstGeom>
-          <a:noFill/>
-        </p:spPr>
-        <p:txBody>
-          <a:bodyPr wrap="square" lIns="45720" rIns="45720">
-            <a:spAutoFit/>
-          </a:bodyPr>
-          <a:lstStyle/>
-          <a:p>
-            <a:pPr algn="l"/>
-            <a:r>
-              <a:rPr sz="2000" b="1">
-                <a:solidFill>
-                  <a:srgbClr val="1F2D3A"/>
-                </a:solidFill>
-              </a:rPr>
-              <a:t>Answer:</a:t>
-            </a:r>
-            <a:r>
-              <a:rPr sz="2000" b="0">
-                <a:solidFill>
-                  <a:srgbClr val="1F2D3A"/>
-                </a:solidFill>
-              </a:rPr>
-              <a:t> Stops: a stack overflow that reaches the return address. Does not stop: heap overflow, variables before the canary, a leaked canary.</a:t>
+              <a:t>Measuring obfuscation: potency, resilience, cost</a:t>
             </a:r>
           </a:p>
         </p:txBody>
@@ -10497,2605 +9938,6 @@
                 </a:solidFill>
               </a:rPr>
               <a:t>3</a:t>
-            </a:r>
-          </a:p>
-        </p:txBody>
-      </p:sp>
-      <p:sp>
-        <p:nvSpPr>
-          <p:cNvPr id="6" name="TextBox 5"/>
-          <p:cNvSpPr txBox="1"/>
-          <p:nvPr/>
-        </p:nvSpPr>
-        <p:spPr>
-          <a:xfrm>
-            <a:off x="640080" y="548640"/>
-            <a:ext cx="10911535" cy="731520"/>
-          </a:xfrm>
-          <a:prstGeom prst="rect">
-            <a:avLst/>
-          </a:prstGeom>
-          <a:noFill/>
-        </p:spPr>
-        <p:txBody>
-          <a:bodyPr wrap="square" lIns="45720" rIns="45720" anchor="ctr">
-            <a:spAutoFit/>
-          </a:bodyPr>
-          <a:lstStyle/>
-          <a:p>
-            <a:r>
-              <a:rPr sz="3000" b="1">
-                <a:solidFill>
-                  <a:srgbClr val="006D77"/>
-                </a:solidFill>
-              </a:rPr>
-              <a:t>Midterm Grade Calculation — Diagram</a:t>
-            </a:r>
-          </a:p>
-        </p:txBody>
-      </p:sp>
-      <p:pic>
-        <p:nvPicPr>
-          <p:cNvPr id="7" name="Picture 6" descr="h08-03-vize-hesabi.png"/>
-          <p:cNvPicPr>
-            <a:picLocks noChangeAspect="1"/>
-          </p:cNvPicPr>
-          <p:nvPr/>
-        </p:nvPicPr>
-        <p:blipFill>
-          <a:blip r:embed="rId3"/>
-          <a:stretch>
-            <a:fillRect/>
-          </a:stretch>
-        </p:blipFill>
-        <p:spPr>
-          <a:xfrm>
-            <a:off x="2046645" y="1325880"/>
-            <a:ext cx="8098404" cy="3206099"/>
-          </a:xfrm>
-          <a:prstGeom prst="rect">
-            <a:avLst/>
-          </a:prstGeom>
-        </p:spPr>
-      </p:pic>
-    </p:spTree>
-  </p:cSld>
-  <p:clrMapOvr>
-    <a:masterClrMapping/>
-  </p:clrMapOvr>
-</p:sld>
-</file>
-
-<file path=ppt/slides/slide30.xml><?xml version="1.0" encoding="utf-8"?>
-<p:sld xmlns:a="http://schemas.openxmlformats.org/drawingml/2006/main" xmlns:p="http://schemas.openxmlformats.org/presentationml/2006/main" xmlns:r="http://schemas.openxmlformats.org/officeDocument/2006/relationships">
-  <p:cSld>
-    <p:spTree>
-      <p:nvGrpSpPr>
-        <p:cNvPr id="1" name=""/>
-        <p:cNvGrpSpPr/>
-        <p:nvPr/>
-      </p:nvGrpSpPr>
-      <p:grpSpPr/>
-      <p:pic>
-        <p:nvPicPr>
-          <p:cNvPr id="2" name="Picture 1" descr="rteu_logo_kucuk.jpg"/>
-          <p:cNvPicPr>
-            <a:picLocks noChangeAspect="1"/>
-          </p:cNvPicPr>
-          <p:nvPr/>
-        </p:nvPicPr>
-        <p:blipFill>
-          <a:blip r:embed="rId2"/>
-          <a:stretch>
-            <a:fillRect/>
-          </a:stretch>
-        </p:blipFill>
-        <p:spPr>
-          <a:xfrm>
-            <a:off x="640080" y="164592"/>
-            <a:ext cx="242773" cy="329184"/>
-          </a:xfrm>
-          <a:prstGeom prst="rect">
-            <a:avLst/>
-          </a:prstGeom>
-        </p:spPr>
-      </p:pic>
-      <p:sp>
-        <p:nvSpPr>
-          <p:cNvPr id="3" name="TextBox 2"/>
-          <p:cNvSpPr txBox="1"/>
-          <p:nvPr/>
-        </p:nvSpPr>
-        <p:spPr>
-          <a:xfrm>
-            <a:off x="1051560" y="182880"/>
-            <a:ext cx="7315200" cy="320040"/>
-          </a:xfrm>
-          <a:prstGeom prst="rect">
-            <a:avLst/>
-          </a:prstGeom>
-          <a:noFill/>
-        </p:spPr>
-        <p:txBody>
-          <a:bodyPr wrap="square" lIns="45720" rIns="45720">
-            <a:spAutoFit/>
-          </a:bodyPr>
-          <a:lstStyle/>
-          <a:p>
-            <a:r>
-              <a:rPr sz="1100" b="0">
-                <a:solidFill>
-                  <a:srgbClr val="5B6770"/>
-                </a:solidFill>
-              </a:rPr>
-              <a:t>CEN429 Secure Programming · Week 8</a:t>
-            </a:r>
-          </a:p>
-        </p:txBody>
-      </p:sp>
-      <p:sp>
-        <p:nvSpPr>
-          <p:cNvPr id="4" name="TextBox 3"/>
-          <p:cNvSpPr txBox="1"/>
-          <p:nvPr/>
-        </p:nvSpPr>
-        <p:spPr>
-          <a:xfrm>
-            <a:off x="640080" y="6446520"/>
-            <a:ext cx="7315200" cy="274320"/>
-          </a:xfrm>
-          <a:prstGeom prst="rect">
-            <a:avLst/>
-          </a:prstGeom>
-          <a:noFill/>
-        </p:spPr>
-        <p:txBody>
-          <a:bodyPr wrap="square" lIns="45720" rIns="45720">
-            <a:spAutoFit/>
-          </a:bodyPr>
-          <a:lstStyle/>
-          <a:p>
-            <a:r>
-              <a:rPr sz="1000" b="0">
-                <a:solidFill>
-                  <a:srgbClr val="5B6770"/>
-                </a:solidFill>
-              </a:rPr>
-              <a:t>RTEU Computer Engineering · 2026-2027 Fall</a:t>
-            </a:r>
-          </a:p>
-        </p:txBody>
-      </p:sp>
-      <p:sp>
-        <p:nvSpPr>
-          <p:cNvPr id="5" name="TextBox 4"/>
-          <p:cNvSpPr txBox="1"/>
-          <p:nvPr/>
-        </p:nvSpPr>
-        <p:spPr>
-          <a:xfrm>
-            <a:off x="10637215" y="6446520"/>
-            <a:ext cx="914400" cy="274320"/>
-          </a:xfrm>
-          <a:prstGeom prst="rect">
-            <a:avLst/>
-          </a:prstGeom>
-          <a:noFill/>
-        </p:spPr>
-        <p:txBody>
-          <a:bodyPr wrap="square" lIns="45720" rIns="45720">
-            <a:spAutoFit/>
-          </a:bodyPr>
-          <a:lstStyle/>
-          <a:p>
-            <a:pPr algn="r"/>
-            <a:r>
-              <a:rPr sz="1000" b="0">
-                <a:solidFill>
-                  <a:srgbClr val="5B6770"/>
-                </a:solidFill>
-              </a:rPr>
-              <a:t>30</a:t>
-            </a:r>
-          </a:p>
-        </p:txBody>
-      </p:sp>
-      <p:sp>
-        <p:nvSpPr>
-          <p:cNvPr id="6" name="TextBox 5"/>
-          <p:cNvSpPr txBox="1"/>
-          <p:nvPr/>
-        </p:nvSpPr>
-        <p:spPr>
-          <a:xfrm>
-            <a:off x="640080" y="548640"/>
-            <a:ext cx="10911535" cy="731520"/>
-          </a:xfrm>
-          <a:prstGeom prst="rect">
-            <a:avLst/>
-          </a:prstGeom>
-          <a:noFill/>
-        </p:spPr>
-        <p:txBody>
-          <a:bodyPr wrap="square" lIns="45720" rIns="45720" anchor="ctr">
-            <a:spAutoFit/>
-          </a:bodyPr>
-          <a:lstStyle/>
-          <a:p>
-            <a:r>
-              <a:rPr sz="3000" b="1">
-                <a:solidFill>
-                  <a:srgbClr val="006D77"/>
-                </a:solidFill>
-              </a:rPr>
-              <a:t>Question 6</a:t>
-            </a:r>
-          </a:p>
-        </p:txBody>
-      </p:sp>
-      <p:sp>
-        <p:nvSpPr>
-          <p:cNvPr id="7" name="TextBox 6"/>
-          <p:cNvSpPr txBox="1"/>
-          <p:nvPr/>
-        </p:nvSpPr>
-        <p:spPr>
-          <a:xfrm>
-            <a:off x="640080" y="1325880"/>
-            <a:ext cx="10911535" cy="439928"/>
-          </a:xfrm>
-          <a:prstGeom prst="rect">
-            <a:avLst/>
-          </a:prstGeom>
-          <a:noFill/>
-        </p:spPr>
-        <p:txBody>
-          <a:bodyPr wrap="square" lIns="45720" rIns="45720">
-            <a:spAutoFit/>
-          </a:bodyPr>
-          <a:lstStyle/>
-          <a:p>
-            <a:pPr algn="l"/>
-            <a:r>
-              <a:rPr sz="2000" b="1">
-                <a:solidFill>
-                  <a:srgbClr val="1F2D3A"/>
-                </a:solidFill>
-              </a:rPr>
-              <a:t>Why is RASP self-hashing not enough on its own?</a:t>
-            </a:r>
-          </a:p>
-        </p:txBody>
-      </p:sp>
-      <p:sp>
-        <p:nvSpPr>
-          <p:cNvPr id="8" name="TextBox 7"/>
-          <p:cNvSpPr txBox="1"/>
-          <p:nvPr/>
-        </p:nvSpPr>
-        <p:spPr>
-          <a:xfrm>
-            <a:off x="640080" y="1875536"/>
-            <a:ext cx="10911535" cy="770128"/>
-          </a:xfrm>
-          <a:prstGeom prst="rect">
-            <a:avLst/>
-          </a:prstGeom>
-          <a:noFill/>
-        </p:spPr>
-        <p:txBody>
-          <a:bodyPr wrap="square" lIns="45720" rIns="45720">
-            <a:spAutoFit/>
-          </a:bodyPr>
-          <a:lstStyle/>
-          <a:p>
-            <a:pPr algn="l"/>
-            <a:r>
-              <a:rPr sz="2000" b="1">
-                <a:solidFill>
-                  <a:srgbClr val="1F2D3A"/>
-                </a:solidFill>
-              </a:rPr>
-              <a:t>Answer:</a:t>
-            </a:r>
-            <a:r>
-              <a:rPr sz="2000" b="0">
-                <a:solidFill>
-                  <a:srgbClr val="1F2D3A"/>
-                </a:solidFill>
-              </a:rPr>
-              <a:t> The attacker can find the digest function and bypass it. Obfuscation + cross-checking + overlapping checks are needed.</a:t>
-            </a:r>
-          </a:p>
-        </p:txBody>
-      </p:sp>
-    </p:spTree>
-  </p:cSld>
-  <p:clrMapOvr>
-    <a:masterClrMapping/>
-  </p:clrMapOvr>
-</p:sld>
-</file>
-
-<file path=ppt/slides/slide31.xml><?xml version="1.0" encoding="utf-8"?>
-<p:sld xmlns:a="http://schemas.openxmlformats.org/drawingml/2006/main" xmlns:p="http://schemas.openxmlformats.org/presentationml/2006/main" xmlns:r="http://schemas.openxmlformats.org/officeDocument/2006/relationships">
-  <p:cSld>
-    <p:spTree>
-      <p:nvGrpSpPr>
-        <p:cNvPr id="1" name=""/>
-        <p:cNvGrpSpPr/>
-        <p:nvPr/>
-      </p:nvGrpSpPr>
-      <p:grpSpPr/>
-      <p:pic>
-        <p:nvPicPr>
-          <p:cNvPr id="2" name="Picture 1" descr="rteu_logo_kucuk.jpg"/>
-          <p:cNvPicPr>
-            <a:picLocks noChangeAspect="1"/>
-          </p:cNvPicPr>
-          <p:nvPr/>
-        </p:nvPicPr>
-        <p:blipFill>
-          <a:blip r:embed="rId2"/>
-          <a:stretch>
-            <a:fillRect/>
-          </a:stretch>
-        </p:blipFill>
-        <p:spPr>
-          <a:xfrm>
-            <a:off x="640080" y="164592"/>
-            <a:ext cx="242773" cy="329184"/>
-          </a:xfrm>
-          <a:prstGeom prst="rect">
-            <a:avLst/>
-          </a:prstGeom>
-        </p:spPr>
-      </p:pic>
-      <p:sp>
-        <p:nvSpPr>
-          <p:cNvPr id="3" name="TextBox 2"/>
-          <p:cNvSpPr txBox="1"/>
-          <p:nvPr/>
-        </p:nvSpPr>
-        <p:spPr>
-          <a:xfrm>
-            <a:off x="1051560" y="182880"/>
-            <a:ext cx="7315200" cy="320040"/>
-          </a:xfrm>
-          <a:prstGeom prst="rect">
-            <a:avLst/>
-          </a:prstGeom>
-          <a:noFill/>
-        </p:spPr>
-        <p:txBody>
-          <a:bodyPr wrap="square" lIns="45720" rIns="45720">
-            <a:spAutoFit/>
-          </a:bodyPr>
-          <a:lstStyle/>
-          <a:p>
-            <a:r>
-              <a:rPr sz="1100" b="0">
-                <a:solidFill>
-                  <a:srgbClr val="5B6770"/>
-                </a:solidFill>
-              </a:rPr>
-              <a:t>CEN429 Secure Programming · Week 8</a:t>
-            </a:r>
-          </a:p>
-        </p:txBody>
-      </p:sp>
-      <p:sp>
-        <p:nvSpPr>
-          <p:cNvPr id="4" name="TextBox 3"/>
-          <p:cNvSpPr txBox="1"/>
-          <p:nvPr/>
-        </p:nvSpPr>
-        <p:spPr>
-          <a:xfrm>
-            <a:off x="640080" y="6446520"/>
-            <a:ext cx="7315200" cy="274320"/>
-          </a:xfrm>
-          <a:prstGeom prst="rect">
-            <a:avLst/>
-          </a:prstGeom>
-          <a:noFill/>
-        </p:spPr>
-        <p:txBody>
-          <a:bodyPr wrap="square" lIns="45720" rIns="45720">
-            <a:spAutoFit/>
-          </a:bodyPr>
-          <a:lstStyle/>
-          <a:p>
-            <a:r>
-              <a:rPr sz="1000" b="0">
-                <a:solidFill>
-                  <a:srgbClr val="5B6770"/>
-                </a:solidFill>
-              </a:rPr>
-              <a:t>RTEU Computer Engineering · 2026-2027 Fall</a:t>
-            </a:r>
-          </a:p>
-        </p:txBody>
-      </p:sp>
-      <p:sp>
-        <p:nvSpPr>
-          <p:cNvPr id="5" name="TextBox 4"/>
-          <p:cNvSpPr txBox="1"/>
-          <p:nvPr/>
-        </p:nvSpPr>
-        <p:spPr>
-          <a:xfrm>
-            <a:off x="10637215" y="6446520"/>
-            <a:ext cx="914400" cy="274320"/>
-          </a:xfrm>
-          <a:prstGeom prst="rect">
-            <a:avLst/>
-          </a:prstGeom>
-          <a:noFill/>
-        </p:spPr>
-        <p:txBody>
-          <a:bodyPr wrap="square" lIns="45720" rIns="45720">
-            <a:spAutoFit/>
-          </a:bodyPr>
-          <a:lstStyle/>
-          <a:p>
-            <a:pPr algn="r"/>
-            <a:r>
-              <a:rPr sz="1000" b="0">
-                <a:solidFill>
-                  <a:srgbClr val="5B6770"/>
-                </a:solidFill>
-              </a:rPr>
-              <a:t>31</a:t>
-            </a:r>
-          </a:p>
-        </p:txBody>
-      </p:sp>
-      <p:sp>
-        <p:nvSpPr>
-          <p:cNvPr id="6" name="TextBox 5"/>
-          <p:cNvSpPr txBox="1"/>
-          <p:nvPr/>
-        </p:nvSpPr>
-        <p:spPr>
-          <a:xfrm>
-            <a:off x="640080" y="548640"/>
-            <a:ext cx="10911535" cy="731520"/>
-          </a:xfrm>
-          <a:prstGeom prst="rect">
-            <a:avLst/>
-          </a:prstGeom>
-          <a:noFill/>
-        </p:spPr>
-        <p:txBody>
-          <a:bodyPr wrap="square" lIns="45720" rIns="45720" anchor="ctr">
-            <a:spAutoFit/>
-          </a:bodyPr>
-          <a:lstStyle/>
-          <a:p>
-            <a:r>
-              <a:rPr sz="3000" b="1">
-                <a:solidFill>
-                  <a:srgbClr val="006D77"/>
-                </a:solidFill>
-              </a:rPr>
-              <a:t>Question 7</a:t>
-            </a:r>
-          </a:p>
-        </p:txBody>
-      </p:sp>
-      <p:sp>
-        <p:nvSpPr>
-          <p:cNvPr id="7" name="TextBox 6"/>
-          <p:cNvSpPr txBox="1"/>
-          <p:nvPr/>
-        </p:nvSpPr>
-        <p:spPr>
-          <a:xfrm>
-            <a:off x="640080" y="1325880"/>
-            <a:ext cx="10911535" cy="439928"/>
-          </a:xfrm>
-          <a:prstGeom prst="rect">
-            <a:avLst/>
-          </a:prstGeom>
-          <a:noFill/>
-        </p:spPr>
-        <p:txBody>
-          <a:bodyPr wrap="square" lIns="45720" rIns="45720">
-            <a:spAutoFit/>
-          </a:bodyPr>
-          <a:lstStyle/>
-          <a:p>
-            <a:pPr algn="l"/>
-            <a:r>
-              <a:rPr sz="2000" b="1">
-                <a:solidFill>
-                  <a:srgbClr val="1F2D3A"/>
-                </a:solidFill>
-              </a:rPr>
-              <a:t>Why a KDF and a salt when deriving a key from a password?</a:t>
-            </a:r>
-          </a:p>
-        </p:txBody>
-      </p:sp>
-      <p:sp>
-        <p:nvSpPr>
-          <p:cNvPr id="8" name="TextBox 7"/>
-          <p:cNvSpPr txBox="1"/>
-          <p:nvPr/>
-        </p:nvSpPr>
-        <p:spPr>
-          <a:xfrm>
-            <a:off x="640080" y="1875536"/>
-            <a:ext cx="10911535" cy="770128"/>
-          </a:xfrm>
-          <a:prstGeom prst="rect">
-            <a:avLst/>
-          </a:prstGeom>
-          <a:noFill/>
-        </p:spPr>
-        <p:txBody>
-          <a:bodyPr wrap="square" lIns="45720" rIns="45720">
-            <a:spAutoFit/>
-          </a:bodyPr>
-          <a:lstStyle/>
-          <a:p>
-            <a:pPr algn="l"/>
-            <a:r>
-              <a:rPr sz="2000" b="1">
-                <a:solidFill>
-                  <a:srgbClr val="1F2D3A"/>
-                </a:solidFill>
-              </a:rPr>
-              <a:t>Answer:</a:t>
-            </a:r>
-            <a:r>
-              <a:rPr sz="2000" b="0">
-                <a:solidFill>
-                  <a:srgbClr val="1F2D3A"/>
-                </a:solidFill>
-              </a:rPr>
-              <a:t> A password has low entropy; the KDF slows down guessing, and the salt stops identical passwords from producing the same key (rainbow table).</a:t>
-            </a:r>
-          </a:p>
-        </p:txBody>
-      </p:sp>
-    </p:spTree>
-  </p:cSld>
-  <p:clrMapOvr>
-    <a:masterClrMapping/>
-  </p:clrMapOvr>
-</p:sld>
-</file>
-
-<file path=ppt/slides/slide32.xml><?xml version="1.0" encoding="utf-8"?>
-<p:sld xmlns:a="http://schemas.openxmlformats.org/drawingml/2006/main" xmlns:p="http://schemas.openxmlformats.org/presentationml/2006/main" xmlns:r="http://schemas.openxmlformats.org/officeDocument/2006/relationships">
-  <p:cSld>
-    <p:spTree>
-      <p:nvGrpSpPr>
-        <p:cNvPr id="1" name=""/>
-        <p:cNvGrpSpPr/>
-        <p:nvPr/>
-      </p:nvGrpSpPr>
-      <p:grpSpPr/>
-      <p:pic>
-        <p:nvPicPr>
-          <p:cNvPr id="2" name="Picture 1" descr="rteu_logo_kucuk.jpg"/>
-          <p:cNvPicPr>
-            <a:picLocks noChangeAspect="1"/>
-          </p:cNvPicPr>
-          <p:nvPr/>
-        </p:nvPicPr>
-        <p:blipFill>
-          <a:blip r:embed="rId2"/>
-          <a:stretch>
-            <a:fillRect/>
-          </a:stretch>
-        </p:blipFill>
-        <p:spPr>
-          <a:xfrm>
-            <a:off x="640080" y="164592"/>
-            <a:ext cx="242773" cy="329184"/>
-          </a:xfrm>
-          <a:prstGeom prst="rect">
-            <a:avLst/>
-          </a:prstGeom>
-        </p:spPr>
-      </p:pic>
-      <p:sp>
-        <p:nvSpPr>
-          <p:cNvPr id="3" name="TextBox 2"/>
-          <p:cNvSpPr txBox="1"/>
-          <p:nvPr/>
-        </p:nvSpPr>
-        <p:spPr>
-          <a:xfrm>
-            <a:off x="1051560" y="182880"/>
-            <a:ext cx="7315200" cy="320040"/>
-          </a:xfrm>
-          <a:prstGeom prst="rect">
-            <a:avLst/>
-          </a:prstGeom>
-          <a:noFill/>
-        </p:spPr>
-        <p:txBody>
-          <a:bodyPr wrap="square" lIns="45720" rIns="45720">
-            <a:spAutoFit/>
-          </a:bodyPr>
-          <a:lstStyle/>
-          <a:p>
-            <a:r>
-              <a:rPr sz="1100" b="0">
-                <a:solidFill>
-                  <a:srgbClr val="5B6770"/>
-                </a:solidFill>
-              </a:rPr>
-              <a:t>CEN429 Secure Programming · Week 8</a:t>
-            </a:r>
-          </a:p>
-        </p:txBody>
-      </p:sp>
-      <p:sp>
-        <p:nvSpPr>
-          <p:cNvPr id="4" name="TextBox 3"/>
-          <p:cNvSpPr txBox="1"/>
-          <p:nvPr/>
-        </p:nvSpPr>
-        <p:spPr>
-          <a:xfrm>
-            <a:off x="640080" y="6446520"/>
-            <a:ext cx="7315200" cy="274320"/>
-          </a:xfrm>
-          <a:prstGeom prst="rect">
-            <a:avLst/>
-          </a:prstGeom>
-          <a:noFill/>
-        </p:spPr>
-        <p:txBody>
-          <a:bodyPr wrap="square" lIns="45720" rIns="45720">
-            <a:spAutoFit/>
-          </a:bodyPr>
-          <a:lstStyle/>
-          <a:p>
-            <a:r>
-              <a:rPr sz="1000" b="0">
-                <a:solidFill>
-                  <a:srgbClr val="5B6770"/>
-                </a:solidFill>
-              </a:rPr>
-              <a:t>RTEU Computer Engineering · 2026-2027 Fall</a:t>
-            </a:r>
-          </a:p>
-        </p:txBody>
-      </p:sp>
-      <p:sp>
-        <p:nvSpPr>
-          <p:cNvPr id="5" name="TextBox 4"/>
-          <p:cNvSpPr txBox="1"/>
-          <p:nvPr/>
-        </p:nvSpPr>
-        <p:spPr>
-          <a:xfrm>
-            <a:off x="10637215" y="6446520"/>
-            <a:ext cx="914400" cy="274320"/>
-          </a:xfrm>
-          <a:prstGeom prst="rect">
-            <a:avLst/>
-          </a:prstGeom>
-          <a:noFill/>
-        </p:spPr>
-        <p:txBody>
-          <a:bodyPr wrap="square" lIns="45720" rIns="45720">
-            <a:spAutoFit/>
-          </a:bodyPr>
-          <a:lstStyle/>
-          <a:p>
-            <a:pPr algn="r"/>
-            <a:r>
-              <a:rPr sz="1000" b="0">
-                <a:solidFill>
-                  <a:srgbClr val="5B6770"/>
-                </a:solidFill>
-              </a:rPr>
-              <a:t>32</a:t>
-            </a:r>
-          </a:p>
-        </p:txBody>
-      </p:sp>
-      <p:sp>
-        <p:nvSpPr>
-          <p:cNvPr id="6" name="TextBox 5"/>
-          <p:cNvSpPr txBox="1"/>
-          <p:nvPr/>
-        </p:nvSpPr>
-        <p:spPr>
-          <a:xfrm>
-            <a:off x="640080" y="548640"/>
-            <a:ext cx="10911535" cy="731520"/>
-          </a:xfrm>
-          <a:prstGeom prst="rect">
-            <a:avLst/>
-          </a:prstGeom>
-          <a:noFill/>
-        </p:spPr>
-        <p:txBody>
-          <a:bodyPr wrap="square" lIns="45720" rIns="45720" anchor="ctr">
-            <a:spAutoFit/>
-          </a:bodyPr>
-          <a:lstStyle/>
-          <a:p>
-            <a:r>
-              <a:rPr sz="3000" b="1">
-                <a:solidFill>
-                  <a:srgbClr val="006D77"/>
-                </a:solidFill>
-              </a:rPr>
-              <a:t>Question 8</a:t>
-            </a:r>
-          </a:p>
-        </p:txBody>
-      </p:sp>
-      <p:sp>
-        <p:nvSpPr>
-          <p:cNvPr id="7" name="TextBox 6"/>
-          <p:cNvSpPr txBox="1"/>
-          <p:nvPr/>
-        </p:nvSpPr>
-        <p:spPr>
-          <a:xfrm>
-            <a:off x="640080" y="1325880"/>
-            <a:ext cx="10911535" cy="439928"/>
-          </a:xfrm>
-          <a:prstGeom prst="rect">
-            <a:avLst/>
-          </a:prstGeom>
-          <a:noFill/>
-        </p:spPr>
-        <p:txBody>
-          <a:bodyPr wrap="square" lIns="45720" rIns="45720">
-            <a:spAutoFit/>
-          </a:bodyPr>
-          <a:lstStyle/>
-          <a:p>
-            <a:pPr algn="l"/>
-            <a:r>
-              <a:rPr sz="2000" b="1">
-                <a:solidFill>
-                  <a:srgbClr val="1F2D3A"/>
-                </a:solidFill>
-              </a:rPr>
-              <a:t>An example of the least-privilege principle?</a:t>
-            </a:r>
-          </a:p>
-        </p:txBody>
-      </p:sp>
-      <p:sp>
-        <p:nvSpPr>
-          <p:cNvPr id="8" name="TextBox 7"/>
-          <p:cNvSpPr txBox="1"/>
-          <p:nvPr/>
-        </p:nvSpPr>
-        <p:spPr>
-          <a:xfrm>
-            <a:off x="640080" y="1875536"/>
-            <a:ext cx="10911535" cy="770128"/>
-          </a:xfrm>
-          <a:prstGeom prst="rect">
-            <a:avLst/>
-          </a:prstGeom>
-          <a:noFill/>
-        </p:spPr>
-        <p:txBody>
-          <a:bodyPr wrap="square" lIns="45720" rIns="45720">
-            <a:spAutoFit/>
-          </a:bodyPr>
-          <a:lstStyle/>
-          <a:p>
-            <a:pPr algn="l"/>
-            <a:r>
-              <a:rPr sz="2000" b="1">
-                <a:solidFill>
-                  <a:srgbClr val="1F2D3A"/>
-                </a:solidFill>
-              </a:rPr>
-              <a:t>Answer:</a:t>
-            </a:r>
-            <a:r>
-              <a:rPr sz="2000" b="0">
-                <a:solidFill>
-                  <a:srgbClr val="1F2D3A"/>
-                </a:solidFill>
-              </a:rPr>
-              <a:t> The application's DB user should only be able to </a:t>
-            </a:r>
-            <a:r>
-              <a:rPr sz="2000" b="0">
-                <a:solidFill>
-                  <a:srgbClr val="A1123F"/>
-                </a:solidFill>
-                <a:latin typeface="Consolas"/>
-              </a:rPr>
-              <a:t>SELECT</a:t>
-            </a:r>
-            <a:r>
-              <a:rPr sz="2000" b="0">
-                <a:solidFill>
-                  <a:srgbClr val="1F2D3A"/>
-                </a:solidFill>
-              </a:rPr>
-              <a:t>; it should not have </a:t>
-            </a:r>
-            <a:r>
-              <a:rPr sz="2000" b="0">
-                <a:solidFill>
-                  <a:srgbClr val="A1123F"/>
-                </a:solidFill>
-                <a:latin typeface="Consolas"/>
-              </a:rPr>
-              <a:t>DROP</a:t>
-            </a:r>
-            <a:r>
-              <a:rPr sz="2000" b="0">
-                <a:solidFill>
-                  <a:srgbClr val="1F2D3A"/>
-                </a:solidFill>
-              </a:rPr>
-              <a:t> privilege. Excess privilege = greater damage.</a:t>
-            </a:r>
-          </a:p>
-        </p:txBody>
-      </p:sp>
-    </p:spTree>
-  </p:cSld>
-  <p:clrMapOvr>
-    <a:masterClrMapping/>
-  </p:clrMapOvr>
-</p:sld>
-</file>
-
-<file path=ppt/slides/slide33.xml><?xml version="1.0" encoding="utf-8"?>
-<p:sld xmlns:a="http://schemas.openxmlformats.org/drawingml/2006/main" xmlns:p="http://schemas.openxmlformats.org/presentationml/2006/main" xmlns:r="http://schemas.openxmlformats.org/officeDocument/2006/relationships">
-  <p:cSld>
-    <p:spTree>
-      <p:nvGrpSpPr>
-        <p:cNvPr id="1" name=""/>
-        <p:cNvGrpSpPr/>
-        <p:nvPr/>
-      </p:nvGrpSpPr>
-      <p:grpSpPr/>
-      <p:pic>
-        <p:nvPicPr>
-          <p:cNvPr id="2" name="Picture 1" descr="rteu_logo_kucuk.jpg"/>
-          <p:cNvPicPr>
-            <a:picLocks noChangeAspect="1"/>
-          </p:cNvPicPr>
-          <p:nvPr/>
-        </p:nvPicPr>
-        <p:blipFill>
-          <a:blip r:embed="rId2"/>
-          <a:stretch>
-            <a:fillRect/>
-          </a:stretch>
-        </p:blipFill>
-        <p:spPr>
-          <a:xfrm>
-            <a:off x="640080" y="164592"/>
-            <a:ext cx="242773" cy="329184"/>
-          </a:xfrm>
-          <a:prstGeom prst="rect">
-            <a:avLst/>
-          </a:prstGeom>
-        </p:spPr>
-      </p:pic>
-      <p:sp>
-        <p:nvSpPr>
-          <p:cNvPr id="3" name="TextBox 2"/>
-          <p:cNvSpPr txBox="1"/>
-          <p:nvPr/>
-        </p:nvSpPr>
-        <p:spPr>
-          <a:xfrm>
-            <a:off x="1051560" y="182880"/>
-            <a:ext cx="7315200" cy="320040"/>
-          </a:xfrm>
-          <a:prstGeom prst="rect">
-            <a:avLst/>
-          </a:prstGeom>
-          <a:noFill/>
-        </p:spPr>
-        <p:txBody>
-          <a:bodyPr wrap="square" lIns="45720" rIns="45720">
-            <a:spAutoFit/>
-          </a:bodyPr>
-          <a:lstStyle/>
-          <a:p>
-            <a:r>
-              <a:rPr sz="1100" b="0">
-                <a:solidFill>
-                  <a:srgbClr val="5B6770"/>
-                </a:solidFill>
-              </a:rPr>
-              <a:t>CEN429 Secure Programming · Week 8</a:t>
-            </a:r>
-          </a:p>
-        </p:txBody>
-      </p:sp>
-      <p:sp>
-        <p:nvSpPr>
-          <p:cNvPr id="4" name="TextBox 3"/>
-          <p:cNvSpPr txBox="1"/>
-          <p:nvPr/>
-        </p:nvSpPr>
-        <p:spPr>
-          <a:xfrm>
-            <a:off x="640080" y="6446520"/>
-            <a:ext cx="7315200" cy="274320"/>
-          </a:xfrm>
-          <a:prstGeom prst="rect">
-            <a:avLst/>
-          </a:prstGeom>
-          <a:noFill/>
-        </p:spPr>
-        <p:txBody>
-          <a:bodyPr wrap="square" lIns="45720" rIns="45720">
-            <a:spAutoFit/>
-          </a:bodyPr>
-          <a:lstStyle/>
-          <a:p>
-            <a:r>
-              <a:rPr sz="1000" b="0">
-                <a:solidFill>
-                  <a:srgbClr val="5B6770"/>
-                </a:solidFill>
-              </a:rPr>
-              <a:t>RTEU Computer Engineering · 2026-2027 Fall</a:t>
-            </a:r>
-          </a:p>
-        </p:txBody>
-      </p:sp>
-      <p:sp>
-        <p:nvSpPr>
-          <p:cNvPr id="5" name="TextBox 4"/>
-          <p:cNvSpPr txBox="1"/>
-          <p:nvPr/>
-        </p:nvSpPr>
-        <p:spPr>
-          <a:xfrm>
-            <a:off x="10637215" y="6446520"/>
-            <a:ext cx="914400" cy="274320"/>
-          </a:xfrm>
-          <a:prstGeom prst="rect">
-            <a:avLst/>
-          </a:prstGeom>
-          <a:noFill/>
-        </p:spPr>
-        <p:txBody>
-          <a:bodyPr wrap="square" lIns="45720" rIns="45720">
-            <a:spAutoFit/>
-          </a:bodyPr>
-          <a:lstStyle/>
-          <a:p>
-            <a:pPr algn="r"/>
-            <a:r>
-              <a:rPr sz="1000" b="0">
-                <a:solidFill>
-                  <a:srgbClr val="5B6770"/>
-                </a:solidFill>
-              </a:rPr>
-              <a:t>33</a:t>
-            </a:r>
-          </a:p>
-        </p:txBody>
-      </p:sp>
-      <p:sp>
-        <p:nvSpPr>
-          <p:cNvPr id="6" name="TextBox 5"/>
-          <p:cNvSpPr txBox="1"/>
-          <p:nvPr/>
-        </p:nvSpPr>
-        <p:spPr>
-          <a:xfrm>
-            <a:off x="640080" y="548640"/>
-            <a:ext cx="10911535" cy="731520"/>
-          </a:xfrm>
-          <a:prstGeom prst="rect">
-            <a:avLst/>
-          </a:prstGeom>
-          <a:noFill/>
-        </p:spPr>
-        <p:txBody>
-          <a:bodyPr wrap="square" lIns="45720" rIns="45720" anchor="ctr">
-            <a:spAutoFit/>
-          </a:bodyPr>
-          <a:lstStyle/>
-          <a:p>
-            <a:r>
-              <a:rPr sz="3000" b="1">
-                <a:solidFill>
-                  <a:srgbClr val="006D77"/>
-                </a:solidFill>
-              </a:rPr>
-              <a:t>Question 9</a:t>
-            </a:r>
-          </a:p>
-        </p:txBody>
-      </p:sp>
-      <p:sp>
-        <p:nvSpPr>
-          <p:cNvPr id="7" name="TextBox 6"/>
-          <p:cNvSpPr txBox="1"/>
-          <p:nvPr/>
-        </p:nvSpPr>
-        <p:spPr>
-          <a:xfrm>
-            <a:off x="640080" y="1325880"/>
-            <a:ext cx="10911535" cy="439928"/>
-          </a:xfrm>
-          <a:prstGeom prst="rect">
-            <a:avLst/>
-          </a:prstGeom>
-          <a:noFill/>
-        </p:spPr>
-        <p:txBody>
-          <a:bodyPr wrap="square" lIns="45720" rIns="45720">
-            <a:spAutoFit/>
-          </a:bodyPr>
-          <a:lstStyle/>
-          <a:p>
-            <a:pPr algn="l"/>
-            <a:r>
-              <a:rPr sz="2000" b="1">
-                <a:solidFill>
-                  <a:srgbClr val="1F2D3A"/>
-                </a:solidFill>
-              </a:rPr>
-              <a:t>What is the "E" in STRIDE, and one control for it?</a:t>
-            </a:r>
-          </a:p>
-        </p:txBody>
-      </p:sp>
-      <p:sp>
-        <p:nvSpPr>
-          <p:cNvPr id="8" name="TextBox 7"/>
-          <p:cNvSpPr txBox="1"/>
-          <p:nvPr/>
-        </p:nvSpPr>
-        <p:spPr>
-          <a:xfrm>
-            <a:off x="640080" y="1875536"/>
-            <a:ext cx="10911535" cy="770128"/>
-          </a:xfrm>
-          <a:prstGeom prst="rect">
-            <a:avLst/>
-          </a:prstGeom>
-          <a:noFill/>
-        </p:spPr>
-        <p:txBody>
-          <a:bodyPr wrap="square" lIns="45720" rIns="45720">
-            <a:spAutoFit/>
-          </a:bodyPr>
-          <a:lstStyle/>
-          <a:p>
-            <a:pPr algn="l"/>
-            <a:r>
-              <a:rPr sz="2000" b="1">
-                <a:solidFill>
-                  <a:srgbClr val="1F2D3A"/>
-                </a:solidFill>
-              </a:rPr>
-              <a:t>Answer:</a:t>
-            </a:r>
-            <a:r>
-              <a:rPr sz="2000" b="0">
-                <a:solidFill>
-                  <a:srgbClr val="1F2D3A"/>
-                </a:solidFill>
-              </a:rPr>
-              <a:t> Elevation of privilege. Control: least privilege, authorization checks, secure defaults.</a:t>
-            </a:r>
-          </a:p>
-        </p:txBody>
-      </p:sp>
-    </p:spTree>
-  </p:cSld>
-  <p:clrMapOvr>
-    <a:masterClrMapping/>
-  </p:clrMapOvr>
-</p:sld>
-</file>
-
-<file path=ppt/slides/slide34.xml><?xml version="1.0" encoding="utf-8"?>
-<p:sld xmlns:a="http://schemas.openxmlformats.org/drawingml/2006/main" xmlns:p="http://schemas.openxmlformats.org/presentationml/2006/main" xmlns:r="http://schemas.openxmlformats.org/officeDocument/2006/relationships">
-  <p:cSld>
-    <p:spTree>
-      <p:nvGrpSpPr>
-        <p:cNvPr id="1" name=""/>
-        <p:cNvGrpSpPr/>
-        <p:nvPr/>
-      </p:nvGrpSpPr>
-      <p:grpSpPr/>
-      <p:pic>
-        <p:nvPicPr>
-          <p:cNvPr id="2" name="Picture 1" descr="rteu_logo_kucuk.jpg"/>
-          <p:cNvPicPr>
-            <a:picLocks noChangeAspect="1"/>
-          </p:cNvPicPr>
-          <p:nvPr/>
-        </p:nvPicPr>
-        <p:blipFill>
-          <a:blip r:embed="rId2"/>
-          <a:stretch>
-            <a:fillRect/>
-          </a:stretch>
-        </p:blipFill>
-        <p:spPr>
-          <a:xfrm>
-            <a:off x="640080" y="164592"/>
-            <a:ext cx="242773" cy="329184"/>
-          </a:xfrm>
-          <a:prstGeom prst="rect">
-            <a:avLst/>
-          </a:prstGeom>
-        </p:spPr>
-      </p:pic>
-      <p:sp>
-        <p:nvSpPr>
-          <p:cNvPr id="3" name="TextBox 2"/>
-          <p:cNvSpPr txBox="1"/>
-          <p:nvPr/>
-        </p:nvSpPr>
-        <p:spPr>
-          <a:xfrm>
-            <a:off x="1051560" y="182880"/>
-            <a:ext cx="7315200" cy="320040"/>
-          </a:xfrm>
-          <a:prstGeom prst="rect">
-            <a:avLst/>
-          </a:prstGeom>
-          <a:noFill/>
-        </p:spPr>
-        <p:txBody>
-          <a:bodyPr wrap="square" lIns="45720" rIns="45720">
-            <a:spAutoFit/>
-          </a:bodyPr>
-          <a:lstStyle/>
-          <a:p>
-            <a:r>
-              <a:rPr sz="1100" b="0">
-                <a:solidFill>
-                  <a:srgbClr val="5B6770"/>
-                </a:solidFill>
-              </a:rPr>
-              <a:t>CEN429 Secure Programming · Week 8</a:t>
-            </a:r>
-          </a:p>
-        </p:txBody>
-      </p:sp>
-      <p:sp>
-        <p:nvSpPr>
-          <p:cNvPr id="4" name="TextBox 3"/>
-          <p:cNvSpPr txBox="1"/>
-          <p:nvPr/>
-        </p:nvSpPr>
-        <p:spPr>
-          <a:xfrm>
-            <a:off x="640080" y="6446520"/>
-            <a:ext cx="7315200" cy="274320"/>
-          </a:xfrm>
-          <a:prstGeom prst="rect">
-            <a:avLst/>
-          </a:prstGeom>
-          <a:noFill/>
-        </p:spPr>
-        <p:txBody>
-          <a:bodyPr wrap="square" lIns="45720" rIns="45720">
-            <a:spAutoFit/>
-          </a:bodyPr>
-          <a:lstStyle/>
-          <a:p>
-            <a:r>
-              <a:rPr sz="1000" b="0">
-                <a:solidFill>
-                  <a:srgbClr val="5B6770"/>
-                </a:solidFill>
-              </a:rPr>
-              <a:t>RTEU Computer Engineering · 2026-2027 Fall</a:t>
-            </a:r>
-          </a:p>
-        </p:txBody>
-      </p:sp>
-      <p:sp>
-        <p:nvSpPr>
-          <p:cNvPr id="5" name="TextBox 4"/>
-          <p:cNvSpPr txBox="1"/>
-          <p:nvPr/>
-        </p:nvSpPr>
-        <p:spPr>
-          <a:xfrm>
-            <a:off x="10637215" y="6446520"/>
-            <a:ext cx="914400" cy="274320"/>
-          </a:xfrm>
-          <a:prstGeom prst="rect">
-            <a:avLst/>
-          </a:prstGeom>
-          <a:noFill/>
-        </p:spPr>
-        <p:txBody>
-          <a:bodyPr wrap="square" lIns="45720" rIns="45720">
-            <a:spAutoFit/>
-          </a:bodyPr>
-          <a:lstStyle/>
-          <a:p>
-            <a:pPr algn="r"/>
-            <a:r>
-              <a:rPr sz="1000" b="0">
-                <a:solidFill>
-                  <a:srgbClr val="5B6770"/>
-                </a:solidFill>
-              </a:rPr>
-              <a:t>34</a:t>
-            </a:r>
-          </a:p>
-        </p:txBody>
-      </p:sp>
-      <p:sp>
-        <p:nvSpPr>
-          <p:cNvPr id="6" name="TextBox 5"/>
-          <p:cNvSpPr txBox="1"/>
-          <p:nvPr/>
-        </p:nvSpPr>
-        <p:spPr>
-          <a:xfrm>
-            <a:off x="640080" y="548640"/>
-            <a:ext cx="10911535" cy="731520"/>
-          </a:xfrm>
-          <a:prstGeom prst="rect">
-            <a:avLst/>
-          </a:prstGeom>
-          <a:noFill/>
-        </p:spPr>
-        <p:txBody>
-          <a:bodyPr wrap="square" lIns="45720" rIns="45720" anchor="ctr">
-            <a:spAutoFit/>
-          </a:bodyPr>
-          <a:lstStyle/>
-          <a:p>
-            <a:r>
-              <a:rPr sz="3000" b="1">
-                <a:solidFill>
-                  <a:srgbClr val="006D77"/>
-                </a:solidFill>
-              </a:rPr>
-              <a:t>Question 10</a:t>
-            </a:r>
-          </a:p>
-        </p:txBody>
-      </p:sp>
-      <p:sp>
-        <p:nvSpPr>
-          <p:cNvPr id="7" name="TextBox 6"/>
-          <p:cNvSpPr txBox="1"/>
-          <p:nvPr/>
-        </p:nvSpPr>
-        <p:spPr>
-          <a:xfrm>
-            <a:off x="640080" y="1325880"/>
-            <a:ext cx="10911535" cy="439928"/>
-          </a:xfrm>
-          <a:prstGeom prst="rect">
-            <a:avLst/>
-          </a:prstGeom>
-          <a:noFill/>
-        </p:spPr>
-        <p:txBody>
-          <a:bodyPr wrap="square" lIns="45720" rIns="45720">
-            <a:spAutoFit/>
-          </a:bodyPr>
-          <a:lstStyle/>
-          <a:p>
-            <a:pPr algn="l"/>
-            <a:r>
-              <a:rPr sz="2000" b="1">
-                <a:solidFill>
-                  <a:srgbClr val="1F2D3A"/>
-                </a:solidFill>
-              </a:rPr>
-              <a:t>Why is deserialisation dangerous, and what is the fix?</a:t>
-            </a:r>
-          </a:p>
-        </p:txBody>
-      </p:sp>
-      <p:sp>
-        <p:nvSpPr>
-          <p:cNvPr id="8" name="TextBox 7"/>
-          <p:cNvSpPr txBox="1"/>
-          <p:nvPr/>
-        </p:nvSpPr>
-        <p:spPr>
-          <a:xfrm>
-            <a:off x="640080" y="1875536"/>
-            <a:ext cx="10911535" cy="770128"/>
-          </a:xfrm>
-          <a:prstGeom prst="rect">
-            <a:avLst/>
-          </a:prstGeom>
-          <a:noFill/>
-        </p:spPr>
-        <p:txBody>
-          <a:bodyPr wrap="square" lIns="45720" rIns="45720">
-            <a:spAutoFit/>
-          </a:bodyPr>
-          <a:lstStyle/>
-          <a:p>
-            <a:pPr algn="l"/>
-            <a:r>
-              <a:rPr sz="2000" b="1">
-                <a:solidFill>
-                  <a:srgbClr val="1F2D3A"/>
-                </a:solidFill>
-              </a:rPr>
-              <a:t>Answer:</a:t>
-            </a:r>
-            <a:r>
-              <a:rPr sz="2000" b="0">
-                <a:solidFill>
-                  <a:srgbClr val="1F2D3A"/>
-                </a:solidFill>
-              </a:rPr>
-              <a:t> Code can execute during extraction (a gadget chain). Fix: a data format + schema; an allowlist filter if unavoidable.</a:t>
-            </a:r>
-          </a:p>
-        </p:txBody>
-      </p:sp>
-    </p:spTree>
-  </p:cSld>
-  <p:clrMapOvr>
-    <a:masterClrMapping/>
-  </p:clrMapOvr>
-</p:sld>
-</file>
-
-<file path=ppt/slides/slide35.xml><?xml version="1.0" encoding="utf-8"?>
-<p:sld xmlns:a="http://schemas.openxmlformats.org/drawingml/2006/main" xmlns:p="http://schemas.openxmlformats.org/presentationml/2006/main" xmlns:r="http://schemas.openxmlformats.org/officeDocument/2006/relationships">
-  <p:cSld>
-    <p:spTree>
-      <p:nvGrpSpPr>
-        <p:cNvPr id="1" name=""/>
-        <p:cNvGrpSpPr/>
-        <p:nvPr/>
-      </p:nvGrpSpPr>
-      <p:grpSpPr/>
-      <p:pic>
-        <p:nvPicPr>
-          <p:cNvPr id="2" name="Picture 1" descr="rteu_logo_kucuk.jpg"/>
-          <p:cNvPicPr>
-            <a:picLocks noChangeAspect="1"/>
-          </p:cNvPicPr>
-          <p:nvPr/>
-        </p:nvPicPr>
-        <p:blipFill>
-          <a:blip r:embed="rId2"/>
-          <a:stretch>
-            <a:fillRect/>
-          </a:stretch>
-        </p:blipFill>
-        <p:spPr>
-          <a:xfrm>
-            <a:off x="640080" y="164592"/>
-            <a:ext cx="242773" cy="329184"/>
-          </a:xfrm>
-          <a:prstGeom prst="rect">
-            <a:avLst/>
-          </a:prstGeom>
-        </p:spPr>
-      </p:pic>
-      <p:sp>
-        <p:nvSpPr>
-          <p:cNvPr id="3" name="TextBox 2"/>
-          <p:cNvSpPr txBox="1"/>
-          <p:nvPr/>
-        </p:nvSpPr>
-        <p:spPr>
-          <a:xfrm>
-            <a:off x="1051560" y="182880"/>
-            <a:ext cx="7315200" cy="320040"/>
-          </a:xfrm>
-          <a:prstGeom prst="rect">
-            <a:avLst/>
-          </a:prstGeom>
-          <a:noFill/>
-        </p:spPr>
-        <p:txBody>
-          <a:bodyPr wrap="square" lIns="45720" rIns="45720">
-            <a:spAutoFit/>
-          </a:bodyPr>
-          <a:lstStyle/>
-          <a:p>
-            <a:r>
-              <a:rPr sz="1100" b="0">
-                <a:solidFill>
-                  <a:srgbClr val="5B6770"/>
-                </a:solidFill>
-              </a:rPr>
-              <a:t>CEN429 Secure Programming · Week 8</a:t>
-            </a:r>
-          </a:p>
-        </p:txBody>
-      </p:sp>
-      <p:sp>
-        <p:nvSpPr>
-          <p:cNvPr id="4" name="TextBox 3"/>
-          <p:cNvSpPr txBox="1"/>
-          <p:nvPr/>
-        </p:nvSpPr>
-        <p:spPr>
-          <a:xfrm>
-            <a:off x="640080" y="6446520"/>
-            <a:ext cx="7315200" cy="274320"/>
-          </a:xfrm>
-          <a:prstGeom prst="rect">
-            <a:avLst/>
-          </a:prstGeom>
-          <a:noFill/>
-        </p:spPr>
-        <p:txBody>
-          <a:bodyPr wrap="square" lIns="45720" rIns="45720">
-            <a:spAutoFit/>
-          </a:bodyPr>
-          <a:lstStyle/>
-          <a:p>
-            <a:r>
-              <a:rPr sz="1000" b="0">
-                <a:solidFill>
-                  <a:srgbClr val="5B6770"/>
-                </a:solidFill>
-              </a:rPr>
-              <a:t>RTEU Computer Engineering · 2026-2027 Fall</a:t>
-            </a:r>
-          </a:p>
-        </p:txBody>
-      </p:sp>
-      <p:sp>
-        <p:nvSpPr>
-          <p:cNvPr id="5" name="TextBox 4"/>
-          <p:cNvSpPr txBox="1"/>
-          <p:nvPr/>
-        </p:nvSpPr>
-        <p:spPr>
-          <a:xfrm>
-            <a:off x="10637215" y="6446520"/>
-            <a:ext cx="914400" cy="274320"/>
-          </a:xfrm>
-          <a:prstGeom prst="rect">
-            <a:avLst/>
-          </a:prstGeom>
-          <a:noFill/>
-        </p:spPr>
-        <p:txBody>
-          <a:bodyPr wrap="square" lIns="45720" rIns="45720">
-            <a:spAutoFit/>
-          </a:bodyPr>
-          <a:lstStyle/>
-          <a:p>
-            <a:pPr algn="r"/>
-            <a:r>
-              <a:rPr sz="1000" b="0">
-                <a:solidFill>
-                  <a:srgbClr val="5B6770"/>
-                </a:solidFill>
-              </a:rPr>
-              <a:t>35</a:t>
-            </a:r>
-          </a:p>
-        </p:txBody>
-      </p:sp>
-      <p:sp>
-        <p:nvSpPr>
-          <p:cNvPr id="6" name="TextBox 5"/>
-          <p:cNvSpPr txBox="1"/>
-          <p:nvPr/>
-        </p:nvSpPr>
-        <p:spPr>
-          <a:xfrm>
-            <a:off x="640080" y="548640"/>
-            <a:ext cx="10911535" cy="731520"/>
-          </a:xfrm>
-          <a:prstGeom prst="rect">
-            <a:avLst/>
-          </a:prstGeom>
-          <a:noFill/>
-        </p:spPr>
-        <p:txBody>
-          <a:bodyPr wrap="square" lIns="45720" rIns="45720" anchor="ctr">
-            <a:spAutoFit/>
-          </a:bodyPr>
-          <a:lstStyle/>
-          <a:p>
-            <a:r>
-              <a:rPr sz="3000" b="1">
-                <a:solidFill>
-                  <a:srgbClr val="006D77"/>
-                </a:solidFill>
-              </a:rPr>
-              <a:t>Example · Multiple Choice</a:t>
-            </a:r>
-          </a:p>
-        </p:txBody>
-      </p:sp>
-      <p:sp>
-        <p:nvSpPr>
-          <p:cNvPr id="7" name="TextBox 6"/>
-          <p:cNvSpPr txBox="1"/>
-          <p:nvPr/>
-        </p:nvSpPr>
-        <p:spPr>
-          <a:xfrm>
-            <a:off x="640080" y="1325880"/>
-            <a:ext cx="10911535" cy="439928"/>
-          </a:xfrm>
-          <a:prstGeom prst="rect">
-            <a:avLst/>
-          </a:prstGeom>
-          <a:noFill/>
-        </p:spPr>
-        <p:txBody>
-          <a:bodyPr wrap="square" lIns="45720" rIns="45720">
-            <a:spAutoFit/>
-          </a:bodyPr>
-          <a:lstStyle/>
-          <a:p>
-            <a:pPr algn="l"/>
-            <a:r>
-              <a:rPr sz="2000" b="1">
-                <a:solidFill>
-                  <a:srgbClr val="1F2D3A"/>
-                </a:solidFill>
-              </a:rPr>
-              <a:t>Which of the following is an AEAD mode?</a:t>
-            </a:r>
-          </a:p>
-        </p:txBody>
-      </p:sp>
-      <p:sp>
-        <p:nvSpPr>
-          <p:cNvPr id="8" name="TextBox 7"/>
-          <p:cNvSpPr txBox="1"/>
-          <p:nvPr/>
-        </p:nvSpPr>
-        <p:spPr>
-          <a:xfrm>
-            <a:off x="640080" y="1875536"/>
-            <a:ext cx="10911535" cy="439928"/>
-          </a:xfrm>
-          <a:prstGeom prst="rect">
-            <a:avLst/>
-          </a:prstGeom>
-          <a:noFill/>
-        </p:spPr>
-        <p:txBody>
-          <a:bodyPr wrap="square" lIns="45720" rIns="45720">
-            <a:spAutoFit/>
-          </a:bodyPr>
-          <a:lstStyle/>
-          <a:p>
-            <a:pPr algn="l"/>
-            <a:r>
-              <a:rPr sz="2000" b="0">
-                <a:solidFill>
-                  <a:srgbClr val="1F2D3A"/>
-                </a:solidFill>
-              </a:rPr>
-              <a:t>A) ECB B) CBC C) </a:t>
-            </a:r>
-            <a:r>
-              <a:rPr sz="2000" b="1">
-                <a:solidFill>
-                  <a:srgbClr val="1F2D3A"/>
-                </a:solidFill>
-              </a:rPr>
-              <a:t>GCM</a:t>
-            </a:r>
-            <a:r>
-              <a:rPr sz="2000" b="0">
-                <a:solidFill>
-                  <a:srgbClr val="1F2D3A"/>
-                </a:solidFill>
-              </a:rPr>
-              <a:t> ✓ D) Raw RSA</a:t>
-            </a:r>
-          </a:p>
-        </p:txBody>
-      </p:sp>
-    </p:spTree>
-  </p:cSld>
-  <p:clrMapOvr>
-    <a:masterClrMapping/>
-  </p:clrMapOvr>
-</p:sld>
-</file>
-
-<file path=ppt/slides/slide36.xml><?xml version="1.0" encoding="utf-8"?>
-<p:sld xmlns:a="http://schemas.openxmlformats.org/drawingml/2006/main" xmlns:p="http://schemas.openxmlformats.org/presentationml/2006/main" xmlns:r="http://schemas.openxmlformats.org/officeDocument/2006/relationships">
-  <p:cSld>
-    <p:spTree>
-      <p:nvGrpSpPr>
-        <p:cNvPr id="1" name=""/>
-        <p:cNvGrpSpPr/>
-        <p:nvPr/>
-      </p:nvGrpSpPr>
-      <p:grpSpPr/>
-      <p:pic>
-        <p:nvPicPr>
-          <p:cNvPr id="2" name="Picture 1" descr="rteu_logo_kucuk.jpg"/>
-          <p:cNvPicPr>
-            <a:picLocks noChangeAspect="1"/>
-          </p:cNvPicPr>
-          <p:nvPr/>
-        </p:nvPicPr>
-        <p:blipFill>
-          <a:blip r:embed="rId2"/>
-          <a:stretch>
-            <a:fillRect/>
-          </a:stretch>
-        </p:blipFill>
-        <p:spPr>
-          <a:xfrm>
-            <a:off x="640080" y="164592"/>
-            <a:ext cx="242773" cy="329184"/>
-          </a:xfrm>
-          <a:prstGeom prst="rect">
-            <a:avLst/>
-          </a:prstGeom>
-        </p:spPr>
-      </p:pic>
-      <p:sp>
-        <p:nvSpPr>
-          <p:cNvPr id="3" name="TextBox 2"/>
-          <p:cNvSpPr txBox="1"/>
-          <p:nvPr/>
-        </p:nvSpPr>
-        <p:spPr>
-          <a:xfrm>
-            <a:off x="1051560" y="182880"/>
-            <a:ext cx="7315200" cy="320040"/>
-          </a:xfrm>
-          <a:prstGeom prst="rect">
-            <a:avLst/>
-          </a:prstGeom>
-          <a:noFill/>
-        </p:spPr>
-        <p:txBody>
-          <a:bodyPr wrap="square" lIns="45720" rIns="45720">
-            <a:spAutoFit/>
-          </a:bodyPr>
-          <a:lstStyle/>
-          <a:p>
-            <a:r>
-              <a:rPr sz="1100" b="0">
-                <a:solidFill>
-                  <a:srgbClr val="5B6770"/>
-                </a:solidFill>
-              </a:rPr>
-              <a:t>CEN429 Secure Programming · Week 8</a:t>
-            </a:r>
-          </a:p>
-        </p:txBody>
-      </p:sp>
-      <p:sp>
-        <p:nvSpPr>
-          <p:cNvPr id="4" name="TextBox 3"/>
-          <p:cNvSpPr txBox="1"/>
-          <p:nvPr/>
-        </p:nvSpPr>
-        <p:spPr>
-          <a:xfrm>
-            <a:off x="640080" y="6446520"/>
-            <a:ext cx="7315200" cy="274320"/>
-          </a:xfrm>
-          <a:prstGeom prst="rect">
-            <a:avLst/>
-          </a:prstGeom>
-          <a:noFill/>
-        </p:spPr>
-        <p:txBody>
-          <a:bodyPr wrap="square" lIns="45720" rIns="45720">
-            <a:spAutoFit/>
-          </a:bodyPr>
-          <a:lstStyle/>
-          <a:p>
-            <a:r>
-              <a:rPr sz="1000" b="0">
-                <a:solidFill>
-                  <a:srgbClr val="5B6770"/>
-                </a:solidFill>
-              </a:rPr>
-              <a:t>RTEU Computer Engineering · 2026-2027 Fall</a:t>
-            </a:r>
-          </a:p>
-        </p:txBody>
-      </p:sp>
-      <p:sp>
-        <p:nvSpPr>
-          <p:cNvPr id="5" name="TextBox 4"/>
-          <p:cNvSpPr txBox="1"/>
-          <p:nvPr/>
-        </p:nvSpPr>
-        <p:spPr>
-          <a:xfrm>
-            <a:off x="10637215" y="6446520"/>
-            <a:ext cx="914400" cy="274320"/>
-          </a:xfrm>
-          <a:prstGeom prst="rect">
-            <a:avLst/>
-          </a:prstGeom>
-          <a:noFill/>
-        </p:spPr>
-        <p:txBody>
-          <a:bodyPr wrap="square" lIns="45720" rIns="45720">
-            <a:spAutoFit/>
-          </a:bodyPr>
-          <a:lstStyle/>
-          <a:p>
-            <a:pPr algn="r"/>
-            <a:r>
-              <a:rPr sz="1000" b="0">
-                <a:solidFill>
-                  <a:srgbClr val="5B6770"/>
-                </a:solidFill>
-              </a:rPr>
-              <a:t>36</a:t>
-            </a:r>
-          </a:p>
-        </p:txBody>
-      </p:sp>
-      <p:sp>
-        <p:nvSpPr>
-          <p:cNvPr id="6" name="TextBox 5"/>
-          <p:cNvSpPr txBox="1"/>
-          <p:nvPr/>
-        </p:nvSpPr>
-        <p:spPr>
-          <a:xfrm>
-            <a:off x="640080" y="548640"/>
-            <a:ext cx="10911535" cy="731520"/>
-          </a:xfrm>
-          <a:prstGeom prst="rect">
-            <a:avLst/>
-          </a:prstGeom>
-          <a:noFill/>
-        </p:spPr>
-        <p:txBody>
-          <a:bodyPr wrap="square" lIns="45720" rIns="45720" anchor="ctr">
-            <a:spAutoFit/>
-          </a:bodyPr>
-          <a:lstStyle/>
-          <a:p>
-            <a:r>
-              <a:rPr sz="3000" b="1">
-                <a:solidFill>
-                  <a:srgbClr val="006D77"/>
-                </a:solidFill>
-              </a:rPr>
-              <a:t>Example · True/False</a:t>
-            </a:r>
-          </a:p>
-        </p:txBody>
-      </p:sp>
-      <p:sp>
-        <p:nvSpPr>
-          <p:cNvPr id="7" name="TextBox 6"/>
-          <p:cNvSpPr txBox="1"/>
-          <p:nvPr/>
-        </p:nvSpPr>
-        <p:spPr>
-          <a:xfrm>
-            <a:off x="640080" y="1325880"/>
-            <a:ext cx="10911535" cy="1219200"/>
-          </a:xfrm>
-          <a:prstGeom prst="rect">
-            <a:avLst/>
-          </a:prstGeom>
-          <a:noFill/>
-        </p:spPr>
-        <p:txBody>
-          <a:bodyPr wrap="square" lIns="45720" rIns="45720">
-            <a:spAutoFit/>
-          </a:bodyPr>
-          <a:lstStyle/>
-          <a:p>
-            <a:pPr>
-              <a:spcAft>
-                <a:spcPts val="300"/>
-              </a:spcAft>
-            </a:pPr>
-            <a:r>
-              <a:rPr sz="2000" b="1">
-                <a:solidFill>
-                  <a:srgbClr val="006D77"/>
-                </a:solidFill>
-              </a:rPr>
-              <a:t>• </a:t>
-            </a:r>
-            <a:r>
-              <a:rPr sz="2000" b="0">
-                <a:solidFill>
-                  <a:srgbClr val="1F2D3A"/>
-                </a:solidFill>
-              </a:rPr>
-              <a:t>Obfuscation fixes the bug. </a:t>
-            </a:r>
-            <a:r>
-              <a:rPr sz="2000" b="1">
-                <a:solidFill>
-                  <a:srgbClr val="1F2D3A"/>
-                </a:solidFill>
-              </a:rPr>
-              <a:t>(F)</a:t>
-            </a:r>
-          </a:p>
-          <a:p>
-            <a:pPr>
-              <a:spcAft>
-                <a:spcPts val="300"/>
-              </a:spcAft>
-            </a:pPr>
-            <a:r>
-              <a:rPr sz="2000" b="1">
-                <a:solidFill>
-                  <a:srgbClr val="006D77"/>
-                </a:solidFill>
-              </a:rPr>
-              <a:t>• </a:t>
-            </a:r>
-            <a:r>
-              <a:rPr sz="2000" b="0">
-                <a:solidFill>
-                  <a:srgbClr val="1F2D3A"/>
-                </a:solidFill>
-              </a:rPr>
-              <a:t>The nonce must be secret. </a:t>
-            </a:r>
-            <a:r>
-              <a:rPr sz="2000" b="1">
-                <a:solidFill>
-                  <a:srgbClr val="1F2D3A"/>
-                </a:solidFill>
-              </a:rPr>
-              <a:t>(F — must be unique, not secret)</a:t>
-            </a:r>
-          </a:p>
-          <a:p>
-            <a:pPr>
-              <a:spcAft>
-                <a:spcPts val="300"/>
-              </a:spcAft>
-            </a:pPr>
-            <a:r>
-              <a:rPr sz="2000" b="1">
-                <a:solidFill>
-                  <a:srgbClr val="006D77"/>
-                </a:solidFill>
-              </a:rPr>
-              <a:t>• </a:t>
-            </a:r>
-            <a:r>
-              <a:rPr sz="2000" b="0">
-                <a:solidFill>
-                  <a:srgbClr val="1F2D3A"/>
-                </a:solidFill>
-              </a:rPr>
-              <a:t>A parameterised query prevents SQL injection. </a:t>
-            </a:r>
-            <a:r>
-              <a:rPr sz="2000" b="1">
-                <a:solidFill>
-                  <a:srgbClr val="1F2D3A"/>
-                </a:solidFill>
-              </a:rPr>
-              <a:t>(T)</a:t>
-            </a:r>
-          </a:p>
-        </p:txBody>
-      </p:sp>
-    </p:spTree>
-  </p:cSld>
-  <p:clrMapOvr>
-    <a:masterClrMapping/>
-  </p:clrMapOvr>
-</p:sld>
-</file>
-
-<file path=ppt/slides/slide37.xml><?xml version="1.0" encoding="utf-8"?>
-<p:sld xmlns:a="http://schemas.openxmlformats.org/drawingml/2006/main" xmlns:p="http://schemas.openxmlformats.org/presentationml/2006/main" xmlns:r="http://schemas.openxmlformats.org/officeDocument/2006/relationships">
-  <p:cSld>
-    <p:spTree>
-      <p:nvGrpSpPr>
-        <p:cNvPr id="1" name=""/>
-        <p:cNvGrpSpPr/>
-        <p:nvPr/>
-      </p:nvGrpSpPr>
-      <p:grpSpPr/>
-      <p:pic>
-        <p:nvPicPr>
-          <p:cNvPr id="2" name="Picture 1" descr="rteu_logo_kucuk.jpg"/>
-          <p:cNvPicPr>
-            <a:picLocks noChangeAspect="1"/>
-          </p:cNvPicPr>
-          <p:nvPr/>
-        </p:nvPicPr>
-        <p:blipFill>
-          <a:blip r:embed="rId2"/>
-          <a:stretch>
-            <a:fillRect/>
-          </a:stretch>
-        </p:blipFill>
-        <p:spPr>
-          <a:xfrm>
-            <a:off x="640080" y="164592"/>
-            <a:ext cx="242773" cy="329184"/>
-          </a:xfrm>
-          <a:prstGeom prst="rect">
-            <a:avLst/>
-          </a:prstGeom>
-        </p:spPr>
-      </p:pic>
-      <p:sp>
-        <p:nvSpPr>
-          <p:cNvPr id="3" name="TextBox 2"/>
-          <p:cNvSpPr txBox="1"/>
-          <p:nvPr/>
-        </p:nvSpPr>
-        <p:spPr>
-          <a:xfrm>
-            <a:off x="1051560" y="182880"/>
-            <a:ext cx="7315200" cy="320040"/>
-          </a:xfrm>
-          <a:prstGeom prst="rect">
-            <a:avLst/>
-          </a:prstGeom>
-          <a:noFill/>
-        </p:spPr>
-        <p:txBody>
-          <a:bodyPr wrap="square" lIns="45720" rIns="45720">
-            <a:spAutoFit/>
-          </a:bodyPr>
-          <a:lstStyle/>
-          <a:p>
-            <a:r>
-              <a:rPr sz="1100" b="0">
-                <a:solidFill>
-                  <a:srgbClr val="5B6770"/>
-                </a:solidFill>
-              </a:rPr>
-              <a:t>CEN429 Secure Programming · Week 8</a:t>
-            </a:r>
-          </a:p>
-        </p:txBody>
-      </p:sp>
-      <p:sp>
-        <p:nvSpPr>
-          <p:cNvPr id="4" name="TextBox 3"/>
-          <p:cNvSpPr txBox="1"/>
-          <p:nvPr/>
-        </p:nvSpPr>
-        <p:spPr>
-          <a:xfrm>
-            <a:off x="640080" y="6446520"/>
-            <a:ext cx="7315200" cy="274320"/>
-          </a:xfrm>
-          <a:prstGeom prst="rect">
-            <a:avLst/>
-          </a:prstGeom>
-          <a:noFill/>
-        </p:spPr>
-        <p:txBody>
-          <a:bodyPr wrap="square" lIns="45720" rIns="45720">
-            <a:spAutoFit/>
-          </a:bodyPr>
-          <a:lstStyle/>
-          <a:p>
-            <a:r>
-              <a:rPr sz="1000" b="0">
-                <a:solidFill>
-                  <a:srgbClr val="5B6770"/>
-                </a:solidFill>
-              </a:rPr>
-              <a:t>RTEU Computer Engineering · 2026-2027 Fall</a:t>
-            </a:r>
-          </a:p>
-        </p:txBody>
-      </p:sp>
-      <p:sp>
-        <p:nvSpPr>
-          <p:cNvPr id="5" name="TextBox 4"/>
-          <p:cNvSpPr txBox="1"/>
-          <p:nvPr/>
-        </p:nvSpPr>
-        <p:spPr>
-          <a:xfrm>
-            <a:off x="10637215" y="6446520"/>
-            <a:ext cx="914400" cy="274320"/>
-          </a:xfrm>
-          <a:prstGeom prst="rect">
-            <a:avLst/>
-          </a:prstGeom>
-          <a:noFill/>
-        </p:spPr>
-        <p:txBody>
-          <a:bodyPr wrap="square" lIns="45720" rIns="45720">
-            <a:spAutoFit/>
-          </a:bodyPr>
-          <a:lstStyle/>
-          <a:p>
-            <a:pPr algn="r"/>
-            <a:r>
-              <a:rPr sz="1000" b="0">
-                <a:solidFill>
-                  <a:srgbClr val="5B6770"/>
-                </a:solidFill>
-              </a:rPr>
-              <a:t>37</a:t>
-            </a:r>
-          </a:p>
-        </p:txBody>
-      </p:sp>
-      <p:sp>
-        <p:nvSpPr>
-          <p:cNvPr id="6" name="TextBox 5"/>
-          <p:cNvSpPr txBox="1"/>
-          <p:nvPr/>
-        </p:nvSpPr>
-        <p:spPr>
-          <a:xfrm>
-            <a:off x="640080" y="548640"/>
-            <a:ext cx="10911535" cy="731520"/>
-          </a:xfrm>
-          <a:prstGeom prst="rect">
-            <a:avLst/>
-          </a:prstGeom>
-          <a:noFill/>
-        </p:spPr>
-        <p:txBody>
-          <a:bodyPr wrap="square" lIns="45720" rIns="45720" anchor="ctr">
-            <a:spAutoFit/>
-          </a:bodyPr>
-          <a:lstStyle/>
-          <a:p>
-            <a:r>
-              <a:rPr sz="3000" b="1">
-                <a:solidFill>
-                  <a:srgbClr val="006D77"/>
-                </a:solidFill>
-              </a:rPr>
-              <a:t>Study Plan</a:t>
-            </a:r>
-          </a:p>
-        </p:txBody>
-      </p:sp>
-      <p:sp>
-        <p:nvSpPr>
-          <p:cNvPr id="7" name="TextBox 6"/>
-          <p:cNvSpPr txBox="1"/>
-          <p:nvPr/>
-        </p:nvSpPr>
-        <p:spPr>
-          <a:xfrm>
-            <a:off x="640080" y="1325880"/>
-            <a:ext cx="10911535" cy="1219200"/>
-          </a:xfrm>
-          <a:prstGeom prst="rect">
-            <a:avLst/>
-          </a:prstGeom>
-          <a:noFill/>
-        </p:spPr>
-        <p:txBody>
-          <a:bodyPr wrap="square" lIns="45720" rIns="45720">
-            <a:spAutoFit/>
-          </a:bodyPr>
-          <a:lstStyle/>
-          <a:p>
-            <a:pPr>
-              <a:spcAft>
-                <a:spcPts val="300"/>
-              </a:spcAft>
-            </a:pPr>
-            <a:r>
-              <a:rPr sz="2000" b="1">
-                <a:solidFill>
-                  <a:srgbClr val="006D77"/>
-                </a:solidFill>
-              </a:rPr>
-              <a:t>• </a:t>
-            </a:r>
-            <a:r>
-              <a:rPr sz="2000" b="0">
-                <a:solidFill>
-                  <a:srgbClr val="1F2D3A"/>
-                </a:solidFill>
-              </a:rPr>
-              <a:t>Do each week's "Self-check" without looking at the answers.</a:t>
-            </a:r>
-          </a:p>
-          <a:p>
-            <a:pPr>
-              <a:spcAft>
-                <a:spcPts val="300"/>
-              </a:spcAft>
-            </a:pPr>
-            <a:r>
-              <a:rPr sz="2000" b="1">
-                <a:solidFill>
-                  <a:srgbClr val="006D77"/>
-                </a:solidFill>
-              </a:rPr>
-              <a:t>• </a:t>
-            </a:r>
-            <a:r>
-              <a:rPr sz="2000" b="0">
-                <a:solidFill>
-                  <a:srgbClr val="1F2D3A"/>
-                </a:solidFill>
-              </a:rPr>
-              <a:t>Learn frequently confused pairs by their </a:t>
-            </a:r>
-            <a:r>
-              <a:rPr sz="2000" b="1">
-                <a:solidFill>
-                  <a:srgbClr val="1F2D3A"/>
-                </a:solidFill>
-              </a:rPr>
-              <a:t>reason</a:t>
-            </a:r>
-            <a:r>
-              <a:rPr sz="2000" b="0">
-                <a:solidFill>
-                  <a:srgbClr val="1F2D3A"/>
-                </a:solidFill>
-              </a:rPr>
-              <a:t>, not by rote.</a:t>
-            </a:r>
-          </a:p>
-          <a:p>
-            <a:pPr>
-              <a:spcAft>
-                <a:spcPts val="300"/>
-              </a:spcAft>
-            </a:pPr>
-            <a:r>
-              <a:rPr sz="2000" b="1">
-                <a:solidFill>
-                  <a:srgbClr val="006D77"/>
-                </a:solidFill>
-              </a:rPr>
-              <a:t>• </a:t>
-            </a:r>
-            <a:r>
-              <a:rPr sz="2000" b="0">
-                <a:solidFill>
-                  <a:srgbClr val="1F2D3A"/>
-                </a:solidFill>
-              </a:rPr>
-              <a:t>Review the Week 3 and Week 4 demos once more.</a:t>
-            </a:r>
-          </a:p>
-        </p:txBody>
-      </p:sp>
-    </p:spTree>
-  </p:cSld>
-  <p:clrMapOvr>
-    <a:masterClrMapping/>
-  </p:clrMapOvr>
-</p:sld>
-</file>
-
-<file path=ppt/slides/slide38.xml><?xml version="1.0" encoding="utf-8"?>
-<p:sld xmlns:a="http://schemas.openxmlformats.org/drawingml/2006/main" xmlns:p="http://schemas.openxmlformats.org/presentationml/2006/main" xmlns:r="http://schemas.openxmlformats.org/officeDocument/2006/relationships">
-  <p:cSld>
-    <p:spTree>
-      <p:nvGrpSpPr>
-        <p:cNvPr id="1" name=""/>
-        <p:cNvGrpSpPr/>
-        <p:nvPr/>
-      </p:nvGrpSpPr>
-      <p:grpSpPr/>
-      <p:pic>
-        <p:nvPicPr>
-          <p:cNvPr id="2" name="Picture 1" descr="rteu_logo_kucuk.jpg"/>
-          <p:cNvPicPr>
-            <a:picLocks noChangeAspect="1"/>
-          </p:cNvPicPr>
-          <p:nvPr/>
-        </p:nvPicPr>
-        <p:blipFill>
-          <a:blip r:embed="rId2"/>
-          <a:stretch>
-            <a:fillRect/>
-          </a:stretch>
-        </p:blipFill>
-        <p:spPr>
-          <a:xfrm>
-            <a:off x="640080" y="164592"/>
-            <a:ext cx="242773" cy="329184"/>
-          </a:xfrm>
-          <a:prstGeom prst="rect">
-            <a:avLst/>
-          </a:prstGeom>
-        </p:spPr>
-      </p:pic>
-      <p:sp>
-        <p:nvSpPr>
-          <p:cNvPr id="3" name="TextBox 2"/>
-          <p:cNvSpPr txBox="1"/>
-          <p:nvPr/>
-        </p:nvSpPr>
-        <p:spPr>
-          <a:xfrm>
-            <a:off x="1051560" y="182880"/>
-            <a:ext cx="7315200" cy="320040"/>
-          </a:xfrm>
-          <a:prstGeom prst="rect">
-            <a:avLst/>
-          </a:prstGeom>
-          <a:noFill/>
-        </p:spPr>
-        <p:txBody>
-          <a:bodyPr wrap="square" lIns="45720" rIns="45720">
-            <a:spAutoFit/>
-          </a:bodyPr>
-          <a:lstStyle/>
-          <a:p>
-            <a:r>
-              <a:rPr sz="1100" b="0">
-                <a:solidFill>
-                  <a:srgbClr val="5B6770"/>
-                </a:solidFill>
-              </a:rPr>
-              <a:t>CEN429 Secure Programming · Week 8</a:t>
-            </a:r>
-          </a:p>
-        </p:txBody>
-      </p:sp>
-      <p:sp>
-        <p:nvSpPr>
-          <p:cNvPr id="4" name="TextBox 3"/>
-          <p:cNvSpPr txBox="1"/>
-          <p:nvPr/>
-        </p:nvSpPr>
-        <p:spPr>
-          <a:xfrm>
-            <a:off x="640080" y="6446520"/>
-            <a:ext cx="7315200" cy="274320"/>
-          </a:xfrm>
-          <a:prstGeom prst="rect">
-            <a:avLst/>
-          </a:prstGeom>
-          <a:noFill/>
-        </p:spPr>
-        <p:txBody>
-          <a:bodyPr wrap="square" lIns="45720" rIns="45720">
-            <a:spAutoFit/>
-          </a:bodyPr>
-          <a:lstStyle/>
-          <a:p>
-            <a:r>
-              <a:rPr sz="1000" b="0">
-                <a:solidFill>
-                  <a:srgbClr val="5B6770"/>
-                </a:solidFill>
-              </a:rPr>
-              <a:t>RTEU Computer Engineering · 2026-2027 Fall</a:t>
-            </a:r>
-          </a:p>
-        </p:txBody>
-      </p:sp>
-      <p:sp>
-        <p:nvSpPr>
-          <p:cNvPr id="5" name="TextBox 4"/>
-          <p:cNvSpPr txBox="1"/>
-          <p:nvPr/>
-        </p:nvSpPr>
-        <p:spPr>
-          <a:xfrm>
-            <a:off x="10637215" y="6446520"/>
-            <a:ext cx="914400" cy="274320"/>
-          </a:xfrm>
-          <a:prstGeom prst="rect">
-            <a:avLst/>
-          </a:prstGeom>
-          <a:noFill/>
-        </p:spPr>
-        <p:txBody>
-          <a:bodyPr wrap="square" lIns="45720" rIns="45720">
-            <a:spAutoFit/>
-          </a:bodyPr>
-          <a:lstStyle/>
-          <a:p>
-            <a:pPr algn="r"/>
-            <a:r>
-              <a:rPr sz="1000" b="0">
-                <a:solidFill>
-                  <a:srgbClr val="5B6770"/>
-                </a:solidFill>
-              </a:rPr>
-              <a:t>38</a:t>
-            </a:r>
-          </a:p>
-        </p:txBody>
-      </p:sp>
-      <p:sp>
-        <p:nvSpPr>
-          <p:cNvPr id="6" name="TextBox 5"/>
-          <p:cNvSpPr txBox="1"/>
-          <p:nvPr/>
-        </p:nvSpPr>
-        <p:spPr>
-          <a:xfrm>
-            <a:off x="640080" y="548640"/>
-            <a:ext cx="10911535" cy="731520"/>
-          </a:xfrm>
-          <a:prstGeom prst="rect">
-            <a:avLst/>
-          </a:prstGeom>
-          <a:noFill/>
-        </p:spPr>
-        <p:txBody>
-          <a:bodyPr wrap="square" lIns="45720" rIns="45720" anchor="ctr">
-            <a:spAutoFit/>
-          </a:bodyPr>
-          <a:lstStyle/>
-          <a:p>
-            <a:r>
-              <a:rPr sz="3000" b="1">
-                <a:solidFill>
-                  <a:srgbClr val="006D77"/>
-                </a:solidFill>
-              </a:rPr>
-              <a:t>Final Word (Quiz-1 Prep)</a:t>
-            </a:r>
-          </a:p>
-        </p:txBody>
-      </p:sp>
-      <p:sp>
-        <p:nvSpPr>
-          <p:cNvPr id="7" name="Rectangle 6"/>
-          <p:cNvSpPr/>
-          <p:nvPr/>
-        </p:nvSpPr>
-        <p:spPr>
-          <a:xfrm>
-            <a:off x="640080" y="1325880"/>
-            <a:ext cx="10911535" cy="934719"/>
-          </a:xfrm>
-          <a:prstGeom prst="rect">
-            <a:avLst/>
-          </a:prstGeom>
-          <a:solidFill>
-            <a:srgbClr val="EEF7F8"/>
-          </a:solidFill>
-          <a:ln>
-            <a:solidFill>
-              <a:srgbClr val="006D77"/>
-            </a:solidFill>
-          </a:ln>
-        </p:spPr>
-        <p:style>
-          <a:lnRef idx="1">
-            <a:schemeClr val="accent1"/>
-          </a:lnRef>
-          <a:fillRef idx="3">
-            <a:schemeClr val="accent1"/>
-          </a:fillRef>
-          <a:effectRef idx="2">
-            <a:schemeClr val="accent1"/>
-          </a:effectRef>
-          <a:fontRef idx="minor">
-            <a:schemeClr val="lt1"/>
-          </a:fontRef>
-        </p:style>
-        <p:txBody>
-          <a:bodyPr rtlCol="0" anchor="ctr" wrap="square" lIns="182880"/>
-          <a:lstStyle/>
-          <a:p>
-            <a:pPr algn="l"/>
-            <a:r>
-              <a:rPr sz="2000" b="0">
-                <a:solidFill>
-                  <a:srgbClr val="1F2D3A"/>
-                </a:solidFill>
-              </a:rPr>
-              <a:t>Not memorization — what's measured is the </a:t>
-            </a:r>
-            <a:r>
-              <a:rPr sz="2000" b="1">
-                <a:solidFill>
-                  <a:srgbClr val="1F2D3A"/>
-                </a:solidFill>
-              </a:rPr>
-              <a:t>why</a:t>
-            </a:r>
-            <a:r>
-              <a:rPr sz="2000" b="0">
-                <a:solidFill>
-                  <a:srgbClr val="1F2D3A"/>
-                </a:solidFill>
-              </a:rPr>
-              <a:t>: "why this mode?", "why this check?", "what doesn't it protect?"</a:t>
-            </a:r>
-          </a:p>
-        </p:txBody>
-      </p:sp>
-      <p:sp>
-        <p:nvSpPr>
-          <p:cNvPr id="8" name="TextBox 7"/>
-          <p:cNvSpPr txBox="1"/>
-          <p:nvPr/>
-        </p:nvSpPr>
-        <p:spPr>
-          <a:xfrm>
-            <a:off x="640080" y="2370328"/>
-            <a:ext cx="10911535" cy="439928"/>
-          </a:xfrm>
-          <a:prstGeom prst="rect">
-            <a:avLst/>
-          </a:prstGeom>
-          <a:noFill/>
-        </p:spPr>
-        <p:txBody>
-          <a:bodyPr wrap="square" lIns="45720" rIns="45720">
-            <a:spAutoFit/>
-          </a:bodyPr>
-          <a:lstStyle/>
-          <a:p>
-            <a:pPr algn="l"/>
-            <a:r>
-              <a:rPr sz="2000" b="0">
-                <a:solidFill>
-                  <a:srgbClr val="1F2D3A"/>
-                </a:solidFill>
-              </a:rPr>
-              <a:t>Good luck.</a:t>
-            </a:r>
-          </a:p>
-        </p:txBody>
-      </p:sp>
-    </p:spTree>
-  </p:cSld>
-  <p:clrMapOvr>
-    <a:masterClrMapping/>
-  </p:clrMapOvr>
-</p:sld>
-</file>
-
-<file path=ppt/slides/slide4.xml><?xml version="1.0" encoding="utf-8"?>
-<p:sld xmlns:a="http://schemas.openxmlformats.org/drawingml/2006/main" xmlns:p="http://schemas.openxmlformats.org/presentationml/2006/main" xmlns:r="http://schemas.openxmlformats.org/officeDocument/2006/relationships">
-  <p:cSld>
-    <p:spTree>
-      <p:nvGrpSpPr>
-        <p:cNvPr id="1" name=""/>
-        <p:cNvGrpSpPr/>
-        <p:nvPr/>
-      </p:nvGrpSpPr>
-      <p:grpSpPr/>
-      <p:pic>
-        <p:nvPicPr>
-          <p:cNvPr id="2" name="Picture 1" descr="rteu_logo_kucuk.jpg"/>
-          <p:cNvPicPr>
-            <a:picLocks noChangeAspect="1"/>
-          </p:cNvPicPr>
-          <p:nvPr/>
-        </p:nvPicPr>
-        <p:blipFill>
-          <a:blip r:embed="rId2"/>
-          <a:stretch>
-            <a:fillRect/>
-          </a:stretch>
-        </p:blipFill>
-        <p:spPr>
-          <a:xfrm>
-            <a:off x="640080" y="164592"/>
-            <a:ext cx="242773" cy="329184"/>
-          </a:xfrm>
-          <a:prstGeom prst="rect">
-            <a:avLst/>
-          </a:prstGeom>
-        </p:spPr>
-      </p:pic>
-      <p:sp>
-        <p:nvSpPr>
-          <p:cNvPr id="3" name="TextBox 2"/>
-          <p:cNvSpPr txBox="1"/>
-          <p:nvPr/>
-        </p:nvSpPr>
-        <p:spPr>
-          <a:xfrm>
-            <a:off x="1051560" y="182880"/>
-            <a:ext cx="7315200" cy="320040"/>
-          </a:xfrm>
-          <a:prstGeom prst="rect">
-            <a:avLst/>
-          </a:prstGeom>
-          <a:noFill/>
-        </p:spPr>
-        <p:txBody>
-          <a:bodyPr wrap="square" lIns="45720" rIns="45720">
-            <a:spAutoFit/>
-          </a:bodyPr>
-          <a:lstStyle/>
-          <a:p>
-            <a:r>
-              <a:rPr sz="1100" b="0">
-                <a:solidFill>
-                  <a:srgbClr val="5B6770"/>
-                </a:solidFill>
-              </a:rPr>
-              <a:t>CEN429 Secure Programming · Week 8</a:t>
-            </a:r>
-          </a:p>
-        </p:txBody>
-      </p:sp>
-      <p:sp>
-        <p:nvSpPr>
-          <p:cNvPr id="4" name="TextBox 3"/>
-          <p:cNvSpPr txBox="1"/>
-          <p:nvPr/>
-        </p:nvSpPr>
-        <p:spPr>
-          <a:xfrm>
-            <a:off x="640080" y="6446520"/>
-            <a:ext cx="7315200" cy="274320"/>
-          </a:xfrm>
-          <a:prstGeom prst="rect">
-            <a:avLst/>
-          </a:prstGeom>
-          <a:noFill/>
-        </p:spPr>
-        <p:txBody>
-          <a:bodyPr wrap="square" lIns="45720" rIns="45720">
-            <a:spAutoFit/>
-          </a:bodyPr>
-          <a:lstStyle/>
-          <a:p>
-            <a:r>
-              <a:rPr sz="1000" b="0">
-                <a:solidFill>
-                  <a:srgbClr val="5B6770"/>
-                </a:solidFill>
-              </a:rPr>
-              <a:t>RTEU Computer Engineering · 2026-2027 Fall</a:t>
-            </a:r>
-          </a:p>
-        </p:txBody>
-      </p:sp>
-      <p:sp>
-        <p:nvSpPr>
-          <p:cNvPr id="5" name="TextBox 4"/>
-          <p:cNvSpPr txBox="1"/>
-          <p:nvPr/>
-        </p:nvSpPr>
-        <p:spPr>
-          <a:xfrm>
-            <a:off x="10637215" y="6446520"/>
-            <a:ext cx="914400" cy="274320"/>
-          </a:xfrm>
-          <a:prstGeom prst="rect">
-            <a:avLst/>
-          </a:prstGeom>
-          <a:noFill/>
-        </p:spPr>
-        <p:txBody>
-          <a:bodyPr wrap="square" lIns="45720" rIns="45720">
-            <a:spAutoFit/>
-          </a:bodyPr>
-          <a:lstStyle/>
-          <a:p>
-            <a:pPr algn="r"/>
-            <a:r>
-              <a:rPr sz="1000" b="0">
-                <a:solidFill>
-                  <a:srgbClr val="5B6770"/>
-                </a:solidFill>
-              </a:rPr>
-              <a:t>4</a:t>
             </a:r>
           </a:p>
         </p:txBody>
@@ -13335,6 +10177,40 @@
           </a:graphicData>
         </a:graphic>
       </p:graphicFrame>
+      <p:sp>
+        <p:nvSpPr>
+          <p:cNvPr id="8" name="TextBox 7"/>
+          <p:cNvSpPr txBox="1"/>
+          <p:nvPr/>
+        </p:nvSpPr>
+        <p:spPr>
+          <a:xfrm>
+            <a:off x="640080" y="4365345"/>
+            <a:ext cx="10911535" cy="406908"/>
+          </a:xfrm>
+          <a:prstGeom prst="rect">
+            <a:avLst/>
+          </a:prstGeom>
+          <a:noFill/>
+        </p:spPr>
+        <p:txBody>
+          <a:bodyPr wrap="square" lIns="45720" rIns="45720">
+            <a:spAutoFit/>
+          </a:bodyPr>
+          <a:lstStyle/>
+          <a:p>
+            <a:pPr algn="l"/>
+            <a:r>
+              <a:rPr sz="1800" b="0" i="1">
+                <a:solidFill>
+                  <a:srgbClr val="1F2D3A"/>
+                </a:solidFill>
+              </a:rPr>
+              <a:t>Note: Week 2 — trust boundary and the least-privilege principle.</a:t>
+            </a:r>
+          </a:p>
+        </p:txBody>
+      </p:sp>
     </p:spTree>
   </p:cSld>
   <p:clrMapOvr>
@@ -13343,7 +10219,7 @@
 </p:sld>
 </file>
 
-<file path=ppt/slides/slide5.xml><?xml version="1.0" encoding="utf-8"?>
+<file path=ppt/slides/slide4.xml><?xml version="1.0" encoding="utf-8"?>
 <p:sld xmlns:a="http://schemas.openxmlformats.org/drawingml/2006/main" xmlns:p="http://schemas.openxmlformats.org/presentationml/2006/main" xmlns:r="http://schemas.openxmlformats.org/officeDocument/2006/relationships">
   <p:cSld>
     <p:spTree>
@@ -13472,206 +10348,7 @@
                   <a:srgbClr val="5B6770"/>
                 </a:solidFill>
               </a:rPr>
-              <a:t>5</a:t>
-            </a:r>
-          </a:p>
-        </p:txBody>
-      </p:sp>
-      <p:sp>
-        <p:nvSpPr>
-          <p:cNvPr id="6" name="TextBox 5"/>
-          <p:cNvSpPr txBox="1"/>
-          <p:nvPr/>
-        </p:nvSpPr>
-        <p:spPr>
-          <a:xfrm>
-            <a:off x="640080" y="548640"/>
-            <a:ext cx="10911535" cy="731520"/>
-          </a:xfrm>
-          <a:prstGeom prst="rect">
-            <a:avLst/>
-          </a:prstGeom>
-          <a:noFill/>
-        </p:spPr>
-        <p:txBody>
-          <a:bodyPr wrap="square" lIns="45720" rIns="45720" anchor="ctr">
-            <a:spAutoFit/>
-          </a:bodyPr>
-          <a:lstStyle/>
-          <a:p>
-            <a:r>
-              <a:rPr sz="3000" b="1">
-                <a:solidFill>
-                  <a:srgbClr val="006D77"/>
-                </a:solidFill>
-              </a:rPr>
-              <a:t>Quiz-1 Scope — Diagram</a:t>
-            </a:r>
-          </a:p>
-        </p:txBody>
-      </p:sp>
-      <p:pic>
-        <p:nvPicPr>
-          <p:cNvPr id="7" name="Picture 6" descr="h08-01-kapsam.png"/>
-          <p:cNvPicPr>
-            <a:picLocks noChangeAspect="1"/>
-          </p:cNvPicPr>
-          <p:nvPr/>
-        </p:nvPicPr>
-        <p:blipFill>
-          <a:blip r:embed="rId3"/>
-          <a:stretch>
-            <a:fillRect/>
-          </a:stretch>
-        </p:blipFill>
-        <p:spPr>
-          <a:xfrm>
-            <a:off x="2046645" y="1325880"/>
-            <a:ext cx="8098404" cy="4060751"/>
-          </a:xfrm>
-          <a:prstGeom prst="rect">
-            <a:avLst/>
-          </a:prstGeom>
-        </p:spPr>
-      </p:pic>
-    </p:spTree>
-  </p:cSld>
-  <p:clrMapOvr>
-    <a:masterClrMapping/>
-  </p:clrMapOvr>
-</p:sld>
-</file>
-
-<file path=ppt/slides/slide6.xml><?xml version="1.0" encoding="utf-8"?>
-<p:sld xmlns:a="http://schemas.openxmlformats.org/drawingml/2006/main" xmlns:p="http://schemas.openxmlformats.org/presentationml/2006/main" xmlns:r="http://schemas.openxmlformats.org/officeDocument/2006/relationships">
-  <p:cSld>
-    <p:spTree>
-      <p:nvGrpSpPr>
-        <p:cNvPr id="1" name=""/>
-        <p:cNvGrpSpPr/>
-        <p:nvPr/>
-      </p:nvGrpSpPr>
-      <p:grpSpPr/>
-      <p:pic>
-        <p:nvPicPr>
-          <p:cNvPr id="2" name="Picture 1" descr="rteu_logo_kucuk.jpg"/>
-          <p:cNvPicPr>
-            <a:picLocks noChangeAspect="1"/>
-          </p:cNvPicPr>
-          <p:nvPr/>
-        </p:nvPicPr>
-        <p:blipFill>
-          <a:blip r:embed="rId2"/>
-          <a:stretch>
-            <a:fillRect/>
-          </a:stretch>
-        </p:blipFill>
-        <p:spPr>
-          <a:xfrm>
-            <a:off x="640080" y="164592"/>
-            <a:ext cx="242773" cy="329184"/>
-          </a:xfrm>
-          <a:prstGeom prst="rect">
-            <a:avLst/>
-          </a:prstGeom>
-        </p:spPr>
-      </p:pic>
-      <p:sp>
-        <p:nvSpPr>
-          <p:cNvPr id="3" name="TextBox 2"/>
-          <p:cNvSpPr txBox="1"/>
-          <p:nvPr/>
-        </p:nvSpPr>
-        <p:spPr>
-          <a:xfrm>
-            <a:off x="1051560" y="182880"/>
-            <a:ext cx="7315200" cy="320040"/>
-          </a:xfrm>
-          <a:prstGeom prst="rect">
-            <a:avLst/>
-          </a:prstGeom>
-          <a:noFill/>
-        </p:spPr>
-        <p:txBody>
-          <a:bodyPr wrap="square" lIns="45720" rIns="45720">
-            <a:spAutoFit/>
-          </a:bodyPr>
-          <a:lstStyle/>
-          <a:p>
-            <a:r>
-              <a:rPr sz="1100" b="0">
-                <a:solidFill>
-                  <a:srgbClr val="5B6770"/>
-                </a:solidFill>
-              </a:rPr>
-              <a:t>CEN429 Secure Programming · Week 8</a:t>
-            </a:r>
-          </a:p>
-        </p:txBody>
-      </p:sp>
-      <p:sp>
-        <p:nvSpPr>
-          <p:cNvPr id="4" name="TextBox 3"/>
-          <p:cNvSpPr txBox="1"/>
-          <p:nvPr/>
-        </p:nvSpPr>
-        <p:spPr>
-          <a:xfrm>
-            <a:off x="640080" y="6446520"/>
-            <a:ext cx="7315200" cy="274320"/>
-          </a:xfrm>
-          <a:prstGeom prst="rect">
-            <a:avLst/>
-          </a:prstGeom>
-          <a:noFill/>
-        </p:spPr>
-        <p:txBody>
-          <a:bodyPr wrap="square" lIns="45720" rIns="45720">
-            <a:spAutoFit/>
-          </a:bodyPr>
-          <a:lstStyle/>
-          <a:p>
-            <a:r>
-              <a:rPr sz="1000" b="0">
-                <a:solidFill>
-                  <a:srgbClr val="5B6770"/>
-                </a:solidFill>
-              </a:rPr>
-              <a:t>RTEU Computer Engineering · 2026-2027 Fall</a:t>
-            </a:r>
-          </a:p>
-        </p:txBody>
-      </p:sp>
-      <p:sp>
-        <p:nvSpPr>
-          <p:cNvPr id="5" name="TextBox 4"/>
-          <p:cNvSpPr txBox="1"/>
-          <p:nvPr/>
-        </p:nvSpPr>
-        <p:spPr>
-          <a:xfrm>
-            <a:off x="10637215" y="6446520"/>
-            <a:ext cx="914400" cy="274320"/>
-          </a:xfrm>
-          <a:prstGeom prst="rect">
-            <a:avLst/>
-          </a:prstGeom>
-          <a:noFill/>
-        </p:spPr>
-        <p:txBody>
-          <a:bodyPr wrap="square" lIns="45720" rIns="45720">
-            <a:spAutoFit/>
-          </a:bodyPr>
-          <a:lstStyle/>
-          <a:p>
-            <a:pPr algn="r"/>
-            <a:r>
-              <a:rPr sz="1000" b="0">
-                <a:solidFill>
-                  <a:srgbClr val="5B6770"/>
-                </a:solidFill>
-              </a:rPr>
-              <a:t>6</a:t>
+              <a:t>4</a:t>
             </a:r>
           </a:p>
         </p:txBody>
@@ -13911,6 +10588,40 @@
           </a:graphicData>
         </a:graphic>
       </p:graphicFrame>
+      <p:sp>
+        <p:nvSpPr>
+          <p:cNvPr id="8" name="TextBox 7"/>
+          <p:cNvSpPr txBox="1"/>
+          <p:nvPr/>
+        </p:nvSpPr>
+        <p:spPr>
+          <a:xfrm>
+            <a:off x="640080" y="4365345"/>
+            <a:ext cx="10911535" cy="704088"/>
+          </a:xfrm>
+          <a:prstGeom prst="rect">
+            <a:avLst/>
+          </a:prstGeom>
+          <a:noFill/>
+        </p:spPr>
+        <p:txBody>
+          <a:bodyPr wrap="square" lIns="45720" rIns="45720">
+            <a:spAutoFit/>
+          </a:bodyPr>
+          <a:lstStyle/>
+          <a:p>
+            <a:pPr algn="l"/>
+            <a:r>
+              <a:rPr sz="1800" b="0" i="1">
+                <a:solidFill>
+                  <a:srgbClr val="1F2D3A"/>
+                </a:solidFill>
+              </a:rPr>
+              <a:t>Note: Week 4 — three layers (code → compiler/OS → obfuscation); Week 5 — a managed language solves memory errors, not injection.</a:t>
+            </a:r>
+          </a:p>
+        </p:txBody>
+      </p:sp>
     </p:spTree>
   </p:cSld>
   <p:clrMapOvr>
@@ -13919,7 +10630,7 @@
 </p:sld>
 </file>
 
-<file path=ppt/slides/slide7.xml><?xml version="1.0" encoding="utf-8"?>
+<file path=ppt/slides/slide5.xml><?xml version="1.0" encoding="utf-8"?>
 <p:sld xmlns:a="http://schemas.openxmlformats.org/drawingml/2006/main" xmlns:p="http://schemas.openxmlformats.org/presentationml/2006/main" xmlns:r="http://schemas.openxmlformats.org/officeDocument/2006/relationships">
   <p:cSld>
     <p:spTree>
@@ -14048,7 +10759,7 @@
                   <a:srgbClr val="5B6770"/>
                 </a:solidFill>
               </a:rPr>
-              <a:t>7</a:t>
+              <a:t>5</a:t>
             </a:r>
           </a:p>
         </p:txBody>
@@ -14081,14 +10792,14 @@
                   <a:srgbClr val="006D77"/>
                 </a:solidFill>
               </a:rPr>
-              <a:t>Question Types — Diagram</a:t>
+              <a:t>Quiz-1 Scope — Diagram</a:t>
             </a:r>
           </a:p>
         </p:txBody>
       </p:sp>
       <p:pic>
         <p:nvPicPr>
-          <p:cNvPr id="7" name="Picture 6" descr="h08-02-soru-tipleri.png"/>
+          <p:cNvPr id="7" name="Picture 6" descr="h08-01-kapsam.png"/>
           <p:cNvPicPr>
             <a:picLocks noChangeAspect="1"/>
           </p:cNvPicPr>
@@ -14102,8 +10813,8 @@
         </p:blipFill>
         <p:spPr>
           <a:xfrm>
-            <a:off x="2046645" y="1325880"/>
-            <a:ext cx="8098404" cy="3210484"/>
+            <a:off x="1971189" y="1325880"/>
+            <a:ext cx="8249317" cy="4828032"/>
           </a:xfrm>
           <a:prstGeom prst="rect">
             <a:avLst/>
@@ -14118,7 +10829,7 @@
 </p:sld>
 </file>
 
-<file path=ppt/slides/slide8.xml><?xml version="1.0" encoding="utf-8"?>
+<file path=ppt/slides/slide6.xml><?xml version="1.0" encoding="utf-8"?>
 <p:sld xmlns:a="http://schemas.openxmlformats.org/drawingml/2006/main" xmlns:p="http://schemas.openxmlformats.org/presentationml/2006/main" xmlns:r="http://schemas.openxmlformats.org/officeDocument/2006/relationships">
   <p:cSld>
     <p:spTree>
@@ -14247,7 +10958,7 @@
                   <a:srgbClr val="5B6770"/>
                 </a:solidFill>
               </a:rPr>
-              <a:t>8</a:t>
+              <a:t>6</a:t>
             </a:r>
           </a:p>
         </p:txBody>
@@ -14840,7 +11551,7 @@
 </p:sld>
 </file>
 
-<file path=ppt/slides/slide9.xml><?xml version="1.0" encoding="utf-8"?>
+<file path=ppt/slides/slide7.xml><?xml version="1.0" encoding="utf-8"?>
 <p:sld xmlns:a="http://schemas.openxmlformats.org/drawingml/2006/main" xmlns:p="http://schemas.openxmlformats.org/presentationml/2006/main" xmlns:r="http://schemas.openxmlformats.org/officeDocument/2006/relationships">
   <p:cSld>
     <p:spTree>
@@ -14969,7 +11680,7 @@
                   <a:srgbClr val="5B6770"/>
                 </a:solidFill>
               </a:rPr>
-              <a:t>9</a:t>
+              <a:t>7</a:t>
             </a:r>
           </a:p>
         </p:txBody>
@@ -15627,6 +12338,732 @@
           </a:graphicData>
         </a:graphic>
       </p:graphicFrame>
+    </p:spTree>
+  </p:cSld>
+  <p:clrMapOvr>
+    <a:masterClrMapping/>
+  </p:clrMapOvr>
+</p:sld>
+</file>
+
+<file path=ppt/slides/slide8.xml><?xml version="1.0" encoding="utf-8"?>
+<p:sld xmlns:a="http://schemas.openxmlformats.org/drawingml/2006/main" xmlns:p="http://schemas.openxmlformats.org/presentationml/2006/main" xmlns:r="http://schemas.openxmlformats.org/officeDocument/2006/relationships">
+  <p:cSld>
+    <p:spTree>
+      <p:nvGrpSpPr>
+        <p:cNvPr id="1" name=""/>
+        <p:cNvGrpSpPr/>
+        <p:nvPr/>
+      </p:nvGrpSpPr>
+      <p:grpSpPr/>
+      <p:pic>
+        <p:nvPicPr>
+          <p:cNvPr id="2" name="Picture 1" descr="rteu_logo_kucuk.jpg"/>
+          <p:cNvPicPr>
+            <a:picLocks noChangeAspect="1"/>
+          </p:cNvPicPr>
+          <p:nvPr/>
+        </p:nvPicPr>
+        <p:blipFill>
+          <a:blip r:embed="rId2"/>
+          <a:stretch>
+            <a:fillRect/>
+          </a:stretch>
+        </p:blipFill>
+        <p:spPr>
+          <a:xfrm>
+            <a:off x="640080" y="164592"/>
+            <a:ext cx="242773" cy="329184"/>
+          </a:xfrm>
+          <a:prstGeom prst="rect">
+            <a:avLst/>
+          </a:prstGeom>
+        </p:spPr>
+      </p:pic>
+      <p:sp>
+        <p:nvSpPr>
+          <p:cNvPr id="3" name="TextBox 2"/>
+          <p:cNvSpPr txBox="1"/>
+          <p:nvPr/>
+        </p:nvSpPr>
+        <p:spPr>
+          <a:xfrm>
+            <a:off x="1051560" y="182880"/>
+            <a:ext cx="7315200" cy="320040"/>
+          </a:xfrm>
+          <a:prstGeom prst="rect">
+            <a:avLst/>
+          </a:prstGeom>
+          <a:noFill/>
+        </p:spPr>
+        <p:txBody>
+          <a:bodyPr wrap="square" lIns="45720" rIns="45720">
+            <a:spAutoFit/>
+          </a:bodyPr>
+          <a:lstStyle/>
+          <a:p>
+            <a:r>
+              <a:rPr sz="1100" b="0">
+                <a:solidFill>
+                  <a:srgbClr val="5B6770"/>
+                </a:solidFill>
+              </a:rPr>
+              <a:t>CEN429 Secure Programming · Week 8</a:t>
+            </a:r>
+          </a:p>
+        </p:txBody>
+      </p:sp>
+      <p:sp>
+        <p:nvSpPr>
+          <p:cNvPr id="4" name="TextBox 3"/>
+          <p:cNvSpPr txBox="1"/>
+          <p:nvPr/>
+        </p:nvSpPr>
+        <p:spPr>
+          <a:xfrm>
+            <a:off x="640080" y="6446520"/>
+            <a:ext cx="7315200" cy="274320"/>
+          </a:xfrm>
+          <a:prstGeom prst="rect">
+            <a:avLst/>
+          </a:prstGeom>
+          <a:noFill/>
+        </p:spPr>
+        <p:txBody>
+          <a:bodyPr wrap="square" lIns="45720" rIns="45720">
+            <a:spAutoFit/>
+          </a:bodyPr>
+          <a:lstStyle/>
+          <a:p>
+            <a:r>
+              <a:rPr sz="1000" b="0">
+                <a:solidFill>
+                  <a:srgbClr val="5B6770"/>
+                </a:solidFill>
+              </a:rPr>
+              <a:t>RTEU Computer Engineering · 2026-2027 Fall</a:t>
+            </a:r>
+          </a:p>
+        </p:txBody>
+      </p:sp>
+      <p:sp>
+        <p:nvSpPr>
+          <p:cNvPr id="5" name="TextBox 4"/>
+          <p:cNvSpPr txBox="1"/>
+          <p:nvPr/>
+        </p:nvSpPr>
+        <p:spPr>
+          <a:xfrm>
+            <a:off x="10637215" y="6446520"/>
+            <a:ext cx="914400" cy="274320"/>
+          </a:xfrm>
+          <a:prstGeom prst="rect">
+            <a:avLst/>
+          </a:prstGeom>
+          <a:noFill/>
+        </p:spPr>
+        <p:txBody>
+          <a:bodyPr wrap="square" lIns="45720" rIns="45720">
+            <a:spAutoFit/>
+          </a:bodyPr>
+          <a:lstStyle/>
+          <a:p>
+            <a:pPr algn="r"/>
+            <a:r>
+              <a:rPr sz="1000" b="0">
+                <a:solidFill>
+                  <a:srgbClr val="5B6770"/>
+                </a:solidFill>
+              </a:rPr>
+              <a:t>8</a:t>
+            </a:r>
+          </a:p>
+        </p:txBody>
+      </p:sp>
+      <p:sp>
+        <p:nvSpPr>
+          <p:cNvPr id="6" name="TextBox 5"/>
+          <p:cNvSpPr txBox="1"/>
+          <p:nvPr/>
+        </p:nvSpPr>
+        <p:spPr>
+          <a:xfrm>
+            <a:off x="640080" y="548640"/>
+            <a:ext cx="10911535" cy="731520"/>
+          </a:xfrm>
+          <a:prstGeom prst="rect">
+            <a:avLst/>
+          </a:prstGeom>
+          <a:noFill/>
+        </p:spPr>
+        <p:txBody>
+          <a:bodyPr wrap="square" lIns="45720" rIns="45720" anchor="ctr">
+            <a:spAutoFit/>
+          </a:bodyPr>
+          <a:lstStyle/>
+          <a:p>
+            <a:r>
+              <a:rPr sz="2600" b="1">
+                <a:solidFill>
+                  <a:srgbClr val="006D77"/>
+                </a:solidFill>
+              </a:rPr>
+              <a:t>Frequently Confused (3)</a:t>
+            </a:r>
+          </a:p>
+        </p:txBody>
+      </p:sp>
+      <p:graphicFrame>
+        <p:nvGraphicFramePr>
+          <p:cNvPr id="7" name="Table 6"/>
+          <p:cNvGraphicFramePr>
+            <a:graphicFrameLocks noGrp="1"/>
+          </p:cNvGraphicFramePr>
+          <p:nvPr/>
+        </p:nvGraphicFramePr>
+        <p:xfrm>
+          <a:off x="640080" y="1325880"/>
+          <a:ext cx="10184097" cy="1755648"/>
+        </p:xfrm>
+        <a:graphic>
+          <a:graphicData uri="http://schemas.openxmlformats.org/drawingml/2006/table">
+            <a:tbl>
+              <a:tblPr firstRow="1" bandRow="1">
+                <a:tableStyleId>{5C22544A-7EE6-4342-B048-85BDC9FD1C3A}</a:tableStyleId>
+              </a:tblPr>
+              <a:tblGrid>
+                <a:gridCol w="2364165"/>
+                <a:gridCol w="3637178"/>
+                <a:gridCol w="4182754"/>
+              </a:tblGrid>
+              <a:tr h="351129">
+                <a:tc>
+                  <a:txBody>
+                    <a:bodyPr wrap="square"/>
+                    <a:lstStyle/>
+                    <a:p>
+                      <a:r>
+                        <a:rPr sz="1296" b="1">
+                          <a:solidFill>
+                            <a:srgbClr val="FFFFFF"/>
+                          </a:solidFill>
+                        </a:rPr>
+                        <a:t>A</a:t>
+                      </a:r>
+                    </a:p>
+                  </a:txBody>
+                  <a:tcPr marL="54864" marR="54864" marT="27432" marB="27432" anchor="ctr">
+                    <a:solidFill>
+                      <a:srgbClr val="006D77"/>
+                    </a:solidFill>
+                  </a:tcPr>
+                </a:tc>
+                <a:tc>
+                  <a:txBody>
+                    <a:bodyPr wrap="square"/>
+                    <a:lstStyle/>
+                    <a:p>
+                      <a:r>
+                        <a:rPr sz="1296" b="1">
+                          <a:solidFill>
+                            <a:srgbClr val="FFFFFF"/>
+                          </a:solidFill>
+                        </a:rPr>
+                        <a:t>B</a:t>
+                      </a:r>
+                    </a:p>
+                  </a:txBody>
+                  <a:tcPr marL="54864" marR="54864" marT="27432" marB="27432" anchor="ctr">
+                    <a:solidFill>
+                      <a:srgbClr val="006D77"/>
+                    </a:solidFill>
+                  </a:tcPr>
+                </a:tc>
+                <a:tc>
+                  <a:txBody>
+                    <a:bodyPr wrap="square"/>
+                    <a:lstStyle/>
+                    <a:p>
+                      <a:r>
+                        <a:rPr sz="1296" b="1">
+                          <a:solidFill>
+                            <a:srgbClr val="FFFFFF"/>
+                          </a:solidFill>
+                        </a:rPr>
+                        <a:t>Difference</a:t>
+                      </a:r>
+                    </a:p>
+                  </a:txBody>
+                  <a:tcPr marL="54864" marR="54864" marT="27432" marB="27432" anchor="ctr">
+                    <a:solidFill>
+                      <a:srgbClr val="006D77"/>
+                    </a:solidFill>
+                  </a:tcPr>
+                </a:tc>
+              </a:tr>
+              <a:tr h="351129">
+                <a:tc>
+                  <a:txBody>
+                    <a:bodyPr wrap="square"/>
+                    <a:lstStyle/>
+                    <a:p>
+                      <a:r>
+                        <a:rPr sz="1296" b="0">
+                          <a:solidFill>
+                            <a:srgbClr val="1F2D3A"/>
+                          </a:solidFill>
+                        </a:rPr>
+                        <a:t>Bug</a:t>
+                      </a:r>
+                    </a:p>
+                  </a:txBody>
+                  <a:tcPr marL="54864" marR="54864" marT="27432" marB="27432" anchor="ctr">
+                    <a:solidFill>
+                      <a:srgbClr val="FFFFFF"/>
+                    </a:solidFill>
+                  </a:tcPr>
+                </a:tc>
+                <a:tc>
+                  <a:txBody>
+                    <a:bodyPr wrap="square"/>
+                    <a:lstStyle/>
+                    <a:p>
+                      <a:r>
+                        <a:rPr sz="1296" b="0">
+                          <a:solidFill>
+                            <a:srgbClr val="1F2D3A"/>
+                          </a:solidFill>
+                        </a:rPr>
+                        <a:t>Vulnerability</a:t>
+                      </a:r>
+                    </a:p>
+                  </a:txBody>
+                  <a:tcPr marL="54864" marR="54864" marT="27432" marB="27432" anchor="ctr">
+                    <a:solidFill>
+                      <a:srgbClr val="FFFFFF"/>
+                    </a:solidFill>
+                  </a:tcPr>
+                </a:tc>
+                <a:tc>
+                  <a:txBody>
+                    <a:bodyPr wrap="square"/>
+                    <a:lstStyle/>
+                    <a:p>
+                      <a:r>
+                        <a:rPr sz="1296" b="0">
+                          <a:solidFill>
+                            <a:srgbClr val="1F2D3A"/>
+                          </a:solidFill>
+                        </a:rPr>
+                        <a:t>An exploitable bug</a:t>
+                      </a:r>
+                    </a:p>
+                  </a:txBody>
+                  <a:tcPr marL="54864" marR="54864" marT="27432" marB="27432" anchor="ctr">
+                    <a:solidFill>
+                      <a:srgbClr val="FFFFFF"/>
+                    </a:solidFill>
+                  </a:tcPr>
+                </a:tc>
+              </a:tr>
+              <a:tr h="351129">
+                <a:tc>
+                  <a:txBody>
+                    <a:bodyPr wrap="square"/>
+                    <a:lstStyle/>
+                    <a:p>
+                      <a:r>
+                        <a:rPr sz="1296" b="0">
+                          <a:solidFill>
+                            <a:srgbClr val="1F2D3A"/>
+                          </a:solidFill>
+                        </a:rPr>
+                        <a:t>Black-box</a:t>
+                      </a:r>
+                    </a:p>
+                  </a:txBody>
+                  <a:tcPr marL="54864" marR="54864" marT="27432" marB="27432" anchor="ctr">
+                    <a:solidFill>
+                      <a:srgbClr val="EEF7F8"/>
+                    </a:solidFill>
+                  </a:tcPr>
+                </a:tc>
+                <a:tc>
+                  <a:txBody>
+                    <a:bodyPr wrap="square"/>
+                    <a:lstStyle/>
+                    <a:p>
+                      <a:r>
+                        <a:rPr sz="1296" b="0">
+                          <a:solidFill>
+                            <a:srgbClr val="1F2D3A"/>
+                          </a:solidFill>
+                        </a:rPr>
+                        <a:t>White-box (MATE)</a:t>
+                      </a:r>
+                    </a:p>
+                  </a:txBody>
+                  <a:tcPr marL="54864" marR="54864" marT="27432" marB="27432" anchor="ctr">
+                    <a:solidFill>
+                      <a:srgbClr val="EEF7F8"/>
+                    </a:solidFill>
+                  </a:tcPr>
+                </a:tc>
+                <a:tc>
+                  <a:txBody>
+                    <a:bodyPr wrap="square"/>
+                    <a:lstStyle/>
+                    <a:p>
+                      <a:r>
+                        <a:rPr sz="1296" b="0">
+                          <a:solidFill>
+                            <a:srgbClr val="1F2D3A"/>
+                          </a:solidFill>
+                        </a:rPr>
+                        <a:t>Has the program</a:t>
+                      </a:r>
+                    </a:p>
+                  </a:txBody>
+                  <a:tcPr marL="54864" marR="54864" marT="27432" marB="27432" anchor="ctr">
+                    <a:solidFill>
+                      <a:srgbClr val="EEF7F8"/>
+                    </a:solidFill>
+                  </a:tcPr>
+                </a:tc>
+              </a:tr>
+              <a:tr h="351129">
+                <a:tc>
+                  <a:txBody>
+                    <a:bodyPr wrap="square"/>
+                    <a:lstStyle/>
+                    <a:p>
+                      <a:r>
+                        <a:rPr sz="1296" b="0">
+                          <a:solidFill>
+                            <a:srgbClr val="1F2D3A"/>
+                          </a:solidFill>
+                        </a:rPr>
+                        <a:t>Symmetric</a:t>
+                      </a:r>
+                    </a:p>
+                  </a:txBody>
+                  <a:tcPr marL="54864" marR="54864" marT="27432" marB="27432" anchor="ctr">
+                    <a:solidFill>
+                      <a:srgbClr val="FFFFFF"/>
+                    </a:solidFill>
+                  </a:tcPr>
+                </a:tc>
+                <a:tc>
+                  <a:txBody>
+                    <a:bodyPr wrap="square"/>
+                    <a:lstStyle/>
+                    <a:p>
+                      <a:r>
+                        <a:rPr sz="1296" b="0">
+                          <a:solidFill>
+                            <a:srgbClr val="1F2D3A"/>
+                          </a:solidFill>
+                        </a:rPr>
+                        <a:t>Asymmetric</a:t>
+                      </a:r>
+                    </a:p>
+                  </a:txBody>
+                  <a:tcPr marL="54864" marR="54864" marT="27432" marB="27432" anchor="ctr">
+                    <a:solidFill>
+                      <a:srgbClr val="FFFFFF"/>
+                    </a:solidFill>
+                  </a:tcPr>
+                </a:tc>
+                <a:tc>
+                  <a:txBody>
+                    <a:bodyPr wrap="square"/>
+                    <a:lstStyle/>
+                    <a:p>
+                      <a:r>
+                        <a:rPr sz="1296" b="0">
+                          <a:solidFill>
+                            <a:srgbClr val="1F2D3A"/>
+                          </a:solidFill>
+                        </a:rPr>
+                        <a:t>Single / paired key</a:t>
+                      </a:r>
+                    </a:p>
+                  </a:txBody>
+                  <a:tcPr marL="54864" marR="54864" marT="27432" marB="27432" anchor="ctr">
+                    <a:solidFill>
+                      <a:srgbClr val="FFFFFF"/>
+                    </a:solidFill>
+                  </a:tcPr>
+                </a:tc>
+              </a:tr>
+              <a:tr h="351132">
+                <a:tc>
+                  <a:txBody>
+                    <a:bodyPr wrap="square"/>
+                    <a:lstStyle/>
+                    <a:p>
+                      <a:r>
+                        <a:rPr sz="1296" b="0">
+                          <a:solidFill>
+                            <a:srgbClr val="1F2D3A"/>
+                          </a:solidFill>
+                        </a:rPr>
+                        <a:t>AEAD</a:t>
+                      </a:r>
+                    </a:p>
+                  </a:txBody>
+                  <a:tcPr marL="54864" marR="54864" marT="27432" marB="27432" anchor="ctr">
+                    <a:solidFill>
+                      <a:srgbClr val="EEF7F8"/>
+                    </a:solidFill>
+                  </a:tcPr>
+                </a:tc>
+                <a:tc>
+                  <a:txBody>
+                    <a:bodyPr wrap="square"/>
+                    <a:lstStyle/>
+                    <a:p>
+                      <a:r>
+                        <a:rPr sz="1296" b="0">
+                          <a:solidFill>
+                            <a:srgbClr val="1F2D3A"/>
+                          </a:solidFill>
+                        </a:rPr>
+                        <a:t>Encryption only</a:t>
+                      </a:r>
+                    </a:p>
+                  </a:txBody>
+                  <a:tcPr marL="54864" marR="54864" marT="27432" marB="27432" anchor="ctr">
+                    <a:solidFill>
+                      <a:srgbClr val="EEF7F8"/>
+                    </a:solidFill>
+                  </a:tcPr>
+                </a:tc>
+                <a:tc>
+                  <a:txBody>
+                    <a:bodyPr wrap="square"/>
+                    <a:lstStyle/>
+                    <a:p>
+                      <a:r>
+                        <a:rPr sz="1296" b="0">
+                          <a:solidFill>
+                            <a:srgbClr val="1F2D3A"/>
+                          </a:solidFill>
+                        </a:rPr>
+                        <a:t>+ integrity</a:t>
+                      </a:r>
+                    </a:p>
+                  </a:txBody>
+                  <a:tcPr marL="54864" marR="54864" marT="27432" marB="27432" anchor="ctr">
+                    <a:solidFill>
+                      <a:srgbClr val="EEF7F8"/>
+                    </a:solidFill>
+                  </a:tcPr>
+                </a:tc>
+              </a:tr>
+            </a:tbl>
+          </a:graphicData>
+        </a:graphic>
+      </p:graphicFrame>
+    </p:spTree>
+  </p:cSld>
+  <p:clrMapOvr>
+    <a:masterClrMapping/>
+  </p:clrMapOvr>
+</p:sld>
+</file>
+
+<file path=ppt/slides/slide9.xml><?xml version="1.0" encoding="utf-8"?>
+<p:sld xmlns:a="http://schemas.openxmlformats.org/drawingml/2006/main" xmlns:p="http://schemas.openxmlformats.org/presentationml/2006/main" xmlns:r="http://schemas.openxmlformats.org/officeDocument/2006/relationships">
+  <p:cSld>
+    <p:spTree>
+      <p:nvGrpSpPr>
+        <p:cNvPr id="1" name=""/>
+        <p:cNvGrpSpPr/>
+        <p:nvPr/>
+      </p:nvGrpSpPr>
+      <p:grpSpPr/>
+      <p:pic>
+        <p:nvPicPr>
+          <p:cNvPr id="2" name="Picture 1" descr="rteu_logo_kucuk.jpg"/>
+          <p:cNvPicPr>
+            <a:picLocks noChangeAspect="1"/>
+          </p:cNvPicPr>
+          <p:nvPr/>
+        </p:nvPicPr>
+        <p:blipFill>
+          <a:blip r:embed="rId2"/>
+          <a:stretch>
+            <a:fillRect/>
+          </a:stretch>
+        </p:blipFill>
+        <p:spPr>
+          <a:xfrm>
+            <a:off x="640080" y="164592"/>
+            <a:ext cx="242773" cy="329184"/>
+          </a:xfrm>
+          <a:prstGeom prst="rect">
+            <a:avLst/>
+          </a:prstGeom>
+        </p:spPr>
+      </p:pic>
+      <p:sp>
+        <p:nvSpPr>
+          <p:cNvPr id="3" name="TextBox 2"/>
+          <p:cNvSpPr txBox="1"/>
+          <p:nvPr/>
+        </p:nvSpPr>
+        <p:spPr>
+          <a:xfrm>
+            <a:off x="1051560" y="182880"/>
+            <a:ext cx="7315200" cy="320040"/>
+          </a:xfrm>
+          <a:prstGeom prst="rect">
+            <a:avLst/>
+          </a:prstGeom>
+          <a:noFill/>
+        </p:spPr>
+        <p:txBody>
+          <a:bodyPr wrap="square" lIns="45720" rIns="45720">
+            <a:spAutoFit/>
+          </a:bodyPr>
+          <a:lstStyle/>
+          <a:p>
+            <a:r>
+              <a:rPr sz="1100" b="0">
+                <a:solidFill>
+                  <a:srgbClr val="5B6770"/>
+                </a:solidFill>
+              </a:rPr>
+              <a:t>CEN429 Secure Programming · Week 8</a:t>
+            </a:r>
+          </a:p>
+        </p:txBody>
+      </p:sp>
+      <p:sp>
+        <p:nvSpPr>
+          <p:cNvPr id="4" name="TextBox 3"/>
+          <p:cNvSpPr txBox="1"/>
+          <p:nvPr/>
+        </p:nvSpPr>
+        <p:spPr>
+          <a:xfrm>
+            <a:off x="640080" y="6446520"/>
+            <a:ext cx="7315200" cy="274320"/>
+          </a:xfrm>
+          <a:prstGeom prst="rect">
+            <a:avLst/>
+          </a:prstGeom>
+          <a:noFill/>
+        </p:spPr>
+        <p:txBody>
+          <a:bodyPr wrap="square" lIns="45720" rIns="45720">
+            <a:spAutoFit/>
+          </a:bodyPr>
+          <a:lstStyle/>
+          <a:p>
+            <a:r>
+              <a:rPr sz="1000" b="0">
+                <a:solidFill>
+                  <a:srgbClr val="5B6770"/>
+                </a:solidFill>
+              </a:rPr>
+              <a:t>RTEU Computer Engineering · 2026-2027 Fall</a:t>
+            </a:r>
+          </a:p>
+        </p:txBody>
+      </p:sp>
+      <p:sp>
+        <p:nvSpPr>
+          <p:cNvPr id="5" name="TextBox 4"/>
+          <p:cNvSpPr txBox="1"/>
+          <p:nvPr/>
+        </p:nvSpPr>
+        <p:spPr>
+          <a:xfrm>
+            <a:off x="10637215" y="6446520"/>
+            <a:ext cx="914400" cy="274320"/>
+          </a:xfrm>
+          <a:prstGeom prst="rect">
+            <a:avLst/>
+          </a:prstGeom>
+          <a:noFill/>
+        </p:spPr>
+        <p:txBody>
+          <a:bodyPr wrap="square" lIns="45720" rIns="45720">
+            <a:spAutoFit/>
+          </a:bodyPr>
+          <a:lstStyle/>
+          <a:p>
+            <a:pPr algn="r"/>
+            <a:r>
+              <a:rPr sz="1000" b="0">
+                <a:solidFill>
+                  <a:srgbClr val="5B6770"/>
+                </a:solidFill>
+              </a:rPr>
+              <a:t>9</a:t>
+            </a:r>
+          </a:p>
+        </p:txBody>
+      </p:sp>
+      <p:sp>
+        <p:nvSpPr>
+          <p:cNvPr id="6" name="TextBox 5"/>
+          <p:cNvSpPr txBox="1"/>
+          <p:nvPr/>
+        </p:nvSpPr>
+        <p:spPr>
+          <a:xfrm>
+            <a:off x="640080" y="548640"/>
+            <a:ext cx="10911535" cy="731520"/>
+          </a:xfrm>
+          <a:prstGeom prst="rect">
+            <a:avLst/>
+          </a:prstGeom>
+          <a:noFill/>
+        </p:spPr>
+        <p:txBody>
+          <a:bodyPr wrap="square" lIns="45720" rIns="45720" anchor="ctr">
+            <a:spAutoFit/>
+          </a:bodyPr>
+          <a:lstStyle/>
+          <a:p>
+            <a:r>
+              <a:rPr sz="3000" b="1">
+                <a:solidFill>
+                  <a:srgbClr val="006D77"/>
+                </a:solidFill>
+              </a:rPr>
+              <a:t>Question Types — Diagram</a:t>
+            </a:r>
+          </a:p>
+        </p:txBody>
+      </p:sp>
+      <p:pic>
+        <p:nvPicPr>
+          <p:cNvPr id="7" name="Picture 6" descr="h08-02-soru-tipleri.png"/>
+          <p:cNvPicPr>
+            <a:picLocks noChangeAspect="1"/>
+          </p:cNvPicPr>
+          <p:nvPr/>
+        </p:nvPicPr>
+        <p:blipFill>
+          <a:blip r:embed="rId3"/>
+          <a:stretch>
+            <a:fillRect/>
+          </a:stretch>
+        </p:blipFill>
+        <p:spPr>
+          <a:xfrm>
+            <a:off x="640080" y="1325880"/>
+            <a:ext cx="10911535" cy="2380977"/>
+          </a:xfrm>
+          <a:prstGeom prst="rect">
+            <a:avLst/>
+          </a:prstGeom>
+        </p:spPr>
+      </p:pic>
     </p:spTree>
   </p:cSld>
   <p:clrMapOvr>
